--- a/docs/Sprint1_IRRBB_newera.pptx
+++ b/docs/Sprint1_IRRBB_newera.pptx
@@ -1,22 +1,25 @@
 
 <file path=ppt/presentation.xml><?xml version="1.0" encoding="utf-8"?>
-<p:presentation xmlns:a="http://schemas.openxmlformats.org/drawingml/2006/main" xmlns:r="http://schemas.openxmlformats.org/officeDocument/2006/relationships" xmlns:p="http://schemas.openxmlformats.org/presentationml/2006/main" autoCompressPictures="0">
+<p:presentation xmlns:a="http://schemas.openxmlformats.org/drawingml/2006/main" xmlns:r="http://schemas.openxmlformats.org/officeDocument/2006/relationships" xmlns:p="http://schemas.openxmlformats.org/presentationml/2006/main" showSpecialPlsOnTitleSld="0" saveSubsetFonts="1" autoCompressPictures="0">
   <p:sldMasterIdLst>
     <p:sldMasterId id="2147483648" r:id="rId1"/>
   </p:sldMasterIdLst>
   <p:notesMasterIdLst>
-    <p:notesMasterId r:id="rId4"/>
+    <p:notesMasterId r:id="rId11"/>
   </p:notesMasterIdLst>
+  <p:handoutMasterIdLst>
+    <p:handoutMasterId r:id="rId12"/>
+  </p:handoutMasterIdLst>
   <p:sldIdLst>
-    <p:sldId id="256" r:id="rId3"/>
-    <p:sldId id="257" r:id="rId5"/>
-    <p:sldId id="258" r:id="rId6"/>
-    <p:sldId id="259" r:id="rId7"/>
-    <p:sldId id="260" r:id="rId8"/>
-    <p:sldId id="261" r:id="rId9"/>
-    <p:sldId id="262" r:id="rId10"/>
-    <p:sldId id="263" r:id="rId11"/>
-    <p:sldId id="264" r:id="rId12"/>
+    <p:sldId id="256" r:id="rId2"/>
+    <p:sldId id="257" r:id="rId3"/>
+    <p:sldId id="258" r:id="rId4"/>
+    <p:sldId id="259" r:id="rId5"/>
+    <p:sldId id="260" r:id="rId6"/>
+    <p:sldId id="261" r:id="rId7"/>
+    <p:sldId id="262" r:id="rId8"/>
+    <p:sldId id="263" r:id="rId9"/>
+    <p:sldId id="264" r:id="rId10"/>
   </p:sldIdLst>
   <p:sldSz cx="9144000" cy="5143500" type="screen16x9"/>
   <p:notesSz cx="6858000" cy="9144000"/>
@@ -118,12 +121,12 @@
   <p:extLst>
     <p:ext uri="{EFAFB233-063F-42B5-8137-9DF3F51BA10A}">
       <p15:sldGuideLst xmlns:p15="http://schemas.microsoft.com/office/powerpoint/2012/main">
-        <p15:guide id="1" orient="horz" pos="2160" userDrawn="1">
+        <p15:guide id="1" orient="horz" pos="2160">
           <p15:clr>
             <a:srgbClr val="A4A3A4"/>
           </p15:clr>
         </p15:guide>
-        <p15:guide id="2" pos="2880" userDrawn="1">
+        <p15:guide id="2" pos="2880">
           <p15:clr>
             <a:srgbClr val="A4A3A4"/>
           </p15:clr>
@@ -132,6 +135,196 @@
     </p:ext>
   </p:extLst>
 </p:presentation>
+</file>
+
+<file path=ppt/handoutMasters/handoutMaster1.xml><?xml version="1.0" encoding="utf-8"?>
+<p:handoutMaster xmlns:a="http://schemas.openxmlformats.org/drawingml/2006/main" xmlns:r="http://schemas.openxmlformats.org/officeDocument/2006/relationships" xmlns:p="http://schemas.openxmlformats.org/presentationml/2006/main">
+  <p:cSld>
+    <p:bg>
+      <p:bgRef idx="1001">
+        <a:schemeClr val="bg1"/>
+      </p:bgRef>
+    </p:bg>
+    <p:spTree>
+      <p:nvGrpSpPr>
+        <p:cNvPr id="1" name=""/>
+        <p:cNvGrpSpPr/>
+        <p:nvPr/>
+      </p:nvGrpSpPr>
+      <p:grpSpPr>
+        <a:xfrm>
+          <a:off x="0" y="0"/>
+          <a:ext cx="0" cy="0"/>
+          <a:chOff x="0" y="0"/>
+          <a:chExt cx="0" cy="0"/>
+        </a:xfrm>
+      </p:grpSpPr>
+      <p:sp>
+        <p:nvSpPr>
+          <p:cNvPr id="2" name="Верхний колонтитул 1">
+            <a:extLst>
+              <a:ext uri="{FF2B5EF4-FFF2-40B4-BE49-F238E27FC236}">
+                <a16:creationId xmlns:a16="http://schemas.microsoft.com/office/drawing/2014/main" id="{31ABB724-DA0D-41E1-E593-45EFE414EE5A}"/>
+              </a:ext>
+            </a:extLst>
+          </p:cNvPr>
+          <p:cNvSpPr>
+            <a:spLocks noGrp="1"/>
+          </p:cNvSpPr>
+          <p:nvPr>
+            <p:ph type="hdr" sz="quarter"/>
+          </p:nvPr>
+        </p:nvSpPr>
+        <p:spPr>
+          <a:xfrm>
+            <a:off x="0" y="0"/>
+            <a:ext cx="2971800" cy="458788"/>
+          </a:xfrm>
+          <a:prstGeom prst="rect">
+            <a:avLst/>
+          </a:prstGeom>
+        </p:spPr>
+        <p:txBody>
+          <a:bodyPr vert="horz" lIns="91440" tIns="45720" rIns="91440" bIns="45720" rtlCol="0"/>
+          <a:lstStyle>
+            <a:lvl1pPr algn="l">
+              <a:defRPr sz="1200"/>
+            </a:lvl1pPr>
+          </a:lstStyle>
+          <a:p>
+            <a:endParaRPr lang="ru-RU"/>
+          </a:p>
+        </p:txBody>
+      </p:sp>
+      <p:sp>
+        <p:nvSpPr>
+          <p:cNvPr id="3" name="Дата 2">
+            <a:extLst>
+              <a:ext uri="{FF2B5EF4-FFF2-40B4-BE49-F238E27FC236}">
+                <a16:creationId xmlns:a16="http://schemas.microsoft.com/office/drawing/2014/main" id="{3453C1F1-015D-3C43-5045-3EFA67DF5C93}"/>
+              </a:ext>
+            </a:extLst>
+          </p:cNvPr>
+          <p:cNvSpPr>
+            <a:spLocks noGrp="1"/>
+          </p:cNvSpPr>
+          <p:nvPr>
+            <p:ph type="dt" sz="quarter" idx="1"/>
+          </p:nvPr>
+        </p:nvSpPr>
+        <p:spPr>
+          <a:xfrm>
+            <a:off x="3884613" y="0"/>
+            <a:ext cx="2971800" cy="458788"/>
+          </a:xfrm>
+          <a:prstGeom prst="rect">
+            <a:avLst/>
+          </a:prstGeom>
+        </p:spPr>
+        <p:txBody>
+          <a:bodyPr vert="horz" lIns="91440" tIns="45720" rIns="91440" bIns="45720" rtlCol="0"/>
+          <a:lstStyle>
+            <a:lvl1pPr algn="r">
+              <a:defRPr sz="1200"/>
+            </a:lvl1pPr>
+          </a:lstStyle>
+          <a:p>
+            <a:fld id="{D6F03139-1D79-6A4F-9CF4-BB5263833832}" type="datetimeFigureOut">
+              <a:rPr lang="ru-RU" smtClean="0"/>
+              <a:t>10.10.2026</a:t>
+            </a:fld>
+            <a:endParaRPr lang="ru-RU"/>
+          </a:p>
+        </p:txBody>
+      </p:sp>
+      <p:sp>
+        <p:nvSpPr>
+          <p:cNvPr id="4" name="Нижний колонтитул 3">
+            <a:extLst>
+              <a:ext uri="{FF2B5EF4-FFF2-40B4-BE49-F238E27FC236}">
+                <a16:creationId xmlns:a16="http://schemas.microsoft.com/office/drawing/2014/main" id="{8F3B7663-5960-1034-5F4F-4F7816D74B05}"/>
+              </a:ext>
+            </a:extLst>
+          </p:cNvPr>
+          <p:cNvSpPr>
+            <a:spLocks noGrp="1"/>
+          </p:cNvSpPr>
+          <p:nvPr>
+            <p:ph type="ftr" sz="quarter" idx="2"/>
+          </p:nvPr>
+        </p:nvSpPr>
+        <p:spPr>
+          <a:xfrm>
+            <a:off x="0" y="8685213"/>
+            <a:ext cx="2971800" cy="458787"/>
+          </a:xfrm>
+          <a:prstGeom prst="rect">
+            <a:avLst/>
+          </a:prstGeom>
+        </p:spPr>
+        <p:txBody>
+          <a:bodyPr vert="horz" lIns="91440" tIns="45720" rIns="91440" bIns="45720" rtlCol="0" anchor="b"/>
+          <a:lstStyle>
+            <a:lvl1pPr algn="l">
+              <a:defRPr sz="1200"/>
+            </a:lvl1pPr>
+          </a:lstStyle>
+          <a:p>
+            <a:endParaRPr lang="ru-RU"/>
+          </a:p>
+        </p:txBody>
+      </p:sp>
+      <p:sp>
+        <p:nvSpPr>
+          <p:cNvPr id="5" name="Номер слайда 4">
+            <a:extLst>
+              <a:ext uri="{FF2B5EF4-FFF2-40B4-BE49-F238E27FC236}">
+                <a16:creationId xmlns:a16="http://schemas.microsoft.com/office/drawing/2014/main" id="{A11D8D39-C573-81A5-A80F-1AB5EA6BD984}"/>
+              </a:ext>
+            </a:extLst>
+          </p:cNvPr>
+          <p:cNvSpPr>
+            <a:spLocks noGrp="1"/>
+          </p:cNvSpPr>
+          <p:nvPr>
+            <p:ph type="sldNum" sz="quarter" idx="3"/>
+          </p:nvPr>
+        </p:nvSpPr>
+        <p:spPr>
+          <a:xfrm>
+            <a:off x="3884613" y="8685213"/>
+            <a:ext cx="2971800" cy="458787"/>
+          </a:xfrm>
+          <a:prstGeom prst="rect">
+            <a:avLst/>
+          </a:prstGeom>
+        </p:spPr>
+        <p:txBody>
+          <a:bodyPr vert="horz" lIns="91440" tIns="45720" rIns="91440" bIns="45720" rtlCol="0" anchor="b"/>
+          <a:lstStyle>
+            <a:lvl1pPr algn="r">
+              <a:defRPr sz="1200"/>
+            </a:lvl1pPr>
+          </a:lstStyle>
+          <a:p>
+            <a:fld id="{4B92A659-968E-2746-8855-7375F3491A11}" type="slidenum">
+              <a:rPr lang="ru-RU" smtClean="0"/>
+              <a:t>‹#›</a:t>
+            </a:fld>
+            <a:endParaRPr lang="ru-RU"/>
+          </a:p>
+        </p:txBody>
+      </p:sp>
+    </p:spTree>
+    <p:extLst>
+      <p:ext uri="{BB962C8B-B14F-4D97-AF65-F5344CB8AC3E}">
+        <p14:creationId xmlns:p14="http://schemas.microsoft.com/office/powerpoint/2010/main" val="274840025"/>
+      </p:ext>
+    </p:extLst>
+  </p:cSld>
+  <p:clrMap bg1="lt1" tx1="dk1" bg2="lt2" tx2="dk2" accent1="accent1" accent2="accent2" accent3="accent3" accent4="accent4" accent5="accent5" accent6="accent6" hlink="hlink" folHlink="folHlink"/>
+  <p:hf sldNum="0" hdr="0" ftr="0" dt="0"/>
+</p:handoutMaster>
 </file>
 
 <file path=ppt/notesMasters/notesMaster1.xml><?xml version="1.0" encoding="utf-8"?>
@@ -157,8 +350,14 @@
         </a:xfrm>
       </p:grpSpPr>
     </p:spTree>
+    <p:extLst>
+      <p:ext uri="{BB962C8B-B14F-4D97-AF65-F5344CB8AC3E}">
+        <p14:creationId xmlns:p14="http://schemas.microsoft.com/office/powerpoint/2010/main" val="353310279"/>
+      </p:ext>
+    </p:extLst>
   </p:cSld>
   <p:clrMap bg1="lt1" tx1="dk1" bg2="lt2" tx2="dk2" accent1="accent1" accent2="accent2" accent3="accent3" accent4="accent4" accent5="accent5" accent6="accent6" hlink="hlink" folHlink="folHlink"/>
+  <p:hf sldNum="0" hdr="0" ftr="0" dt="0"/>
   <p:notesStyle>
     <a:lvl1pPr marL="0" algn="l" defTabSz="914400" rtl="0" eaLnBrk="1" latinLnBrk="0" hangingPunct="1">
       <a:defRPr sz="1200" kern="1200">
@@ -298,23 +497,9 @@
           <a:bodyPr/>
           <a:lstStyle/>
           <a:p>
-            <a:r>
-              <a:t>Здравствуйте, мы команда 2. Наш проект — стресс-сценарии процентного риска на кривой доходности ОФЗ.</a:t>
-            </a:r>
-          </a:p>
-        </p:txBody>
-      </p:sp>
-      <p:sp>
-        <p:nvSpPr>
-          <p:cNvPr id="4" name="Slide Number Placeholder 3"/>
-          <p:cNvSpPr>
-            <a:spLocks noGrp="1"/>
-          </p:cNvSpPr>
-          <p:nvPr>
-            <p:ph type="sldNum" sz="quarter" idx="5"/>
-          </p:nvPr>
-        </p:nvSpPr>
-        <p:spPr/>
+            <a:endParaRPr dirty="0"/>
+          </a:p>
+        </p:txBody>
       </p:sp>
     </p:spTree>
   </p:cSld>
@@ -368,23 +553,9 @@
           <a:bodyPr/>
           <a:lstStyle/>
           <a:p>
-            <a:r>
-              <a:t>Нас четверо. Я тимлид. Михаил отвечает за данные и инфраструктуру, Ярослав за расчёт, Александр за визуализацию.</a:t>
-            </a:r>
-          </a:p>
-        </p:txBody>
-      </p:sp>
-      <p:sp>
-        <p:nvSpPr>
-          <p:cNvPr id="4" name="Slide Number Placeholder 3"/>
-          <p:cNvSpPr>
-            <a:spLocks noGrp="1"/>
-          </p:cNvSpPr>
-          <p:nvPr>
-            <p:ph type="sldNum" sz="quarter" idx="5"/>
-          </p:nvPr>
-        </p:nvSpPr>
-        <p:spPr/>
+            <a:endParaRPr dirty="0"/>
+          </a:p>
+        </p:txBody>
       </p:sp>
     </p:spTree>
   </p:cSld>
@@ -438,23 +609,9 @@
           <a:bodyPr/>
           <a:lstStyle/>
           <a:p>
-            <a:r>
-              <a:t>Мы берём с биржи кривую доходности ОФЗ, приводим её к 19 срокам, которые задаёт Банк России, и строим шесть стрессовых вариантов. Для трёх самых коротких сроков данных биржи нет, поэтому берём ближайшее значение, остальные считаем линейной интерполяцией. Эти кривые нужны командам 1 и 3.</a:t>
-            </a:r>
-          </a:p>
-        </p:txBody>
-      </p:sp>
-      <p:sp>
-        <p:nvSpPr>
-          <p:cNvPr id="4" name="Slide Number Placeholder 3"/>
-          <p:cNvSpPr>
-            <a:spLocks noGrp="1"/>
-          </p:cNvSpPr>
-          <p:nvPr>
-            <p:ph type="sldNum" sz="quarter" idx="5"/>
-          </p:nvPr>
-        </p:nvSpPr>
-        <p:spPr/>
+            <a:endParaRPr lang="ru-RU" dirty="0"/>
+          </a:p>
+        </p:txBody>
       </p:sp>
     </p:spTree>
   </p:cSld>
@@ -508,23 +665,9 @@
           <a:bodyPr/>
           <a:lstStyle/>
           <a:p>
-            <a:r>
-              <a:t>Сценарии 1 и 2 сдвигают всю кривую на 4 процентных пункта. В сценариях 3–6 шок затухает с ростом срока: e в степени минус T на четыре почти равно единице для коротких сроков и стремится к нулю для длинных. Все формулы и параметры взяты из методических рекомендаций Банка России 8-МР.</a:t>
-            </a:r>
-          </a:p>
-        </p:txBody>
-      </p:sp>
-      <p:sp>
-        <p:nvSpPr>
-          <p:cNvPr id="4" name="Slide Number Placeholder 3"/>
-          <p:cNvSpPr>
-            <a:spLocks noGrp="1"/>
-          </p:cNvSpPr>
-          <p:nvPr>
-            <p:ph type="sldNum" sz="quarter" idx="5"/>
-          </p:nvPr>
-        </p:nvSpPr>
-        <p:spPr/>
+            <a:endParaRPr dirty="0"/>
+          </a:p>
+        </p:txBody>
       </p:sp>
     </p:spTree>
   </p:cSld>
@@ -578,23 +721,9 @@
           <a:bodyPr/>
           <a:lstStyle/>
           <a:p>
-            <a:r>
-              <a:t>Красная толстая линия — базовая кривая, остальные шесть — сценарии. Параллельные просто выше и ниже. Непараллельные меняют форму: при увеличении наклона короткий конец уходит вниз, а длинный вверх. Рост и снижение коротких ставок меняют в основном левую часть кривой.</a:t>
-            </a:r>
-          </a:p>
-        </p:txBody>
-      </p:sp>
-      <p:sp>
-        <p:nvSpPr>
-          <p:cNvPr id="4" name="Slide Number Placeholder 3"/>
-          <p:cNvSpPr>
-            <a:spLocks noGrp="1"/>
-          </p:cNvSpPr>
-          <p:nvPr>
-            <p:ph type="sldNum" sz="quarter" idx="5"/>
-          </p:nvPr>
-        </p:nvSpPr>
-        <p:spPr/>
+            <a:endParaRPr dirty="0"/>
+          </a:p>
+        </p:txBody>
       </p:sp>
     </p:spTree>
   </p:cSld>
@@ -649,22 +778,11 @@
           <a:lstStyle/>
           <a:p>
             <a:r>
-              <a:t>Работу вели в Сфера.Задачи: пять задач спринта, все закрыты. Код и данные лежат в репозитории на GitLab МАИ, по QR-коду можно открыть его.</a:t>
-            </a:r>
-          </a:p>
-        </p:txBody>
-      </p:sp>
-      <p:sp>
-        <p:nvSpPr>
-          <p:cNvPr id="4" name="Slide Number Placeholder 3"/>
-          <p:cNvSpPr>
-            <a:spLocks noGrp="1"/>
-          </p:cNvSpPr>
-          <p:nvPr>
-            <p:ph type="sldNum" sz="quarter" idx="5"/>
-          </p:nvPr>
-        </p:nvSpPr>
-        <p:spPr/>
+              <a:rPr dirty="0"/>
+              <a:t>.</a:t>
+            </a:r>
+          </a:p>
+        </p:txBody>
       </p:sp>
     </p:spTree>
   </p:cSld>
@@ -718,23 +836,9 @@
           <a:bodyPr/>
           <a:lstStyle/>
           <a:p>
-            <a:r>
-              <a:t>За спринт мы разобрались с темой, выгрузили данные с биржи, привели их к срокам Банка России, посчитали шесть сценариев и проверили формулу на примере заказчика, построили графики и наладили работу команды.</a:t>
-            </a:r>
-          </a:p>
-        </p:txBody>
-      </p:sp>
-      <p:sp>
-        <p:nvSpPr>
-          <p:cNvPr id="4" name="Slide Number Placeholder 3"/>
-          <p:cNvSpPr>
-            <a:spLocks noGrp="1"/>
-          </p:cNvSpPr>
-          <p:nvPr>
-            <p:ph type="sldNum" sz="quarter" idx="5"/>
-          </p:nvPr>
-        </p:nvSpPr>
-        <p:spPr/>
+            <a:endParaRPr dirty="0"/>
+          </a:p>
+        </p:txBody>
       </p:sp>
     </p:spTree>
   </p:cSld>
@@ -788,23 +892,9 @@
           <a:bodyPr/>
           <a:lstStyle/>
           <a:p>
-            <a:r>
-              <a:t>Сейчас расчёт в Excel. Цель — модуль, который сам забирает кривую с биржи, считает сценарии на Python, хранит результаты в базе и показывает их на сайте с графиками. Команды 1 и 3 будут брать наши кривые из базы. Стек предварительный.</a:t>
-            </a:r>
-          </a:p>
-        </p:txBody>
-      </p:sp>
-      <p:sp>
-        <p:nvSpPr>
-          <p:cNvPr id="4" name="Slide Number Placeholder 3"/>
-          <p:cNvSpPr>
-            <a:spLocks noGrp="1"/>
-          </p:cNvSpPr>
-          <p:nvPr>
-            <p:ph type="sldNum" sz="quarter" idx="5"/>
-          </p:nvPr>
-        </p:nvSpPr>
-        <p:spPr/>
+            <a:endParaRPr dirty="0"/>
+          </a:p>
+        </p:txBody>
       </p:sp>
     </p:spTree>
   </p:cSld>
@@ -858,23 +948,9 @@
           <a:bodyPr/>
           <a:lstStyle/>
           <a:p>
-            <a:r>
-              <a:t>В следующем спринте автоматизируем загрузку, перенесём расчёт в код и сделаем первую версию сайта. Спасибо за внимание, готовы ответить на вопросы.</a:t>
-            </a:r>
-          </a:p>
-        </p:txBody>
-      </p:sp>
-      <p:sp>
-        <p:nvSpPr>
-          <p:cNvPr id="4" name="Slide Number Placeholder 3"/>
-          <p:cNvSpPr>
-            <a:spLocks noGrp="1"/>
-          </p:cNvSpPr>
-          <p:nvPr>
-            <p:ph type="sldNum" sz="quarter" idx="5"/>
-          </p:nvPr>
-        </p:nvSpPr>
-        <p:spPr/>
+            <a:endParaRPr dirty="0"/>
+          </a:p>
+        </p:txBody>
       </p:sp>
     </p:spTree>
   </p:cSld>
@@ -925,7 +1001,6 @@
               <a:rPr lang="en-US"/>
               <a:t>Click to edit Master title style</a:t>
             </a:r>
-            <a:endParaRPr lang="en-US"/>
           </a:p>
         </p:txBody>
       </p:sp>
@@ -1044,7 +1119,6 @@
               <a:rPr lang="en-US"/>
               <a:t>Click to edit Master subtitle style</a:t>
             </a:r>
-            <a:endParaRPr lang="en-US"/>
           </a:p>
         </p:txBody>
       </p:sp>
@@ -1063,8 +1137,9 @@
           <a:bodyPr/>
           <a:lstStyle/>
           <a:p>
-            <a:fld id="{5BCAD085-E8A6-8845-BD4E-CB4CCA059FC4}" type="datetimeFigureOut">
-              <a:rPr lang="en-US" smtClean="0"/>
+            <a:fld id="{804925BA-85E3-384C-B311-E5F917DDC03C}" type="datetime1">
+              <a:rPr lang="ru-RU" smtClean="0"/>
+              <a:t>10.10.2026</a:t>
             </a:fld>
             <a:endParaRPr lang="en-US"/>
           </a:p>
@@ -1106,12 +1181,18 @@
           <a:p>
             <a:fld id="{C1FF6DA9-008F-8B48-92A6-B652298478BF}" type="slidenum">
               <a:rPr lang="en-US" smtClean="0"/>
+              <a:t>‹#›</a:t>
             </a:fld>
             <a:endParaRPr lang="en-US"/>
           </a:p>
         </p:txBody>
       </p:sp>
     </p:spTree>
+    <p:extLst>
+      <p:ext uri="{BB962C8B-B14F-4D97-AF65-F5344CB8AC3E}">
+        <p14:creationId xmlns:p14="http://schemas.microsoft.com/office/powerpoint/2010/main" val="3168075583"/>
+      </p:ext>
+    </p:extLst>
   </p:cSld>
   <p:clrMapOvr>
     <a:masterClrMapping/>
@@ -1155,7 +1236,6 @@
               <a:rPr lang="en-US"/>
               <a:t>Click to edit Master title style</a:t>
             </a:r>
-            <a:endParaRPr lang="en-US"/>
           </a:p>
         </p:txBody>
       </p:sp>
@@ -1179,7 +1259,6 @@
               <a:rPr lang="en-US"/>
               <a:t>Click to edit Master text styles</a:t>
             </a:r>
-            <a:endParaRPr lang="en-US"/>
           </a:p>
           <a:p>
             <a:pPr lvl="1"/>
@@ -1187,7 +1266,6 @@
               <a:rPr lang="en-US"/>
               <a:t>Second level</a:t>
             </a:r>
-            <a:endParaRPr lang="en-US"/>
           </a:p>
           <a:p>
             <a:pPr lvl="2"/>
@@ -1195,7 +1273,6 @@
               <a:rPr lang="en-US"/>
               <a:t>Third level</a:t>
             </a:r>
-            <a:endParaRPr lang="en-US"/>
           </a:p>
           <a:p>
             <a:pPr lvl="3"/>
@@ -1203,7 +1280,6 @@
               <a:rPr lang="en-US"/>
               <a:t>Fourth level</a:t>
             </a:r>
-            <a:endParaRPr lang="en-US"/>
           </a:p>
           <a:p>
             <a:pPr lvl="4"/>
@@ -1211,7 +1287,6 @@
               <a:rPr lang="en-US"/>
               <a:t>Fifth level</a:t>
             </a:r>
-            <a:endParaRPr lang="en-US"/>
           </a:p>
         </p:txBody>
       </p:sp>
@@ -1230,8 +1305,9 @@
           <a:bodyPr/>
           <a:lstStyle/>
           <a:p>
-            <a:fld id="{5BCAD085-E8A6-8845-BD4E-CB4CCA059FC4}" type="datetimeFigureOut">
-              <a:rPr lang="en-US" smtClean="0"/>
+            <a:fld id="{6C91C08C-D8D8-9E4F-9E90-D365A1DB5166}" type="datetime1">
+              <a:rPr lang="ru-RU" smtClean="0"/>
+              <a:t>10.10.2026</a:t>
             </a:fld>
             <a:endParaRPr lang="en-US"/>
           </a:p>
@@ -1273,12 +1349,18 @@
           <a:p>
             <a:fld id="{C1FF6DA9-008F-8B48-92A6-B652298478BF}" type="slidenum">
               <a:rPr lang="en-US" smtClean="0"/>
+              <a:t>‹#›</a:t>
             </a:fld>
             <a:endParaRPr lang="en-US"/>
           </a:p>
         </p:txBody>
       </p:sp>
     </p:spTree>
+    <p:extLst>
+      <p:ext uri="{BB962C8B-B14F-4D97-AF65-F5344CB8AC3E}">
+        <p14:creationId xmlns:p14="http://schemas.microsoft.com/office/powerpoint/2010/main" val="2910927964"/>
+      </p:ext>
+    </p:extLst>
   </p:cSld>
   <p:clrMapOvr>
     <a:masterClrMapping/>
@@ -1327,7 +1409,6 @@
               <a:rPr lang="en-US"/>
               <a:t>Click to edit Master title style</a:t>
             </a:r>
-            <a:endParaRPr lang="en-US"/>
           </a:p>
         </p:txBody>
       </p:sp>
@@ -1356,7 +1437,6 @@
               <a:rPr lang="en-US"/>
               <a:t>Click to edit Master text styles</a:t>
             </a:r>
-            <a:endParaRPr lang="en-US"/>
           </a:p>
           <a:p>
             <a:pPr lvl="1"/>
@@ -1364,7 +1444,6 @@
               <a:rPr lang="en-US"/>
               <a:t>Second level</a:t>
             </a:r>
-            <a:endParaRPr lang="en-US"/>
           </a:p>
           <a:p>
             <a:pPr lvl="2"/>
@@ -1372,7 +1451,6 @@
               <a:rPr lang="en-US"/>
               <a:t>Third level</a:t>
             </a:r>
-            <a:endParaRPr lang="en-US"/>
           </a:p>
           <a:p>
             <a:pPr lvl="3"/>
@@ -1380,7 +1458,6 @@
               <a:rPr lang="en-US"/>
               <a:t>Fourth level</a:t>
             </a:r>
-            <a:endParaRPr lang="en-US"/>
           </a:p>
           <a:p>
             <a:pPr lvl="4"/>
@@ -1388,7 +1465,6 @@
               <a:rPr lang="en-US"/>
               <a:t>Fifth level</a:t>
             </a:r>
-            <a:endParaRPr lang="en-US"/>
           </a:p>
         </p:txBody>
       </p:sp>
@@ -1407,8 +1483,9 @@
           <a:bodyPr/>
           <a:lstStyle/>
           <a:p>
-            <a:fld id="{5BCAD085-E8A6-8845-BD4E-CB4CCA059FC4}" type="datetimeFigureOut">
-              <a:rPr lang="en-US" smtClean="0"/>
+            <a:fld id="{D0CE4EE0-9502-214C-A5F6-F6EC7964903B}" type="datetime1">
+              <a:rPr lang="ru-RU" smtClean="0"/>
+              <a:t>10.10.2026</a:t>
             </a:fld>
             <a:endParaRPr lang="en-US"/>
           </a:p>
@@ -1450,12 +1527,18 @@
           <a:p>
             <a:fld id="{C1FF6DA9-008F-8B48-92A6-B652298478BF}" type="slidenum">
               <a:rPr lang="en-US" smtClean="0"/>
+              <a:t>‹#›</a:t>
             </a:fld>
             <a:endParaRPr lang="en-US"/>
           </a:p>
         </p:txBody>
       </p:sp>
     </p:spTree>
+    <p:extLst>
+      <p:ext uri="{BB962C8B-B14F-4D97-AF65-F5344CB8AC3E}">
+        <p14:creationId xmlns:p14="http://schemas.microsoft.com/office/powerpoint/2010/main" val="3612223792"/>
+      </p:ext>
+    </p:extLst>
   </p:cSld>
   <p:clrMapOvr>
     <a:masterClrMapping/>
@@ -1499,7 +1582,6 @@
               <a:rPr lang="en-US"/>
               <a:t>Click to edit Master title style</a:t>
             </a:r>
-            <a:endParaRPr lang="en-US"/>
           </a:p>
         </p:txBody>
       </p:sp>
@@ -1523,7 +1605,6 @@
               <a:rPr lang="en-US"/>
               <a:t>Click to edit Master text styles</a:t>
             </a:r>
-            <a:endParaRPr lang="en-US"/>
           </a:p>
           <a:p>
             <a:pPr lvl="1"/>
@@ -1531,7 +1612,6 @@
               <a:rPr lang="en-US"/>
               <a:t>Second level</a:t>
             </a:r>
-            <a:endParaRPr lang="en-US"/>
           </a:p>
           <a:p>
             <a:pPr lvl="2"/>
@@ -1539,7 +1619,6 @@
               <a:rPr lang="en-US"/>
               <a:t>Third level</a:t>
             </a:r>
-            <a:endParaRPr lang="en-US"/>
           </a:p>
           <a:p>
             <a:pPr lvl="3"/>
@@ -1547,7 +1626,6 @@
               <a:rPr lang="en-US"/>
               <a:t>Fourth level</a:t>
             </a:r>
-            <a:endParaRPr lang="en-US"/>
           </a:p>
           <a:p>
             <a:pPr lvl="4"/>
@@ -1555,7 +1633,6 @@
               <a:rPr lang="en-US"/>
               <a:t>Fifth level</a:t>
             </a:r>
-            <a:endParaRPr lang="en-US"/>
           </a:p>
         </p:txBody>
       </p:sp>
@@ -1574,8 +1651,9 @@
           <a:bodyPr/>
           <a:lstStyle/>
           <a:p>
-            <a:fld id="{5BCAD085-E8A6-8845-BD4E-CB4CCA059FC4}" type="datetimeFigureOut">
-              <a:rPr lang="en-US" smtClean="0"/>
+            <a:fld id="{1F760B81-EE5F-8B4A-BB87-10B823EF3C97}" type="datetime1">
+              <a:rPr lang="ru-RU" smtClean="0"/>
+              <a:t>10.10.2026</a:t>
             </a:fld>
             <a:endParaRPr lang="en-US"/>
           </a:p>
@@ -1617,12 +1695,18 @@
           <a:p>
             <a:fld id="{C1FF6DA9-008F-8B48-92A6-B652298478BF}" type="slidenum">
               <a:rPr lang="en-US" smtClean="0"/>
+              <a:t>‹#›</a:t>
             </a:fld>
             <a:endParaRPr lang="en-US"/>
           </a:p>
         </p:txBody>
       </p:sp>
     </p:spTree>
+    <p:extLst>
+      <p:ext uri="{BB962C8B-B14F-4D97-AF65-F5344CB8AC3E}">
+        <p14:creationId xmlns:p14="http://schemas.microsoft.com/office/powerpoint/2010/main" val="2614314258"/>
+      </p:ext>
+    </p:extLst>
   </p:cSld>
   <p:clrMapOvr>
     <a:masterClrMapping/>
@@ -1675,7 +1759,6 @@
               <a:rPr lang="en-US"/>
               <a:t>Click to edit Master title style</a:t>
             </a:r>
-            <a:endParaRPr lang="en-US"/>
           </a:p>
         </p:txBody>
       </p:sp>
@@ -1795,7 +1878,6 @@
               <a:rPr lang="en-US"/>
               <a:t>Click to edit Master text styles</a:t>
             </a:r>
-            <a:endParaRPr lang="en-US"/>
           </a:p>
         </p:txBody>
       </p:sp>
@@ -1814,8 +1896,9 @@
           <a:bodyPr/>
           <a:lstStyle/>
           <a:p>
-            <a:fld id="{5BCAD085-E8A6-8845-BD4E-CB4CCA059FC4}" type="datetimeFigureOut">
-              <a:rPr lang="en-US" smtClean="0"/>
+            <a:fld id="{3F45BAD8-16E4-5446-84EE-0F37E5E48586}" type="datetime1">
+              <a:rPr lang="ru-RU" smtClean="0"/>
+              <a:t>10.10.2026</a:t>
             </a:fld>
             <a:endParaRPr lang="en-US"/>
           </a:p>
@@ -1857,12 +1940,18 @@
           <a:p>
             <a:fld id="{C1FF6DA9-008F-8B48-92A6-B652298478BF}" type="slidenum">
               <a:rPr lang="en-US" smtClean="0"/>
+              <a:t>‹#›</a:t>
             </a:fld>
             <a:endParaRPr lang="en-US"/>
           </a:p>
         </p:txBody>
       </p:sp>
     </p:spTree>
+    <p:extLst>
+      <p:ext uri="{BB962C8B-B14F-4D97-AF65-F5344CB8AC3E}">
+        <p14:creationId xmlns:p14="http://schemas.microsoft.com/office/powerpoint/2010/main" val="960648375"/>
+      </p:ext>
+    </p:extLst>
   </p:cSld>
   <p:clrMapOvr>
     <a:masterClrMapping/>
@@ -1906,7 +1995,6 @@
               <a:rPr lang="en-US"/>
               <a:t>Click to edit Master title style</a:t>
             </a:r>
-            <a:endParaRPr lang="en-US"/>
           </a:p>
         </p:txBody>
       </p:sp>
@@ -1963,7 +2051,6 @@
               <a:rPr lang="en-US"/>
               <a:t>Click to edit Master text styles</a:t>
             </a:r>
-            <a:endParaRPr lang="en-US"/>
           </a:p>
           <a:p>
             <a:pPr lvl="1"/>
@@ -1971,7 +2058,6 @@
               <a:rPr lang="en-US"/>
               <a:t>Second level</a:t>
             </a:r>
-            <a:endParaRPr lang="en-US"/>
           </a:p>
           <a:p>
             <a:pPr lvl="2"/>
@@ -1979,7 +2065,6 @@
               <a:rPr lang="en-US"/>
               <a:t>Third level</a:t>
             </a:r>
-            <a:endParaRPr lang="en-US"/>
           </a:p>
           <a:p>
             <a:pPr lvl="3"/>
@@ -1987,7 +2072,6 @@
               <a:rPr lang="en-US"/>
               <a:t>Fourth level</a:t>
             </a:r>
-            <a:endParaRPr lang="en-US"/>
           </a:p>
           <a:p>
             <a:pPr lvl="4"/>
@@ -1995,7 +2079,6 @@
               <a:rPr lang="en-US"/>
               <a:t>Fifth level</a:t>
             </a:r>
-            <a:endParaRPr lang="en-US"/>
           </a:p>
         </p:txBody>
       </p:sp>
@@ -2052,7 +2135,6 @@
               <a:rPr lang="en-US"/>
               <a:t>Click to edit Master text styles</a:t>
             </a:r>
-            <a:endParaRPr lang="en-US"/>
           </a:p>
           <a:p>
             <a:pPr lvl="1"/>
@@ -2060,7 +2142,6 @@
               <a:rPr lang="en-US"/>
               <a:t>Second level</a:t>
             </a:r>
-            <a:endParaRPr lang="en-US"/>
           </a:p>
           <a:p>
             <a:pPr lvl="2"/>
@@ -2068,7 +2149,6 @@
               <a:rPr lang="en-US"/>
               <a:t>Third level</a:t>
             </a:r>
-            <a:endParaRPr lang="en-US"/>
           </a:p>
           <a:p>
             <a:pPr lvl="3"/>
@@ -2076,7 +2156,6 @@
               <a:rPr lang="en-US"/>
               <a:t>Fourth level</a:t>
             </a:r>
-            <a:endParaRPr lang="en-US"/>
           </a:p>
           <a:p>
             <a:pPr lvl="4"/>
@@ -2084,7 +2163,6 @@
               <a:rPr lang="en-US"/>
               <a:t>Fifth level</a:t>
             </a:r>
-            <a:endParaRPr lang="en-US"/>
           </a:p>
         </p:txBody>
       </p:sp>
@@ -2103,8 +2181,9 @@
           <a:bodyPr/>
           <a:lstStyle/>
           <a:p>
-            <a:fld id="{5BCAD085-E8A6-8845-BD4E-CB4CCA059FC4}" type="datetimeFigureOut">
-              <a:rPr lang="en-US" smtClean="0"/>
+            <a:fld id="{64C25117-E79B-8648-BD61-64D62EA9A4A0}" type="datetime1">
+              <a:rPr lang="ru-RU" smtClean="0"/>
+              <a:t>10.10.2026</a:t>
             </a:fld>
             <a:endParaRPr lang="en-US"/>
           </a:p>
@@ -2146,12 +2225,18 @@
           <a:p>
             <a:fld id="{C1FF6DA9-008F-8B48-92A6-B652298478BF}" type="slidenum">
               <a:rPr lang="en-US" smtClean="0"/>
+              <a:t>‹#›</a:t>
             </a:fld>
             <a:endParaRPr lang="en-US"/>
           </a:p>
         </p:txBody>
       </p:sp>
     </p:spTree>
+    <p:extLst>
+      <p:ext uri="{BB962C8B-B14F-4D97-AF65-F5344CB8AC3E}">
+        <p14:creationId xmlns:p14="http://schemas.microsoft.com/office/powerpoint/2010/main" val="2782244947"/>
+      </p:ext>
+    </p:extLst>
   </p:cSld>
   <p:clrMapOvr>
     <a:masterClrMapping/>
@@ -2199,7 +2284,6 @@
               <a:rPr lang="en-US"/>
               <a:t>Click to edit Master title style</a:t>
             </a:r>
-            <a:endParaRPr lang="en-US"/>
           </a:p>
         </p:txBody>
       </p:sp>
@@ -2265,7 +2349,6 @@
               <a:rPr lang="en-US"/>
               <a:t>Click to edit Master text styles</a:t>
             </a:r>
-            <a:endParaRPr lang="en-US"/>
           </a:p>
         </p:txBody>
       </p:sp>
@@ -2322,7 +2405,6 @@
               <a:rPr lang="en-US"/>
               <a:t>Click to edit Master text styles</a:t>
             </a:r>
-            <a:endParaRPr lang="en-US"/>
           </a:p>
           <a:p>
             <a:pPr lvl="1"/>
@@ -2330,7 +2412,6 @@
               <a:rPr lang="en-US"/>
               <a:t>Second level</a:t>
             </a:r>
-            <a:endParaRPr lang="en-US"/>
           </a:p>
           <a:p>
             <a:pPr lvl="2"/>
@@ -2338,7 +2419,6 @@
               <a:rPr lang="en-US"/>
               <a:t>Third level</a:t>
             </a:r>
-            <a:endParaRPr lang="en-US"/>
           </a:p>
           <a:p>
             <a:pPr lvl="3"/>
@@ -2346,7 +2426,6 @@
               <a:rPr lang="en-US"/>
               <a:t>Fourth level</a:t>
             </a:r>
-            <a:endParaRPr lang="en-US"/>
           </a:p>
           <a:p>
             <a:pPr lvl="4"/>
@@ -2354,7 +2433,6 @@
               <a:rPr lang="en-US"/>
               <a:t>Fifth level</a:t>
             </a:r>
-            <a:endParaRPr lang="en-US"/>
           </a:p>
         </p:txBody>
       </p:sp>
@@ -2420,7 +2498,6 @@
               <a:rPr lang="en-US"/>
               <a:t>Click to edit Master text styles</a:t>
             </a:r>
-            <a:endParaRPr lang="en-US"/>
           </a:p>
         </p:txBody>
       </p:sp>
@@ -2477,7 +2554,6 @@
               <a:rPr lang="en-US"/>
               <a:t>Click to edit Master text styles</a:t>
             </a:r>
-            <a:endParaRPr lang="en-US"/>
           </a:p>
           <a:p>
             <a:pPr lvl="1"/>
@@ -2485,7 +2561,6 @@
               <a:rPr lang="en-US"/>
               <a:t>Second level</a:t>
             </a:r>
-            <a:endParaRPr lang="en-US"/>
           </a:p>
           <a:p>
             <a:pPr lvl="2"/>
@@ -2493,7 +2568,6 @@
               <a:rPr lang="en-US"/>
               <a:t>Third level</a:t>
             </a:r>
-            <a:endParaRPr lang="en-US"/>
           </a:p>
           <a:p>
             <a:pPr lvl="3"/>
@@ -2501,7 +2575,6 @@
               <a:rPr lang="en-US"/>
               <a:t>Fourth level</a:t>
             </a:r>
-            <a:endParaRPr lang="en-US"/>
           </a:p>
           <a:p>
             <a:pPr lvl="4"/>
@@ -2509,7 +2582,6 @@
               <a:rPr lang="en-US"/>
               <a:t>Fifth level</a:t>
             </a:r>
-            <a:endParaRPr lang="en-US"/>
           </a:p>
         </p:txBody>
       </p:sp>
@@ -2528,8 +2600,9 @@
           <a:bodyPr/>
           <a:lstStyle/>
           <a:p>
-            <a:fld id="{5BCAD085-E8A6-8845-BD4E-CB4CCA059FC4}" type="datetimeFigureOut">
-              <a:rPr lang="en-US" smtClean="0"/>
+            <a:fld id="{B28B7890-28F7-0448-B617-C11D795AA28C}" type="datetime1">
+              <a:rPr lang="ru-RU" smtClean="0"/>
+              <a:t>10.10.2026</a:t>
             </a:fld>
             <a:endParaRPr lang="en-US"/>
           </a:p>
@@ -2571,12 +2644,18 @@
           <a:p>
             <a:fld id="{C1FF6DA9-008F-8B48-92A6-B652298478BF}" type="slidenum">
               <a:rPr lang="en-US" smtClean="0"/>
+              <a:t>‹#›</a:t>
             </a:fld>
             <a:endParaRPr lang="en-US"/>
           </a:p>
         </p:txBody>
       </p:sp>
     </p:spTree>
+    <p:extLst>
+      <p:ext uri="{BB962C8B-B14F-4D97-AF65-F5344CB8AC3E}">
+        <p14:creationId xmlns:p14="http://schemas.microsoft.com/office/powerpoint/2010/main" val="990158736"/>
+      </p:ext>
+    </p:extLst>
   </p:cSld>
   <p:clrMapOvr>
     <a:masterClrMapping/>
@@ -2620,7 +2699,6 @@
               <a:rPr lang="en-US"/>
               <a:t>Click to edit Master title style</a:t>
             </a:r>
-            <a:endParaRPr lang="en-US"/>
           </a:p>
         </p:txBody>
       </p:sp>
@@ -2639,8 +2717,9 @@
           <a:bodyPr/>
           <a:lstStyle/>
           <a:p>
-            <a:fld id="{5BCAD085-E8A6-8845-BD4E-CB4CCA059FC4}" type="datetimeFigureOut">
-              <a:rPr lang="en-US" smtClean="0"/>
+            <a:fld id="{57FB2BFB-84C7-6841-8B83-05F99EABAF86}" type="datetime1">
+              <a:rPr lang="ru-RU" smtClean="0"/>
+              <a:t>10.10.2026</a:t>
             </a:fld>
             <a:endParaRPr lang="en-US"/>
           </a:p>
@@ -2682,12 +2761,18 @@
           <a:p>
             <a:fld id="{C1FF6DA9-008F-8B48-92A6-B652298478BF}" type="slidenum">
               <a:rPr lang="en-US" smtClean="0"/>
+              <a:t>‹#›</a:t>
             </a:fld>
             <a:endParaRPr lang="en-US"/>
           </a:p>
         </p:txBody>
       </p:sp>
     </p:spTree>
+    <p:extLst>
+      <p:ext uri="{BB962C8B-B14F-4D97-AF65-F5344CB8AC3E}">
+        <p14:creationId xmlns:p14="http://schemas.microsoft.com/office/powerpoint/2010/main" val="727027711"/>
+      </p:ext>
+    </p:extLst>
   </p:cSld>
   <p:clrMapOvr>
     <a:masterClrMapping/>
@@ -2727,8 +2812,9 @@
           <a:bodyPr/>
           <a:lstStyle/>
           <a:p>
-            <a:fld id="{5BCAD085-E8A6-8845-BD4E-CB4CCA059FC4}" type="datetimeFigureOut">
-              <a:rPr lang="en-US" smtClean="0"/>
+            <a:fld id="{418C5BC0-A45C-4442-A6F6-909362AA5C5F}" type="datetime1">
+              <a:rPr lang="ru-RU" smtClean="0"/>
+              <a:t>10.10.2026</a:t>
             </a:fld>
             <a:endParaRPr lang="en-US"/>
           </a:p>
@@ -2770,12 +2856,18 @@
           <a:p>
             <a:fld id="{C1FF6DA9-008F-8B48-92A6-B652298478BF}" type="slidenum">
               <a:rPr lang="en-US" smtClean="0"/>
+              <a:t>‹#›</a:t>
             </a:fld>
             <a:endParaRPr lang="en-US"/>
           </a:p>
         </p:txBody>
       </p:sp>
     </p:spTree>
+    <p:extLst>
+      <p:ext uri="{BB962C8B-B14F-4D97-AF65-F5344CB8AC3E}">
+        <p14:creationId xmlns:p14="http://schemas.microsoft.com/office/powerpoint/2010/main" val="1212999818"/>
+      </p:ext>
+    </p:extLst>
   </p:cSld>
   <p:clrMapOvr>
     <a:masterClrMapping/>
@@ -2828,7 +2920,6 @@
               <a:rPr lang="en-US"/>
               <a:t>Click to edit Master title style</a:t>
             </a:r>
-            <a:endParaRPr lang="en-US"/>
           </a:p>
         </p:txBody>
       </p:sp>
@@ -2885,7 +2976,6 @@
               <a:rPr lang="en-US"/>
               <a:t>Click to edit Master text styles</a:t>
             </a:r>
-            <a:endParaRPr lang="en-US"/>
           </a:p>
           <a:p>
             <a:pPr lvl="1"/>
@@ -2893,7 +2983,6 @@
               <a:rPr lang="en-US"/>
               <a:t>Second level</a:t>
             </a:r>
-            <a:endParaRPr lang="en-US"/>
           </a:p>
           <a:p>
             <a:pPr lvl="2"/>
@@ -2901,7 +2990,6 @@
               <a:rPr lang="en-US"/>
               <a:t>Third level</a:t>
             </a:r>
-            <a:endParaRPr lang="en-US"/>
           </a:p>
           <a:p>
             <a:pPr lvl="3"/>
@@ -2909,7 +2997,6 @@
               <a:rPr lang="en-US"/>
               <a:t>Fourth level</a:t>
             </a:r>
-            <a:endParaRPr lang="en-US"/>
           </a:p>
           <a:p>
             <a:pPr lvl="4"/>
@@ -2917,7 +3004,6 @@
               <a:rPr lang="en-US"/>
               <a:t>Fifth level</a:t>
             </a:r>
-            <a:endParaRPr lang="en-US"/>
           </a:p>
         </p:txBody>
       </p:sp>
@@ -2983,7 +3069,6 @@
               <a:rPr lang="en-US"/>
               <a:t>Click to edit Master text styles</a:t>
             </a:r>
-            <a:endParaRPr lang="en-US"/>
           </a:p>
         </p:txBody>
       </p:sp>
@@ -3002,8 +3087,9 @@
           <a:bodyPr/>
           <a:lstStyle/>
           <a:p>
-            <a:fld id="{5BCAD085-E8A6-8845-BD4E-CB4CCA059FC4}" type="datetimeFigureOut">
-              <a:rPr lang="en-US" smtClean="0"/>
+            <a:fld id="{7F60FB28-6697-6C48-9956-D7D0CD59644A}" type="datetime1">
+              <a:rPr lang="ru-RU" smtClean="0"/>
+              <a:t>10.10.2026</a:t>
             </a:fld>
             <a:endParaRPr lang="en-US"/>
           </a:p>
@@ -3045,12 +3131,18 @@
           <a:p>
             <a:fld id="{C1FF6DA9-008F-8B48-92A6-B652298478BF}" type="slidenum">
               <a:rPr lang="en-US" smtClean="0"/>
+              <a:t>‹#›</a:t>
             </a:fld>
             <a:endParaRPr lang="en-US"/>
           </a:p>
         </p:txBody>
       </p:sp>
     </p:spTree>
+    <p:extLst>
+      <p:ext uri="{BB962C8B-B14F-4D97-AF65-F5344CB8AC3E}">
+        <p14:creationId xmlns:p14="http://schemas.microsoft.com/office/powerpoint/2010/main" val="1840726560"/>
+      </p:ext>
+    </p:extLst>
   </p:cSld>
   <p:clrMapOvr>
     <a:masterClrMapping/>
@@ -3103,7 +3195,6 @@
               <a:rPr lang="en-US"/>
               <a:t>Click to edit Master title style</a:t>
             </a:r>
-            <a:endParaRPr lang="en-US"/>
           </a:p>
         </p:txBody>
       </p:sp>
@@ -3230,7 +3321,6 @@
               <a:rPr lang="en-US"/>
               <a:t>Click to edit Master text styles</a:t>
             </a:r>
-            <a:endParaRPr lang="en-US"/>
           </a:p>
         </p:txBody>
       </p:sp>
@@ -3249,8 +3339,9 @@
           <a:bodyPr/>
           <a:lstStyle/>
           <a:p>
-            <a:fld id="{5BCAD085-E8A6-8845-BD4E-CB4CCA059FC4}" type="datetimeFigureOut">
-              <a:rPr lang="en-US" smtClean="0"/>
+            <a:fld id="{F30ADF68-2127-B044-B27E-A8FD086478DA}" type="datetime1">
+              <a:rPr lang="ru-RU" smtClean="0"/>
+              <a:t>10.10.2026</a:t>
             </a:fld>
             <a:endParaRPr lang="en-US"/>
           </a:p>
@@ -3292,12 +3383,18 @@
           <a:p>
             <a:fld id="{C1FF6DA9-008F-8B48-92A6-B652298478BF}" type="slidenum">
               <a:rPr lang="en-US" smtClean="0"/>
+              <a:t>‹#›</a:t>
             </a:fld>
             <a:endParaRPr lang="en-US"/>
           </a:p>
         </p:txBody>
       </p:sp>
     </p:spTree>
+    <p:extLst>
+      <p:ext uri="{BB962C8B-B14F-4D97-AF65-F5344CB8AC3E}">
+        <p14:creationId xmlns:p14="http://schemas.microsoft.com/office/powerpoint/2010/main" val="3889236939"/>
+      </p:ext>
+    </p:extLst>
   </p:cSld>
   <p:clrMapOvr>
     <a:masterClrMapping/>
@@ -3356,7 +3453,6 @@
               <a:rPr lang="en-US"/>
               <a:t>Click to edit Master title style</a:t>
             </a:r>
-            <a:endParaRPr lang="en-US"/>
           </a:p>
         </p:txBody>
       </p:sp>
@@ -3390,7 +3486,6 @@
               <a:rPr lang="en-US"/>
               <a:t>Click to edit Master text styles</a:t>
             </a:r>
-            <a:endParaRPr lang="en-US"/>
           </a:p>
           <a:p>
             <a:pPr lvl="1"/>
@@ -3398,7 +3493,6 @@
               <a:rPr lang="en-US"/>
               <a:t>Second level</a:t>
             </a:r>
-            <a:endParaRPr lang="en-US"/>
           </a:p>
           <a:p>
             <a:pPr lvl="2"/>
@@ -3406,7 +3500,6 @@
               <a:rPr lang="en-US"/>
               <a:t>Third level</a:t>
             </a:r>
-            <a:endParaRPr lang="en-US"/>
           </a:p>
           <a:p>
             <a:pPr lvl="3"/>
@@ -3414,7 +3507,6 @@
               <a:rPr lang="en-US"/>
               <a:t>Fourth level</a:t>
             </a:r>
-            <a:endParaRPr lang="en-US"/>
           </a:p>
           <a:p>
             <a:pPr lvl="4"/>
@@ -3422,7 +3514,6 @@
               <a:rPr lang="en-US"/>
               <a:t>Fifth level</a:t>
             </a:r>
-            <a:endParaRPr lang="en-US"/>
           </a:p>
         </p:txBody>
       </p:sp>
@@ -3459,8 +3550,9 @@
             </a:lvl1pPr>
           </a:lstStyle>
           <a:p>
-            <a:fld id="{5BCAD085-E8A6-8845-BD4E-CB4CCA059FC4}" type="datetimeFigureOut">
-              <a:rPr lang="en-US" smtClean="0"/>
+            <a:fld id="{50359DA3-C413-B14D-852B-58DF14844DCE}" type="datetime1">
+              <a:rPr lang="ru-RU" smtClean="0"/>
+              <a:t>10.10.2026</a:t>
             </a:fld>
             <a:endParaRPr lang="en-US"/>
           </a:p>
@@ -3538,12 +3630,18 @@
           <a:p>
             <a:fld id="{C1FF6DA9-008F-8B48-92A6-B652298478BF}" type="slidenum">
               <a:rPr lang="en-US" smtClean="0"/>
+              <a:t>‹#›</a:t>
             </a:fld>
             <a:endParaRPr lang="en-US"/>
           </a:p>
         </p:txBody>
       </p:sp>
     </p:spTree>
+    <p:extLst>
+      <p:ext uri="{BB962C8B-B14F-4D97-AF65-F5344CB8AC3E}">
+        <p14:creationId xmlns:p14="http://schemas.microsoft.com/office/powerpoint/2010/main" val="2209977519"/>
+      </p:ext>
+    </p:extLst>
   </p:cSld>
   <p:clrMap bg1="lt1" tx1="dk1" bg2="lt2" tx2="dk2" accent1="accent1" accent2="accent2" accent3="accent3" accent4="accent4" accent5="accent5" accent6="accent6" hlink="hlink" folHlink="folHlink"/>
   <p:sldLayoutIdLst>
@@ -3559,6 +3657,7 @@
     <p:sldLayoutId id="2147483658" r:id="rId10"/>
     <p:sldLayoutId id="2147483659" r:id="rId11"/>
   </p:sldLayoutIdLst>
+  <p:hf hdr="0" dt="0"/>
   <p:txStyles>
     <p:titleStyle>
       <a:lvl1pPr algn="ctr" defTabSz="457200" rtl="0" eaLnBrk="1" latinLnBrk="0" hangingPunct="1">
@@ -3581,7 +3680,7 @@
         <a:spcBef>
           <a:spcPct val="20000"/>
         </a:spcBef>
-        <a:buFont typeface="Arial" panose="020B0604020202020204"/>
+        <a:buFont typeface="Arial"/>
         <a:buChar char="•"/>
         <a:defRPr sz="3200" kern="1200">
           <a:solidFill>
@@ -3596,7 +3695,7 @@
         <a:spcBef>
           <a:spcPct val="20000"/>
         </a:spcBef>
-        <a:buFont typeface="Arial" panose="020B0604020202020204"/>
+        <a:buFont typeface="Arial"/>
         <a:buChar char="–"/>
         <a:defRPr sz="2800" kern="1200">
           <a:solidFill>
@@ -3611,7 +3710,7 @@
         <a:spcBef>
           <a:spcPct val="20000"/>
         </a:spcBef>
-        <a:buFont typeface="Arial" panose="020B0604020202020204"/>
+        <a:buFont typeface="Arial"/>
         <a:buChar char="•"/>
         <a:defRPr sz="2400" kern="1200">
           <a:solidFill>
@@ -3626,7 +3725,7 @@
         <a:spcBef>
           <a:spcPct val="20000"/>
         </a:spcBef>
-        <a:buFont typeface="Arial" panose="020B0604020202020204"/>
+        <a:buFont typeface="Arial"/>
         <a:buChar char="–"/>
         <a:defRPr sz="2000" kern="1200">
           <a:solidFill>
@@ -3641,7 +3740,7 @@
         <a:spcBef>
           <a:spcPct val="20000"/>
         </a:spcBef>
-        <a:buFont typeface="Arial" panose="020B0604020202020204"/>
+        <a:buFont typeface="Arial"/>
         <a:buChar char="»"/>
         <a:defRPr sz="2000" kern="1200">
           <a:solidFill>
@@ -3656,7 +3755,7 @@
         <a:spcBef>
           <a:spcPct val="20000"/>
         </a:spcBef>
-        <a:buFont typeface="Arial" panose="020B0604020202020204"/>
+        <a:buFont typeface="Arial"/>
         <a:buChar char="•"/>
         <a:defRPr sz="2000" kern="1200">
           <a:solidFill>
@@ -3671,7 +3770,7 @@
         <a:spcBef>
           <a:spcPct val="20000"/>
         </a:spcBef>
-        <a:buFont typeface="Arial" panose="020B0604020202020204"/>
+        <a:buFont typeface="Arial"/>
         <a:buChar char="•"/>
         <a:defRPr sz="2000" kern="1200">
           <a:solidFill>
@@ -3686,7 +3785,7 @@
         <a:spcBef>
           <a:spcPct val="20000"/>
         </a:spcBef>
-        <a:buFont typeface="Arial" panose="020B0604020202020204"/>
+        <a:buFont typeface="Arial"/>
         <a:buChar char="•"/>
         <a:defRPr sz="2000" kern="1200">
           <a:solidFill>
@@ -3701,7 +3800,7 @@
         <a:spcBef>
           <a:spcPct val="20000"/>
         </a:spcBef>
-        <a:buFont typeface="Arial" panose="020B0604020202020204"/>
+        <a:buFont typeface="Arial"/>
         <a:buChar char="•"/>
         <a:defRPr sz="2000" kern="1200">
           <a:solidFill>
@@ -3869,7 +3968,7 @@
                 <a:solidFill>
                   <a:srgbClr val="FFFFFF"/>
                 </a:solidFill>
-                <a:latin typeface="Cambria" panose="02040503050406030204"/>
+                <a:latin typeface="Cambria"/>
               </a:rPr>
               <a:t>Стресс-сценарии</a:t>
             </a:r>
@@ -3878,7 +3977,7 @@
                 <a:solidFill>
                   <a:srgbClr val="FFFFFF"/>
                 </a:solidFill>
-                <a:latin typeface="Cambria" panose="02040503050406030204"/>
+                <a:latin typeface="Cambria"/>
               </a:rPr>
               <a:t> IRRBB </a:t>
             </a:r>
@@ -3887,7 +3986,7 @@
                 <a:solidFill>
                   <a:srgbClr val="FFFFFF"/>
                 </a:solidFill>
-                <a:latin typeface="Cambria" panose="02040503050406030204"/>
+                <a:latin typeface="Cambria"/>
               </a:rPr>
               <a:t>на</a:t>
             </a:r>
@@ -3896,7 +3995,7 @@
                 <a:solidFill>
                   <a:srgbClr val="FFFFFF"/>
                 </a:solidFill>
-                <a:latin typeface="Cambria" panose="02040503050406030204"/>
+                <a:latin typeface="Cambria"/>
               </a:rPr>
               <a:t> </a:t>
             </a:r>
@@ -3905,7 +4004,7 @@
                 <a:solidFill>
                   <a:srgbClr val="FFFFFF"/>
                 </a:solidFill>
-                <a:latin typeface="Cambria" panose="02040503050406030204"/>
+                <a:latin typeface="Cambria"/>
               </a:rPr>
               <a:t>кривой</a:t>
             </a:r>
@@ -3914,7 +4013,7 @@
                 <a:solidFill>
                   <a:srgbClr val="FFFFFF"/>
                 </a:solidFill>
-                <a:latin typeface="Cambria" panose="02040503050406030204"/>
+                <a:latin typeface="Cambria"/>
               </a:rPr>
               <a:t> </a:t>
             </a:r>
@@ -3923,7 +4022,7 @@
                 <a:solidFill>
                   <a:srgbClr val="FFFFFF"/>
                 </a:solidFill>
-                <a:latin typeface="Cambria" panose="02040503050406030204"/>
+                <a:latin typeface="Cambria"/>
               </a:rPr>
               <a:t>доходности</a:t>
             </a:r>
@@ -3932,16 +4031,10 @@
                 <a:solidFill>
                   <a:srgbClr val="FFFFFF"/>
                 </a:solidFill>
-                <a:latin typeface="Cambria" panose="02040503050406030204"/>
+                <a:latin typeface="Cambria"/>
               </a:rPr>
               <a:t> ОФЗ</a:t>
             </a:r>
-            <a:endParaRPr sz="3800" b="1" dirty="0">
-              <a:solidFill>
-                <a:srgbClr val="FFFFFF"/>
-              </a:solidFill>
-              <a:latin typeface="Cambria" panose="02040503050406030204"/>
-            </a:endParaRPr>
           </a:p>
         </p:txBody>
       </p:sp>
@@ -3977,7 +4070,7 @@
                 <a:solidFill>
                   <a:srgbClr val="E0A030"/>
                 </a:solidFill>
-                <a:latin typeface="Cambria" panose="02040503050406030204"/>
+                <a:latin typeface="Cambria"/>
               </a:rPr>
               <a:t>Команда</a:t>
             </a:r>
@@ -3986,7 +4079,7 @@
                 <a:solidFill>
                   <a:srgbClr val="E0A030"/>
                 </a:solidFill>
-                <a:latin typeface="Cambria" panose="02040503050406030204"/>
+                <a:latin typeface="Cambria"/>
               </a:rPr>
               <a:t> - </a:t>
             </a:r>
@@ -3995,7 +4088,7 @@
                 <a:solidFill>
                   <a:srgbClr val="E0A030"/>
                 </a:solidFill>
-                <a:latin typeface="Cambria" panose="02040503050406030204"/>
+                <a:latin typeface="Cambria"/>
               </a:rPr>
               <a:t>newera</a:t>
             </a:r>
@@ -4003,7 +4096,7 @@
               <a:solidFill>
                 <a:srgbClr val="E0A030"/>
               </a:solidFill>
-              <a:latin typeface="Cambria" panose="02040503050406030204"/>
+              <a:latin typeface="Cambria"/>
             </a:endParaRPr>
           </a:p>
         </p:txBody>
@@ -4114,6 +4207,32 @@
           <a:lstStyle/>
           <a:p>
             <a:pPr algn="ctr"/>
+            <a:endParaRPr/>
+          </a:p>
+        </p:txBody>
+      </p:sp>
+      <p:sp>
+        <p:nvSpPr>
+          <p:cNvPr id="6" name="Нижний колонтитул 5">
+            <a:extLst>
+              <a:ext uri="{FF2B5EF4-FFF2-40B4-BE49-F238E27FC236}">
+                <a16:creationId xmlns:a16="http://schemas.microsoft.com/office/drawing/2014/main" id="{C0A9FA2A-B96C-4060-3342-CE8380B94763}"/>
+              </a:ext>
+            </a:extLst>
+          </p:cNvPr>
+          <p:cNvSpPr>
+            <a:spLocks noGrp="1"/>
+          </p:cNvSpPr>
+          <p:nvPr>
+            <p:ph type="ftr" sz="quarter" idx="11"/>
+          </p:nvPr>
+        </p:nvSpPr>
+        <p:spPr/>
+        <p:txBody>
+          <a:bodyPr/>
+          <a:lstStyle/>
+          <a:p>
+            <a:endParaRPr lang="en-US"/>
           </a:p>
         </p:txBody>
       </p:sp>
@@ -4182,7 +4301,7 @@
                 <a:solidFill>
                   <a:srgbClr val="0F3D3E"/>
                 </a:solidFill>
-                <a:latin typeface="Cambria" panose="02040503050406030204"/>
+                <a:latin typeface="Cambria"/>
               </a:rPr>
               <a:t>Команда и роли</a:t>
             </a:r>
@@ -4190,7 +4309,7 @@
               <a:solidFill>
                 <a:srgbClr val="0F3D3E"/>
               </a:solidFill>
-              <a:latin typeface="Cambria" panose="02040503050406030204"/>
+              <a:latin typeface="Cambria"/>
             </a:endParaRPr>
           </a:p>
         </p:txBody>
@@ -4238,6 +4357,7 @@
           <a:lstStyle/>
           <a:p>
             <a:pPr algn="ctr"/>
+            <a:endParaRPr/>
           </a:p>
         </p:txBody>
       </p:sp>
@@ -4287,16 +4407,10 @@
                 <a:solidFill>
                   <a:srgbClr val="FFFFFF"/>
                 </a:solidFill>
-                <a:latin typeface="Cambria" panose="02040503050406030204"/>
+                <a:latin typeface="Cambria"/>
               </a:rPr>
               <a:t>АД</a:t>
             </a:r>
-            <a:endParaRPr sz="2200" b="1">
-              <a:solidFill>
-                <a:srgbClr val="FFFFFF"/>
-              </a:solidFill>
-              <a:latin typeface="Cambria" panose="02040503050406030204"/>
-            </a:endParaRPr>
           </a:p>
         </p:txBody>
       </p:sp>
@@ -4332,16 +4446,10 @@
                 <a:solidFill>
                   <a:srgbClr val="0F3D3E"/>
                 </a:solidFill>
-                <a:latin typeface="Cambria" panose="02040503050406030204"/>
+                <a:latin typeface="Cambria"/>
               </a:rPr>
               <a:t>Алексеев Даниил</a:t>
             </a:r>
-            <a:endParaRPr sz="1700" b="1">
-              <a:solidFill>
-                <a:srgbClr val="0F3D3E"/>
-              </a:solidFill>
-              <a:latin typeface="Cambria" panose="02040503050406030204"/>
-            </a:endParaRPr>
           </a:p>
         </p:txBody>
       </p:sp>
@@ -4377,16 +4485,10 @@
                 <a:solidFill>
                   <a:srgbClr val="0F6B6B"/>
                 </a:solidFill>
-                <a:latin typeface="Calibri" panose="020F0502020204030204"/>
+                <a:latin typeface="Calibri"/>
               </a:rPr>
               <a:t>Тимлид</a:t>
             </a:r>
-            <a:endParaRPr sz="1400" b="1">
-              <a:solidFill>
-                <a:srgbClr val="0F6B6B"/>
-              </a:solidFill>
-              <a:latin typeface="Calibri" panose="020F0502020204030204"/>
-            </a:endParaRPr>
           </a:p>
         </p:txBody>
       </p:sp>
@@ -4422,16 +4524,10 @@
                 <a:solidFill>
                   <a:srgbClr val="5E6F70"/>
                 </a:solidFill>
-                <a:latin typeface="Calibri" panose="020F0502020204030204"/>
+                <a:latin typeface="Calibri"/>
               </a:rPr>
               <a:t>Планирование, методика, презентация</a:t>
             </a:r>
-            <a:endParaRPr sz="1300" b="0">
-              <a:solidFill>
-                <a:srgbClr val="5E6F70"/>
-              </a:solidFill>
-              <a:latin typeface="Calibri" panose="020F0502020204030204"/>
-            </a:endParaRPr>
           </a:p>
         </p:txBody>
       </p:sp>
@@ -4478,6 +4574,7 @@
           <a:lstStyle/>
           <a:p>
             <a:pPr algn="ctr"/>
+            <a:endParaRPr/>
           </a:p>
         </p:txBody>
       </p:sp>
@@ -4527,16 +4624,10 @@
                 <a:solidFill>
                   <a:srgbClr val="FFFFFF"/>
                 </a:solidFill>
-                <a:latin typeface="Cambria" panose="02040503050406030204"/>
+                <a:latin typeface="Cambria"/>
               </a:rPr>
               <a:t>СМ</a:t>
             </a:r>
-            <a:endParaRPr sz="2200" b="1">
-              <a:solidFill>
-                <a:srgbClr val="FFFFFF"/>
-              </a:solidFill>
-              <a:latin typeface="Cambria" panose="02040503050406030204"/>
-            </a:endParaRPr>
           </a:p>
         </p:txBody>
       </p:sp>
@@ -4572,16 +4663,10 @@
                 <a:solidFill>
                   <a:srgbClr val="0F3D3E"/>
                 </a:solidFill>
-                <a:latin typeface="Cambria" panose="02040503050406030204"/>
+                <a:latin typeface="Cambria"/>
               </a:rPr>
               <a:t>Слепцов Михаил</a:t>
             </a:r>
-            <a:endParaRPr sz="1700" b="1">
-              <a:solidFill>
-                <a:srgbClr val="0F3D3E"/>
-              </a:solidFill>
-              <a:latin typeface="Cambria" panose="02040503050406030204"/>
-            </a:endParaRPr>
           </a:p>
         </p:txBody>
       </p:sp>
@@ -4617,16 +4702,10 @@
                 <a:solidFill>
                   <a:srgbClr val="0F6B6B"/>
                 </a:solidFill>
-                <a:latin typeface="Calibri" panose="020F0502020204030204"/>
+                <a:latin typeface="Calibri"/>
               </a:rPr>
               <a:t>DevOps / бэкенд</a:t>
             </a:r>
-            <a:endParaRPr sz="1400" b="1">
-              <a:solidFill>
-                <a:srgbClr val="0F6B6B"/>
-              </a:solidFill>
-              <a:latin typeface="Calibri" panose="020F0502020204030204"/>
-            </a:endParaRPr>
           </a:p>
         </p:txBody>
       </p:sp>
@@ -4662,7 +4741,7 @@
                 <a:solidFill>
                   <a:srgbClr val="5E6F70"/>
                 </a:solidFill>
-                <a:latin typeface="Calibri" panose="020F0502020204030204"/>
+                <a:latin typeface="Calibri"/>
               </a:rPr>
               <a:t>Данные</a:t>
             </a:r>
@@ -4671,7 +4750,7 @@
                 <a:solidFill>
                   <a:srgbClr val="5E6F70"/>
                 </a:solidFill>
-                <a:latin typeface="Calibri" panose="020F0502020204030204"/>
+                <a:latin typeface="Calibri"/>
               </a:rPr>
               <a:t> MOEX, </a:t>
             </a:r>
@@ -4680,7 +4759,7 @@
                 <a:solidFill>
                   <a:srgbClr val="5E6F70"/>
                 </a:solidFill>
-                <a:latin typeface="Calibri" panose="020F0502020204030204"/>
+                <a:latin typeface="Calibri"/>
               </a:rPr>
               <a:t>репозиторий</a:t>
             </a:r>
@@ -4689,7 +4768,7 @@
                 <a:solidFill>
                   <a:srgbClr val="5E6F70"/>
                 </a:solidFill>
-                <a:latin typeface="Calibri" panose="020F0502020204030204"/>
+                <a:latin typeface="Calibri"/>
               </a:rPr>
               <a:t>, скрипты</a:t>
             </a:r>
@@ -4697,7 +4776,7 @@
               <a:solidFill>
                 <a:srgbClr val="5E6F70"/>
               </a:solidFill>
-              <a:latin typeface="Calibri" panose="020F0502020204030204"/>
+              <a:latin typeface="Calibri"/>
             </a:endParaRPr>
           </a:p>
         </p:txBody>
@@ -4745,6 +4824,7 @@
           <a:lstStyle/>
           <a:p>
             <a:pPr algn="ctr"/>
+            <a:endParaRPr/>
           </a:p>
         </p:txBody>
       </p:sp>
@@ -4794,16 +4874,10 @@
                 <a:solidFill>
                   <a:srgbClr val="FFFFFF"/>
                 </a:solidFill>
-                <a:latin typeface="Cambria" panose="02040503050406030204"/>
+                <a:latin typeface="Cambria"/>
               </a:rPr>
               <a:t>АЯ</a:t>
             </a:r>
-            <a:endParaRPr sz="2200" b="1">
-              <a:solidFill>
-                <a:srgbClr val="FFFFFF"/>
-              </a:solidFill>
-              <a:latin typeface="Cambria" panose="02040503050406030204"/>
-            </a:endParaRPr>
           </a:p>
         </p:txBody>
       </p:sp>
@@ -4839,16 +4913,10 @@
                 <a:solidFill>
                   <a:srgbClr val="0F3D3E"/>
                 </a:solidFill>
-                <a:latin typeface="Cambria" panose="02040503050406030204"/>
+                <a:latin typeface="Cambria"/>
               </a:rPr>
               <a:t>Абашкин Ярослав</a:t>
             </a:r>
-            <a:endParaRPr sz="1700" b="1">
-              <a:solidFill>
-                <a:srgbClr val="0F3D3E"/>
-              </a:solidFill>
-              <a:latin typeface="Cambria" panose="02040503050406030204"/>
-            </a:endParaRPr>
           </a:p>
         </p:txBody>
       </p:sp>
@@ -4884,16 +4952,10 @@
                 <a:solidFill>
                   <a:srgbClr val="0F6B6B"/>
                 </a:solidFill>
-                <a:latin typeface="Calibri" panose="020F0502020204030204"/>
+                <a:latin typeface="Calibri"/>
               </a:rPr>
               <a:t>Бэкенд</a:t>
             </a:r>
-            <a:endParaRPr sz="1400" b="1">
-              <a:solidFill>
-                <a:srgbClr val="0F6B6B"/>
-              </a:solidFill>
-              <a:latin typeface="Calibri" panose="020F0502020204030204"/>
-            </a:endParaRPr>
           </a:p>
         </p:txBody>
       </p:sp>
@@ -4929,16 +4991,10 @@
                 <a:solidFill>
                   <a:srgbClr val="5E6F70"/>
                 </a:solidFill>
-                <a:latin typeface="Calibri" panose="020F0502020204030204"/>
+                <a:latin typeface="Calibri"/>
               </a:rPr>
               <a:t>Расчёт сценариев в Excel</a:t>
             </a:r>
-            <a:endParaRPr sz="1300" b="0">
-              <a:solidFill>
-                <a:srgbClr val="5E6F70"/>
-              </a:solidFill>
-              <a:latin typeface="Calibri" panose="020F0502020204030204"/>
-            </a:endParaRPr>
           </a:p>
         </p:txBody>
       </p:sp>
@@ -4985,6 +5041,7 @@
           <a:lstStyle/>
           <a:p>
             <a:pPr algn="ctr"/>
+            <a:endParaRPr/>
           </a:p>
         </p:txBody>
       </p:sp>
@@ -5034,16 +5091,10 @@
                 <a:solidFill>
                   <a:srgbClr val="FFFFFF"/>
                 </a:solidFill>
-                <a:latin typeface="Cambria" panose="02040503050406030204"/>
+                <a:latin typeface="Cambria"/>
               </a:rPr>
               <a:t>ЧА</a:t>
             </a:r>
-            <a:endParaRPr sz="2200" b="1">
-              <a:solidFill>
-                <a:srgbClr val="FFFFFF"/>
-              </a:solidFill>
-              <a:latin typeface="Cambria" panose="02040503050406030204"/>
-            </a:endParaRPr>
           </a:p>
         </p:txBody>
       </p:sp>
@@ -5079,16 +5130,10 @@
                 <a:solidFill>
                   <a:srgbClr val="0F3D3E"/>
                 </a:solidFill>
-                <a:latin typeface="Cambria" panose="02040503050406030204"/>
+                <a:latin typeface="Cambria"/>
               </a:rPr>
               <a:t>Чудаев Александр</a:t>
             </a:r>
-            <a:endParaRPr sz="1700" b="1">
-              <a:solidFill>
-                <a:srgbClr val="0F3D3E"/>
-              </a:solidFill>
-              <a:latin typeface="Cambria" panose="02040503050406030204"/>
-            </a:endParaRPr>
           </a:p>
         </p:txBody>
       </p:sp>
@@ -5124,16 +5169,10 @@
                 <a:solidFill>
                   <a:srgbClr val="0F6B6B"/>
                 </a:solidFill>
-                <a:latin typeface="Calibri" panose="020F0502020204030204"/>
+                <a:latin typeface="Calibri"/>
               </a:rPr>
               <a:t>Фронтенд</a:t>
             </a:r>
-            <a:endParaRPr sz="1400" b="1">
-              <a:solidFill>
-                <a:srgbClr val="0F6B6B"/>
-              </a:solidFill>
-              <a:latin typeface="Calibri" panose="020F0502020204030204"/>
-            </a:endParaRPr>
           </a:p>
         </p:txBody>
       </p:sp>
@@ -5169,16 +5208,75 @@
                 <a:solidFill>
                   <a:srgbClr val="5E6F70"/>
                 </a:solidFill>
-                <a:latin typeface="Calibri" panose="020F0502020204030204"/>
+                <a:latin typeface="Calibri"/>
               </a:rPr>
               <a:t>Графики и визуализация</a:t>
             </a:r>
-            <a:endParaRPr sz="1300" b="0">
-              <a:solidFill>
-                <a:srgbClr val="5E6F70"/>
-              </a:solidFill>
-              <a:latin typeface="Calibri" panose="020F0502020204030204"/>
-            </a:endParaRPr>
+          </a:p>
+        </p:txBody>
+      </p:sp>
+      <p:sp>
+        <p:nvSpPr>
+          <p:cNvPr id="23" name="Номер слайда 22">
+            <a:extLst>
+              <a:ext uri="{FF2B5EF4-FFF2-40B4-BE49-F238E27FC236}">
+                <a16:creationId xmlns:a16="http://schemas.microsoft.com/office/drawing/2014/main" id="{9FEED4F9-69AD-D816-C4DF-3018BEE2C8F9}"/>
+              </a:ext>
+            </a:extLst>
+          </p:cNvPr>
+          <p:cNvSpPr>
+            <a:spLocks noGrp="1"/>
+          </p:cNvSpPr>
+          <p:nvPr>
+            <p:ph type="sldNum" sz="quarter" idx="12"/>
+          </p:nvPr>
+        </p:nvSpPr>
+        <p:spPr>
+          <a:xfrm>
+            <a:off x="8705088" y="4828032"/>
+            <a:ext cx="320040" cy="237744"/>
+          </a:xfrm>
+        </p:spPr>
+        <p:txBody>
+          <a:bodyPr lIns="0" rIns="0" tIns="0" bIns="0" anchor="ctr"/>
+          <a:lstStyle/>
+          <a:p>
+            <a:pPr algn="r"/>
+            <a:fld id="{C1FF6DA9-008F-8B48-92A6-B652298478BF}" type="slidenum">
+              <a:rPr lang="en-US" smtClean="0" sz="1100" b="0">
+                <a:solidFill>
+                  <a:srgbClr val="5E6F70"/>
+                </a:solidFill>
+                <a:latin typeface="Calibri"/>
+              </a:rPr>
+              <a:t>2</a:t>
+            </a:fld>
+            <a:endParaRPr lang="en-US"/>
+          </a:p>
+        </p:txBody>
+      </p:sp>
+      <p:sp>
+        <p:nvSpPr>
+          <p:cNvPr id="24" name="Нижний колонтитул 23">
+            <a:extLst>
+              <a:ext uri="{FF2B5EF4-FFF2-40B4-BE49-F238E27FC236}">
+                <a16:creationId xmlns:a16="http://schemas.microsoft.com/office/drawing/2014/main" id="{5011FA57-D645-1C79-5A0A-4404FA4D779F}"/>
+              </a:ext>
+            </a:extLst>
+          </p:cNvPr>
+          <p:cNvSpPr>
+            <a:spLocks noGrp="1"/>
+          </p:cNvSpPr>
+          <p:nvPr>
+            <p:ph type="ftr" sz="quarter" idx="11"/>
+          </p:nvPr>
+        </p:nvSpPr>
+        <p:spPr/>
+        <p:txBody>
+          <a:bodyPr/>
+          <a:lstStyle/>
+          <a:p>
+            <a:endParaRPr lang="en-US"/>
           </a:p>
         </p:txBody>
       </p:sp>
@@ -5187,6 +5285,18 @@
   <p:clrMapOvr>
     <a:masterClrMapping/>
   </p:clrMapOvr>
+  <mc:AlternateContent xmlns:mc="http://schemas.openxmlformats.org/markup-compatibility/2006">
+    <mc:Choice xmlns:p14="http://schemas.microsoft.com/office/powerpoint/2010/main" Requires="p14">
+      <p:transition spd="slow" p14:dur="1500">
+        <p14:reveal/>
+      </p:transition>
+    </mc:Choice>
+    <mc:Fallback>
+      <p:transition spd="slow">
+        <p:fade/>
+      </p:transition>
+    </mc:Fallback>
+  </mc:AlternateContent>
 </p:sld>
 </file>
 
@@ -5247,7 +5357,7 @@
                 <a:solidFill>
                   <a:srgbClr val="0F3D3E"/>
                 </a:solidFill>
-                <a:latin typeface="Cambria" panose="02040503050406030204"/>
+                <a:latin typeface="Cambria"/>
               </a:rPr>
               <a:t>Как строится стресс-кривая</a:t>
             </a:r>
@@ -5255,7 +5365,7 @@
               <a:solidFill>
                 <a:srgbClr val="0F3D3E"/>
               </a:solidFill>
-              <a:latin typeface="Cambria" panose="02040503050406030204"/>
+              <a:latin typeface="Cambria"/>
             </a:endParaRPr>
           </a:p>
         </p:txBody>
@@ -5292,7 +5402,7 @@
                 <a:solidFill>
                   <a:srgbClr val="1A2B2D"/>
                 </a:solidFill>
-                <a:latin typeface="Calibri" panose="020F0502020204030204"/>
+                <a:latin typeface="Calibri"/>
               </a:rPr>
               <a:t>Строим кривую доходности ОФЗ и шесть её стрессовых вариантов </a:t>
             </a:r>
@@ -5301,16 +5411,10 @@
                 <a:solidFill>
                   <a:srgbClr val="1A2B2D"/>
                 </a:solidFill>
-                <a:latin typeface="Calibri" panose="020F0502020204030204"/>
+                <a:latin typeface="Calibri"/>
               </a:rPr>
               <a:t>по методике Банка России (8-МР). По этим кривым банк оценивает, сколько он потеряет, если ставки резко изменятся.</a:t>
             </a:r>
-            <a:endParaRPr sz="1600" b="0">
-              <a:solidFill>
-                <a:srgbClr val="1A2B2D"/>
-              </a:solidFill>
-              <a:latin typeface="Calibri" panose="020F0502020204030204"/>
-            </a:endParaRPr>
           </a:p>
         </p:txBody>
       </p:sp>
@@ -5357,6 +5461,7 @@
           <a:lstStyle/>
           <a:p>
             <a:pPr algn="ctr"/>
+            <a:endParaRPr/>
           </a:p>
         </p:txBody>
       </p:sp>
@@ -5406,16 +5511,10 @@
                 <a:solidFill>
                   <a:srgbClr val="0F3D3E"/>
                 </a:solidFill>
-                <a:latin typeface="Cambria" panose="02040503050406030204"/>
+                <a:latin typeface="Cambria"/>
               </a:rPr>
               <a:t>1</a:t>
             </a:r>
-            <a:endParaRPr sz="1400" b="1">
-              <a:solidFill>
-                <a:srgbClr val="0F3D3E"/>
-              </a:solidFill>
-              <a:latin typeface="Cambria" panose="02040503050406030204"/>
-            </a:endParaRPr>
           </a:p>
         </p:txBody>
       </p:sp>
@@ -5451,16 +5550,10 @@
                 <a:solidFill>
                   <a:srgbClr val="0F3D3E"/>
                 </a:solidFill>
-                <a:latin typeface="Cambria" panose="02040503050406030204"/>
+                <a:latin typeface="Cambria"/>
               </a:rPr>
               <a:t>Данные MOEX</a:t>
             </a:r>
-            <a:endParaRPr sz="1800" b="1">
-              <a:solidFill>
-                <a:srgbClr val="0F3D3E"/>
-              </a:solidFill>
-              <a:latin typeface="Cambria" panose="02040503050406030204"/>
-            </a:endParaRPr>
           </a:p>
         </p:txBody>
       </p:sp>
@@ -5496,16 +5589,10 @@
                 <a:solidFill>
                   <a:srgbClr val="1A2B2D"/>
                 </a:solidFill>
-                <a:latin typeface="Calibri" panose="020F0502020204030204"/>
+                <a:latin typeface="Calibri"/>
               </a:rPr>
               <a:t>Кривая ОФЗ на 31.07.2026: 12 точек, от 3 месяцев до 30 лет</a:t>
             </a:r>
-            <a:endParaRPr sz="1400" b="0">
-              <a:solidFill>
-                <a:srgbClr val="1A2B2D"/>
-              </a:solidFill>
-              <a:latin typeface="Calibri" panose="020F0502020204030204"/>
-            </a:endParaRPr>
           </a:p>
         </p:txBody>
       </p:sp>
@@ -5541,16 +5628,10 @@
                 <a:solidFill>
                   <a:srgbClr val="E0A030"/>
                 </a:solidFill>
-                <a:latin typeface="Calibri" panose="020F0502020204030204"/>
+                <a:latin typeface="Calibri"/>
               </a:rPr>
               <a:t>›</a:t>
             </a:r>
-            <a:endParaRPr sz="2800" b="1">
-              <a:solidFill>
-                <a:srgbClr val="E0A030"/>
-              </a:solidFill>
-              <a:latin typeface="Calibri" panose="020F0502020204030204"/>
-            </a:endParaRPr>
           </a:p>
         </p:txBody>
       </p:sp>
@@ -5597,6 +5678,7 @@
           <a:lstStyle/>
           <a:p>
             <a:pPr algn="ctr"/>
+            <a:endParaRPr/>
           </a:p>
         </p:txBody>
       </p:sp>
@@ -5646,16 +5728,10 @@
                 <a:solidFill>
                   <a:srgbClr val="0F3D3E"/>
                 </a:solidFill>
-                <a:latin typeface="Cambria" panose="02040503050406030204"/>
+                <a:latin typeface="Cambria"/>
               </a:rPr>
               <a:t>2</a:t>
             </a:r>
-            <a:endParaRPr sz="1400" b="1">
-              <a:solidFill>
-                <a:srgbClr val="0F3D3E"/>
-              </a:solidFill>
-              <a:latin typeface="Cambria" panose="02040503050406030204"/>
-            </a:endParaRPr>
           </a:p>
         </p:txBody>
       </p:sp>
@@ -5691,16 +5767,10 @@
                 <a:solidFill>
                   <a:srgbClr val="0F3D3E"/>
                 </a:solidFill>
-                <a:latin typeface="Cambria" panose="02040503050406030204"/>
+                <a:latin typeface="Cambria"/>
               </a:rPr>
               <a:t>Сетка ЦБ</a:t>
             </a:r>
-            <a:endParaRPr sz="1800" b="1">
-              <a:solidFill>
-                <a:srgbClr val="0F3D3E"/>
-              </a:solidFill>
-              <a:latin typeface="Cambria" panose="02040503050406030204"/>
-            </a:endParaRPr>
           </a:p>
         </p:txBody>
       </p:sp>
@@ -5736,16 +5806,10 @@
                 <a:solidFill>
                   <a:srgbClr val="1A2B2D"/>
                 </a:solidFill>
-                <a:latin typeface="Calibri" panose="020F0502020204030204"/>
+                <a:latin typeface="Calibri"/>
               </a:rPr>
               <a:t>19 сроков: 3 самых коротких по ближайшему значению, 16 интерполяцией</a:t>
             </a:r>
-            <a:endParaRPr sz="1400" b="0">
-              <a:solidFill>
-                <a:srgbClr val="1A2B2D"/>
-              </a:solidFill>
-              <a:latin typeface="Calibri" panose="020F0502020204030204"/>
-            </a:endParaRPr>
           </a:p>
         </p:txBody>
       </p:sp>
@@ -5781,16 +5845,10 @@
                 <a:solidFill>
                   <a:srgbClr val="E0A030"/>
                 </a:solidFill>
-                <a:latin typeface="Calibri" panose="020F0502020204030204"/>
+                <a:latin typeface="Calibri"/>
               </a:rPr>
               <a:t>›</a:t>
             </a:r>
-            <a:endParaRPr sz="2800" b="1">
-              <a:solidFill>
-                <a:srgbClr val="E0A030"/>
-              </a:solidFill>
-              <a:latin typeface="Calibri" panose="020F0502020204030204"/>
-            </a:endParaRPr>
           </a:p>
         </p:txBody>
       </p:sp>
@@ -5837,6 +5895,7 @@
           <a:lstStyle/>
           <a:p>
             <a:pPr algn="ctr"/>
+            <a:endParaRPr/>
           </a:p>
         </p:txBody>
       </p:sp>
@@ -5886,16 +5945,10 @@
                 <a:solidFill>
                   <a:srgbClr val="0F3D3E"/>
                 </a:solidFill>
-                <a:latin typeface="Cambria" panose="02040503050406030204"/>
+                <a:latin typeface="Cambria"/>
               </a:rPr>
               <a:t>3</a:t>
             </a:r>
-            <a:endParaRPr sz="1400" b="1">
-              <a:solidFill>
-                <a:srgbClr val="0F3D3E"/>
-              </a:solidFill>
-              <a:latin typeface="Cambria" panose="02040503050406030204"/>
-            </a:endParaRPr>
           </a:p>
         </p:txBody>
       </p:sp>
@@ -5931,16 +5984,10 @@
                 <a:solidFill>
                   <a:srgbClr val="FFFFFF"/>
                 </a:solidFill>
-                <a:latin typeface="Cambria" panose="02040503050406030204"/>
+                <a:latin typeface="Cambria"/>
               </a:rPr>
               <a:t>6 сценариев</a:t>
             </a:r>
-            <a:endParaRPr sz="1800" b="1">
-              <a:solidFill>
-                <a:srgbClr val="FFFFFF"/>
-              </a:solidFill>
-              <a:latin typeface="Cambria" panose="02040503050406030204"/>
-            </a:endParaRPr>
           </a:p>
         </p:txBody>
       </p:sp>
@@ -5976,16 +6023,10 @@
                 <a:solidFill>
                   <a:srgbClr val="FFFFFF"/>
                 </a:solidFill>
-                <a:latin typeface="Calibri" panose="020F0502020204030204"/>
+                <a:latin typeface="Calibri"/>
               </a:rPr>
               <a:t>Сдвиги всей кривой, изменение наклона и коротких ставок</a:t>
             </a:r>
-            <a:endParaRPr sz="1400" b="0">
-              <a:solidFill>
-                <a:srgbClr val="FFFFFF"/>
-              </a:solidFill>
-              <a:latin typeface="Calibri" panose="020F0502020204030204"/>
-            </a:endParaRPr>
           </a:p>
         </p:txBody>
       </p:sp>
@@ -6021,16 +6062,75 @@
                 <a:solidFill>
                   <a:srgbClr val="5E6F70"/>
                 </a:solidFill>
-                <a:latin typeface="Calibri" panose="020F0502020204030204"/>
+                <a:latin typeface="Calibri"/>
               </a:rPr>
               <a:t>Наши кривые дальше используют команды 1 и 3: по ним считается, как меняется стоимость портфеля банка.</a:t>
             </a:r>
-            <a:endParaRPr sz="1400" b="0">
-              <a:solidFill>
-                <a:srgbClr val="5E6F70"/>
-              </a:solidFill>
-              <a:latin typeface="Calibri" panose="020F0502020204030204"/>
-            </a:endParaRPr>
+          </a:p>
+        </p:txBody>
+      </p:sp>
+      <p:sp>
+        <p:nvSpPr>
+          <p:cNvPr id="19" name="Номер слайда 18">
+            <a:extLst>
+              <a:ext uri="{FF2B5EF4-FFF2-40B4-BE49-F238E27FC236}">
+                <a16:creationId xmlns:a16="http://schemas.microsoft.com/office/drawing/2014/main" id="{FDB6BDB7-3527-A3A2-96C0-1C8FD4A5B246}"/>
+              </a:ext>
+            </a:extLst>
+          </p:cNvPr>
+          <p:cNvSpPr>
+            <a:spLocks noGrp="1"/>
+          </p:cNvSpPr>
+          <p:nvPr>
+            <p:ph type="sldNum" sz="quarter" idx="12"/>
+          </p:nvPr>
+        </p:nvSpPr>
+        <p:spPr>
+          <a:xfrm>
+            <a:off x="8705088" y="4828032"/>
+            <a:ext cx="320040" cy="237744"/>
+          </a:xfrm>
+        </p:spPr>
+        <p:txBody>
+          <a:bodyPr lIns="0" rIns="0" tIns="0" bIns="0" anchor="ctr"/>
+          <a:lstStyle/>
+          <a:p>
+            <a:pPr algn="r"/>
+            <a:fld id="{C1FF6DA9-008F-8B48-92A6-B652298478BF}" type="slidenum">
+              <a:rPr lang="en-US" smtClean="0" sz="1100" b="0">
+                <a:solidFill>
+                  <a:srgbClr val="5E6F70"/>
+                </a:solidFill>
+                <a:latin typeface="Calibri"/>
+              </a:rPr>
+              <a:t>3</a:t>
+            </a:fld>
+            <a:endParaRPr lang="en-US"/>
+          </a:p>
+        </p:txBody>
+      </p:sp>
+      <p:sp>
+        <p:nvSpPr>
+          <p:cNvPr id="20" name="Нижний колонтитул 19">
+            <a:extLst>
+              <a:ext uri="{FF2B5EF4-FFF2-40B4-BE49-F238E27FC236}">
+                <a16:creationId xmlns:a16="http://schemas.microsoft.com/office/drawing/2014/main" id="{E60856EE-9ECA-33A5-307B-2E7995D11DB9}"/>
+              </a:ext>
+            </a:extLst>
+          </p:cNvPr>
+          <p:cNvSpPr>
+            <a:spLocks noGrp="1"/>
+          </p:cNvSpPr>
+          <p:nvPr>
+            <p:ph type="ftr" sz="quarter" idx="11"/>
+          </p:nvPr>
+        </p:nvSpPr>
+        <p:spPr/>
+        <p:txBody>
+          <a:bodyPr/>
+          <a:lstStyle/>
+          <a:p>
+            <a:endParaRPr lang="en-US"/>
           </a:p>
         </p:txBody>
       </p:sp>
@@ -6039,6 +6139,18 @@
   <p:clrMapOvr>
     <a:masterClrMapping/>
   </p:clrMapOvr>
+  <mc:AlternateContent xmlns:mc="http://schemas.openxmlformats.org/markup-compatibility/2006">
+    <mc:Choice xmlns:p159="http://schemas.microsoft.com/office/powerpoint/2015/09/main" Requires="p159">
+      <p:transition xmlns:p14="http://schemas.microsoft.com/office/powerpoint/2010/main" spd="slow" p14:dur="2000">
+        <p159:morph option="byObject"/>
+      </p:transition>
+    </mc:Choice>
+    <mc:Fallback>
+      <p:transition spd="slow">
+        <p:fade/>
+      </p:transition>
+    </mc:Fallback>
+  </mc:AlternateContent>
 </p:sld>
 </file>
 
@@ -6099,16 +6211,10 @@
                 <a:solidFill>
                   <a:srgbClr val="0F3D3E"/>
                 </a:solidFill>
-                <a:latin typeface="Cambria" panose="02040503050406030204"/>
+                <a:latin typeface="Cambria"/>
               </a:rPr>
               <a:t>Шесть сценариев по 8-МР (рубль)</a:t>
             </a:r>
-            <a:endParaRPr sz="2800" b="1">
-              <a:solidFill>
-                <a:srgbClr val="0F3D3E"/>
-              </a:solidFill>
-              <a:latin typeface="Cambria" panose="02040503050406030204"/>
-            </a:endParaRPr>
           </a:p>
         </p:txBody>
       </p:sp>
@@ -6131,9 +6237,27 @@
                 <a:tableStyleId>{5C22544A-7EE6-4342-B048-85BDC9FD1C3A}</a:tableStyleId>
               </a:tblPr>
               <a:tblGrid>
-                <a:gridCol w="548640"/>
-                <a:gridCol w="2743200"/>
-                <a:gridCol w="4937760"/>
+                <a:gridCol w="548640">
+                  <a:extLst>
+                    <a:ext uri="{9D8B030D-6E8A-4147-A177-3AD203B41FA5}">
+                      <a16:colId xmlns:a16="http://schemas.microsoft.com/office/drawing/2014/main" val="20000"/>
+                    </a:ext>
+                  </a:extLst>
+                </a:gridCol>
+                <a:gridCol w="2743200">
+                  <a:extLst>
+                    <a:ext uri="{9D8B030D-6E8A-4147-A177-3AD203B41FA5}">
+                      <a16:colId xmlns:a16="http://schemas.microsoft.com/office/drawing/2014/main" val="20001"/>
+                    </a:ext>
+                  </a:extLst>
+                </a:gridCol>
+                <a:gridCol w="4937760">
+                  <a:extLst>
+                    <a:ext uri="{9D8B030D-6E8A-4147-A177-3AD203B41FA5}">
+                      <a16:colId xmlns:a16="http://schemas.microsoft.com/office/drawing/2014/main" val="20002"/>
+                    </a:ext>
+                  </a:extLst>
+                </a:gridCol>
               </a:tblGrid>
               <a:tr h="374904">
                 <a:tc>
@@ -6147,16 +6271,10 @@
                           <a:solidFill>
                             <a:srgbClr val="FFFFFF"/>
                           </a:solidFill>
-                          <a:latin typeface="Calibri" panose="020F0502020204030204"/>
+                          <a:latin typeface="Calibri"/>
                         </a:rPr>
                         <a:t>№</a:t>
                       </a:r>
-                      <a:endParaRPr sz="1400" b="1">
-                        <a:solidFill>
-                          <a:srgbClr val="FFFFFF"/>
-                        </a:solidFill>
-                        <a:latin typeface="Calibri" panose="020F0502020204030204"/>
-                      </a:endParaRPr>
                     </a:p>
                   </a:txBody>
                   <a:tcPr marL="109728" marR="109728" anchor="ctr">
@@ -6176,16 +6294,10 @@
                           <a:solidFill>
                             <a:srgbClr val="FFFFFF"/>
                           </a:solidFill>
-                          <a:latin typeface="Calibri" panose="020F0502020204030204"/>
+                          <a:latin typeface="Calibri"/>
                         </a:rPr>
                         <a:t>Сценарий</a:t>
                       </a:r>
-                      <a:endParaRPr sz="1400" b="1">
-                        <a:solidFill>
-                          <a:srgbClr val="FFFFFF"/>
-                        </a:solidFill>
-                        <a:latin typeface="Calibri" panose="020F0502020204030204"/>
-                      </a:endParaRPr>
                     </a:p>
                   </a:txBody>
                   <a:tcPr marL="109728" marR="109728" anchor="ctr">
@@ -6205,16 +6317,10 @@
                           <a:solidFill>
                             <a:srgbClr val="FFFFFF"/>
                           </a:solidFill>
-                          <a:latin typeface="Calibri" panose="020F0502020204030204"/>
+                          <a:latin typeface="Calibri"/>
                         </a:rPr>
                         <a:t>Расчётная ставка</a:t>
                       </a:r>
-                      <a:endParaRPr sz="1400" b="1">
-                        <a:solidFill>
-                          <a:srgbClr val="FFFFFF"/>
-                        </a:solidFill>
-                        <a:latin typeface="Calibri" panose="020F0502020204030204"/>
-                      </a:endParaRPr>
                     </a:p>
                   </a:txBody>
                   <a:tcPr marL="109728" marR="109728" anchor="ctr">
@@ -6223,6 +6329,11 @@
                     </a:solidFill>
                   </a:tcPr>
                 </a:tc>
+                <a:extLst>
+                  <a:ext uri="{0D108BD9-81ED-4DB2-BD59-A6C34878D82A}">
+                    <a16:rowId xmlns:a16="http://schemas.microsoft.com/office/drawing/2014/main" val="10000"/>
+                  </a:ext>
+                </a:extLst>
               </a:tr>
               <a:tr h="374904">
                 <a:tc>
@@ -6236,16 +6347,10 @@
                           <a:solidFill>
                             <a:srgbClr val="1A2B2D"/>
                           </a:solidFill>
-                          <a:latin typeface="Calibri" panose="020F0502020204030204"/>
+                          <a:latin typeface="Calibri"/>
                         </a:rPr>
                         <a:t>1</a:t>
                       </a:r>
-                      <a:endParaRPr sz="1400" b="0">
-                        <a:solidFill>
-                          <a:srgbClr val="1A2B2D"/>
-                        </a:solidFill>
-                        <a:latin typeface="Calibri" panose="020F0502020204030204"/>
-                      </a:endParaRPr>
                     </a:p>
                   </a:txBody>
                   <a:tcPr marL="109728" marR="109728" anchor="ctr">
@@ -6265,16 +6370,10 @@
                           <a:solidFill>
                             <a:srgbClr val="1A2B2D"/>
                           </a:solidFill>
-                          <a:latin typeface="Calibri" panose="020F0502020204030204"/>
+                          <a:latin typeface="Calibri"/>
                         </a:rPr>
                         <a:t>Параллельно вверх</a:t>
                       </a:r>
-                      <a:endParaRPr sz="1400" b="1">
-                        <a:solidFill>
-                          <a:srgbClr val="1A2B2D"/>
-                        </a:solidFill>
-                        <a:latin typeface="Calibri" panose="020F0502020204030204"/>
-                      </a:endParaRPr>
                     </a:p>
                   </a:txBody>
                   <a:tcPr marL="109728" marR="109728" anchor="ctr">
@@ -6294,16 +6393,10 @@
                           <a:solidFill>
                             <a:srgbClr val="1A2B2D"/>
                           </a:solidFill>
-                          <a:latin typeface="Calibri" panose="020F0502020204030204"/>
+                          <a:latin typeface="Calibri"/>
                         </a:rPr>
                         <a:t>БС + 4</a:t>
                       </a:r>
-                      <a:endParaRPr sz="1400" b="0">
-                        <a:solidFill>
-                          <a:srgbClr val="1A2B2D"/>
-                        </a:solidFill>
-                        <a:latin typeface="Calibri" panose="020F0502020204030204"/>
-                      </a:endParaRPr>
                     </a:p>
                   </a:txBody>
                   <a:tcPr marL="109728" marR="109728" anchor="ctr">
@@ -6312,6 +6405,11 @@
                     </a:solidFill>
                   </a:tcPr>
                 </a:tc>
+                <a:extLst>
+                  <a:ext uri="{0D108BD9-81ED-4DB2-BD59-A6C34878D82A}">
+                    <a16:rowId xmlns:a16="http://schemas.microsoft.com/office/drawing/2014/main" val="10001"/>
+                  </a:ext>
+                </a:extLst>
               </a:tr>
               <a:tr h="374904">
                 <a:tc>
@@ -6325,16 +6423,10 @@
                           <a:solidFill>
                             <a:srgbClr val="1A2B2D"/>
                           </a:solidFill>
-                          <a:latin typeface="Calibri" panose="020F0502020204030204"/>
+                          <a:latin typeface="Calibri"/>
                         </a:rPr>
                         <a:t>2</a:t>
                       </a:r>
-                      <a:endParaRPr sz="1400" b="0">
-                        <a:solidFill>
-                          <a:srgbClr val="1A2B2D"/>
-                        </a:solidFill>
-                        <a:latin typeface="Calibri" panose="020F0502020204030204"/>
-                      </a:endParaRPr>
                     </a:p>
                   </a:txBody>
                   <a:tcPr marL="109728" marR="109728" anchor="ctr">
@@ -6354,16 +6446,10 @@
                           <a:solidFill>
                             <a:srgbClr val="1A2B2D"/>
                           </a:solidFill>
-                          <a:latin typeface="Calibri" panose="020F0502020204030204"/>
+                          <a:latin typeface="Calibri"/>
                         </a:rPr>
                         <a:t>Параллельно вниз</a:t>
                       </a:r>
-                      <a:endParaRPr sz="1400" b="1">
-                        <a:solidFill>
-                          <a:srgbClr val="1A2B2D"/>
-                        </a:solidFill>
-                        <a:latin typeface="Calibri" panose="020F0502020204030204"/>
-                      </a:endParaRPr>
                     </a:p>
                   </a:txBody>
                   <a:tcPr marL="109728" marR="109728" anchor="ctr">
@@ -6383,16 +6469,10 @@
                           <a:solidFill>
                             <a:srgbClr val="1A2B2D"/>
                           </a:solidFill>
-                          <a:latin typeface="Calibri" panose="020F0502020204030204"/>
+                          <a:latin typeface="Calibri"/>
                         </a:rPr>
                         <a:t>БС − 4</a:t>
                       </a:r>
-                      <a:endParaRPr sz="1400" b="0">
-                        <a:solidFill>
-                          <a:srgbClr val="1A2B2D"/>
-                        </a:solidFill>
-                        <a:latin typeface="Calibri" panose="020F0502020204030204"/>
-                      </a:endParaRPr>
                     </a:p>
                   </a:txBody>
                   <a:tcPr marL="109728" marR="109728" anchor="ctr">
@@ -6401,6 +6481,11 @@
                     </a:solidFill>
                   </a:tcPr>
                 </a:tc>
+                <a:extLst>
+                  <a:ext uri="{0D108BD9-81ED-4DB2-BD59-A6C34878D82A}">
+                    <a16:rowId xmlns:a16="http://schemas.microsoft.com/office/drawing/2014/main" val="10002"/>
+                  </a:ext>
+                </a:extLst>
               </a:tr>
               <a:tr h="374904">
                 <a:tc>
@@ -6414,16 +6499,10 @@
                           <a:solidFill>
                             <a:srgbClr val="1A2B2D"/>
                           </a:solidFill>
-                          <a:latin typeface="Calibri" panose="020F0502020204030204"/>
+                          <a:latin typeface="Calibri"/>
                         </a:rPr>
                         <a:t>3</a:t>
                       </a:r>
-                      <a:endParaRPr sz="1400" b="0">
-                        <a:solidFill>
-                          <a:srgbClr val="1A2B2D"/>
-                        </a:solidFill>
-                        <a:latin typeface="Calibri" panose="020F0502020204030204"/>
-                      </a:endParaRPr>
                     </a:p>
                   </a:txBody>
                   <a:tcPr marL="109728" marR="109728" anchor="ctr">
@@ -6443,16 +6522,10 @@
                           <a:solidFill>
                             <a:srgbClr val="1A2B2D"/>
                           </a:solidFill>
-                          <a:latin typeface="Calibri" panose="020F0502020204030204"/>
+                          <a:latin typeface="Calibri"/>
                         </a:rPr>
                         <a:t>Увеличение наклона</a:t>
                       </a:r>
-                      <a:endParaRPr sz="1400" b="1">
-                        <a:solidFill>
-                          <a:srgbClr val="1A2B2D"/>
-                        </a:solidFill>
-                        <a:latin typeface="Calibri" panose="020F0502020204030204"/>
-                      </a:endParaRPr>
                     </a:p>
                   </a:txBody>
                   <a:tcPr marL="109728" marR="109728" anchor="ctr">
@@ -6472,16 +6545,10 @@
                           <a:solidFill>
                             <a:srgbClr val="1A2B2D"/>
                           </a:solidFill>
-                          <a:latin typeface="Calibri" panose="020F0502020204030204"/>
+                          <a:latin typeface="Calibri"/>
                         </a:rPr>
                         <a:t>БС − 0,65·5·e^(−T/4) + 0,9·3·(1 − e^(−T/4))</a:t>
                       </a:r>
-                      <a:endParaRPr sz="1400" b="0">
-                        <a:solidFill>
-                          <a:srgbClr val="1A2B2D"/>
-                        </a:solidFill>
-                        <a:latin typeface="Calibri" panose="020F0502020204030204"/>
-                      </a:endParaRPr>
                     </a:p>
                   </a:txBody>
                   <a:tcPr marL="109728" marR="109728" anchor="ctr">
@@ -6490,6 +6557,11 @@
                     </a:solidFill>
                   </a:tcPr>
                 </a:tc>
+                <a:extLst>
+                  <a:ext uri="{0D108BD9-81ED-4DB2-BD59-A6C34878D82A}">
+                    <a16:rowId xmlns:a16="http://schemas.microsoft.com/office/drawing/2014/main" val="10003"/>
+                  </a:ext>
+                </a:extLst>
               </a:tr>
               <a:tr h="374904">
                 <a:tc>
@@ -6503,16 +6575,10 @@
                           <a:solidFill>
                             <a:srgbClr val="1A2B2D"/>
                           </a:solidFill>
-                          <a:latin typeface="Calibri" panose="020F0502020204030204"/>
+                          <a:latin typeface="Calibri"/>
                         </a:rPr>
                         <a:t>4</a:t>
                       </a:r>
-                      <a:endParaRPr sz="1400" b="0">
-                        <a:solidFill>
-                          <a:srgbClr val="1A2B2D"/>
-                        </a:solidFill>
-                        <a:latin typeface="Calibri" panose="020F0502020204030204"/>
-                      </a:endParaRPr>
                     </a:p>
                   </a:txBody>
                   <a:tcPr marL="109728" marR="109728" anchor="ctr">
@@ -6532,16 +6598,10 @@
                           <a:solidFill>
                             <a:srgbClr val="1A2B2D"/>
                           </a:solidFill>
-                          <a:latin typeface="Calibri" panose="020F0502020204030204"/>
+                          <a:latin typeface="Calibri"/>
                         </a:rPr>
                         <a:t>Уменьшение наклона</a:t>
                       </a:r>
-                      <a:endParaRPr sz="1400" b="1">
-                        <a:solidFill>
-                          <a:srgbClr val="1A2B2D"/>
-                        </a:solidFill>
-                        <a:latin typeface="Calibri" panose="020F0502020204030204"/>
-                      </a:endParaRPr>
                     </a:p>
                   </a:txBody>
                   <a:tcPr marL="109728" marR="109728" anchor="ctr">
@@ -6561,16 +6621,10 @@
                           <a:solidFill>
                             <a:srgbClr val="1A2B2D"/>
                           </a:solidFill>
-                          <a:latin typeface="Calibri" panose="020F0502020204030204"/>
+                          <a:latin typeface="Calibri"/>
                         </a:rPr>
                         <a:t>БС + 0,8·5·e^(−T/4) − 0,6·3·(1 − e^(−T/4))</a:t>
                       </a:r>
-                      <a:endParaRPr sz="1400" b="0">
-                        <a:solidFill>
-                          <a:srgbClr val="1A2B2D"/>
-                        </a:solidFill>
-                        <a:latin typeface="Calibri" panose="020F0502020204030204"/>
-                      </a:endParaRPr>
                     </a:p>
                   </a:txBody>
                   <a:tcPr marL="109728" marR="109728" anchor="ctr">
@@ -6579,6 +6633,11 @@
                     </a:solidFill>
                   </a:tcPr>
                 </a:tc>
+                <a:extLst>
+                  <a:ext uri="{0D108BD9-81ED-4DB2-BD59-A6C34878D82A}">
+                    <a16:rowId xmlns:a16="http://schemas.microsoft.com/office/drawing/2014/main" val="10004"/>
+                  </a:ext>
+                </a:extLst>
               </a:tr>
               <a:tr h="374904">
                 <a:tc>
@@ -6592,16 +6651,10 @@
                           <a:solidFill>
                             <a:srgbClr val="1A2B2D"/>
                           </a:solidFill>
-                          <a:latin typeface="Calibri" panose="020F0502020204030204"/>
+                          <a:latin typeface="Calibri"/>
                         </a:rPr>
                         <a:t>5</a:t>
                       </a:r>
-                      <a:endParaRPr sz="1400" b="0">
-                        <a:solidFill>
-                          <a:srgbClr val="1A2B2D"/>
-                        </a:solidFill>
-                        <a:latin typeface="Calibri" panose="020F0502020204030204"/>
-                      </a:endParaRPr>
                     </a:p>
                   </a:txBody>
                   <a:tcPr marL="109728" marR="109728" anchor="ctr">
@@ -6621,16 +6674,10 @@
                           <a:solidFill>
                             <a:srgbClr val="1A2B2D"/>
                           </a:solidFill>
-                          <a:latin typeface="Calibri" panose="020F0502020204030204"/>
+                          <a:latin typeface="Calibri"/>
                         </a:rPr>
                         <a:t>Рост коротких ставок</a:t>
                       </a:r>
-                      <a:endParaRPr sz="1400" b="1">
-                        <a:solidFill>
-                          <a:srgbClr val="1A2B2D"/>
-                        </a:solidFill>
-                        <a:latin typeface="Calibri" panose="020F0502020204030204"/>
-                      </a:endParaRPr>
                     </a:p>
                   </a:txBody>
                   <a:tcPr marL="109728" marR="109728" anchor="ctr">
@@ -6650,16 +6697,10 @@
                           <a:solidFill>
                             <a:srgbClr val="1A2B2D"/>
                           </a:solidFill>
-                          <a:latin typeface="Calibri" panose="020F0502020204030204"/>
+                          <a:latin typeface="Calibri"/>
                         </a:rPr>
                         <a:t>БС + 5·e^(−T/4)</a:t>
                       </a:r>
-                      <a:endParaRPr sz="1400" b="0">
-                        <a:solidFill>
-                          <a:srgbClr val="1A2B2D"/>
-                        </a:solidFill>
-                        <a:latin typeface="Calibri" panose="020F0502020204030204"/>
-                      </a:endParaRPr>
                     </a:p>
                   </a:txBody>
                   <a:tcPr marL="109728" marR="109728" anchor="ctr">
@@ -6668,6 +6709,11 @@
                     </a:solidFill>
                   </a:tcPr>
                 </a:tc>
+                <a:extLst>
+                  <a:ext uri="{0D108BD9-81ED-4DB2-BD59-A6C34878D82A}">
+                    <a16:rowId xmlns:a16="http://schemas.microsoft.com/office/drawing/2014/main" val="10005"/>
+                  </a:ext>
+                </a:extLst>
               </a:tr>
               <a:tr h="374904">
                 <a:tc>
@@ -6681,16 +6727,10 @@
                           <a:solidFill>
                             <a:srgbClr val="1A2B2D"/>
                           </a:solidFill>
-                          <a:latin typeface="Calibri" panose="020F0502020204030204"/>
+                          <a:latin typeface="Calibri"/>
                         </a:rPr>
                         <a:t>6</a:t>
                       </a:r>
-                      <a:endParaRPr sz="1400" b="0">
-                        <a:solidFill>
-                          <a:srgbClr val="1A2B2D"/>
-                        </a:solidFill>
-                        <a:latin typeface="Calibri" panose="020F0502020204030204"/>
-                      </a:endParaRPr>
                     </a:p>
                   </a:txBody>
                   <a:tcPr marL="109728" marR="109728" anchor="ctr">
@@ -6710,16 +6750,10 @@
                           <a:solidFill>
                             <a:srgbClr val="1A2B2D"/>
                           </a:solidFill>
-                          <a:latin typeface="Calibri" panose="020F0502020204030204"/>
+                          <a:latin typeface="Calibri"/>
                         </a:rPr>
                         <a:t>Снижение коротких ставок</a:t>
                       </a:r>
-                      <a:endParaRPr sz="1400" b="1">
-                        <a:solidFill>
-                          <a:srgbClr val="1A2B2D"/>
-                        </a:solidFill>
-                        <a:latin typeface="Calibri" panose="020F0502020204030204"/>
-                      </a:endParaRPr>
                     </a:p>
                   </a:txBody>
                   <a:tcPr marL="109728" marR="109728" anchor="ctr">
@@ -6739,16 +6773,10 @@
                           <a:solidFill>
                             <a:srgbClr val="1A2B2D"/>
                           </a:solidFill>
-                          <a:latin typeface="Calibri" panose="020F0502020204030204"/>
+                          <a:latin typeface="Calibri"/>
                         </a:rPr>
                         <a:t>БС − 5·e^(−T/4)</a:t>
                       </a:r>
-                      <a:endParaRPr sz="1400" b="0">
-                        <a:solidFill>
-                          <a:srgbClr val="1A2B2D"/>
-                        </a:solidFill>
-                        <a:latin typeface="Calibri" panose="020F0502020204030204"/>
-                      </a:endParaRPr>
                     </a:p>
                   </a:txBody>
                   <a:tcPr marL="109728" marR="109728" anchor="ctr">
@@ -6757,6 +6785,11 @@
                     </a:solidFill>
                   </a:tcPr>
                 </a:tc>
+                <a:extLst>
+                  <a:ext uri="{0D108BD9-81ED-4DB2-BD59-A6C34878D82A}">
+                    <a16:rowId xmlns:a16="http://schemas.microsoft.com/office/drawing/2014/main" val="10006"/>
+                  </a:ext>
+                </a:extLst>
               </a:tr>
             </a:tbl>
           </a:graphicData>
@@ -6794,7 +6827,7 @@
                 <a:solidFill>
                   <a:srgbClr val="1A2B2D"/>
                 </a:solidFill>
-                <a:latin typeface="Calibri" panose="020F0502020204030204"/>
+                <a:latin typeface="Calibri"/>
               </a:rPr>
               <a:t>БС</a:t>
             </a:r>
@@ -6803,7 +6836,7 @@
                 <a:solidFill>
                   <a:srgbClr val="1A2B2D"/>
                 </a:solidFill>
-                <a:latin typeface="Calibri" panose="020F0502020204030204"/>
+                <a:latin typeface="Calibri"/>
               </a:rPr>
               <a:t> — базовая ставка, %;  </a:t>
             </a:r>
@@ -6812,7 +6845,7 @@
                 <a:solidFill>
                   <a:srgbClr val="1A2B2D"/>
                 </a:solidFill>
-                <a:latin typeface="Calibri" panose="020F0502020204030204"/>
+                <a:latin typeface="Calibri"/>
               </a:rPr>
               <a:t>T</a:t>
             </a:r>
@@ -6821,16 +6854,10 @@
                 <a:solidFill>
                   <a:srgbClr val="1A2B2D"/>
                 </a:solidFill>
-                <a:latin typeface="Calibri" panose="020F0502020204030204"/>
+                <a:latin typeface="Calibri"/>
               </a:rPr>
               <a:t> — срок до середины интервала, лет.</a:t>
             </a:r>
-            <a:endParaRPr sz="1400" b="0">
-              <a:solidFill>
-                <a:srgbClr val="1A2B2D"/>
-              </a:solidFill>
-              <a:latin typeface="Calibri" panose="020F0502020204030204"/>
-            </a:endParaRPr>
           </a:p>
           <a:p>
             <a:pPr algn="l">
@@ -6843,16 +6870,75 @@
                 <a:solidFill>
                   <a:srgbClr val="1A2B2D"/>
                 </a:solidFill>
-                <a:latin typeface="Calibri" panose="020F0502020204030204"/>
+                <a:latin typeface="Calibri"/>
               </a:rPr>
               <a:t>Параметры для рубля (таблица 3 8-МР): параллельный сдвиг 4 п.п., короткие ставки 5 п.п., длинные 3 п.п.; t = 4.</a:t>
             </a:r>
-            <a:endParaRPr sz="1400" b="0">
-              <a:solidFill>
-                <a:srgbClr val="1A2B2D"/>
-              </a:solidFill>
-              <a:latin typeface="Calibri" panose="020F0502020204030204"/>
-            </a:endParaRPr>
+          </a:p>
+        </p:txBody>
+      </p:sp>
+      <p:sp>
+        <p:nvSpPr>
+          <p:cNvPr id="5" name="Номер слайда 4">
+            <a:extLst>
+              <a:ext uri="{FF2B5EF4-FFF2-40B4-BE49-F238E27FC236}">
+                <a16:creationId xmlns:a16="http://schemas.microsoft.com/office/drawing/2014/main" id="{C2D9FAEF-33AC-FFED-030B-9BD59E0912C9}"/>
+              </a:ext>
+            </a:extLst>
+          </p:cNvPr>
+          <p:cNvSpPr>
+            <a:spLocks noGrp="1"/>
+          </p:cNvSpPr>
+          <p:nvPr>
+            <p:ph type="sldNum" sz="quarter" idx="12"/>
+          </p:nvPr>
+        </p:nvSpPr>
+        <p:spPr>
+          <a:xfrm>
+            <a:off x="8705088" y="4828032"/>
+            <a:ext cx="320040" cy="237744"/>
+          </a:xfrm>
+        </p:spPr>
+        <p:txBody>
+          <a:bodyPr lIns="0" rIns="0" tIns="0" bIns="0" anchor="ctr"/>
+          <a:lstStyle/>
+          <a:p>
+            <a:pPr algn="r"/>
+            <a:fld id="{C1FF6DA9-008F-8B48-92A6-B652298478BF}" type="slidenum">
+              <a:rPr lang="en-US" smtClean="0" sz="1100" b="0">
+                <a:solidFill>
+                  <a:srgbClr val="5E6F70"/>
+                </a:solidFill>
+                <a:latin typeface="Calibri"/>
+              </a:rPr>
+              <a:t>4</a:t>
+            </a:fld>
+            <a:endParaRPr lang="en-US"/>
+          </a:p>
+        </p:txBody>
+      </p:sp>
+      <p:sp>
+        <p:nvSpPr>
+          <p:cNvPr id="6" name="Нижний колонтитул 5">
+            <a:extLst>
+              <a:ext uri="{FF2B5EF4-FFF2-40B4-BE49-F238E27FC236}">
+                <a16:creationId xmlns:a16="http://schemas.microsoft.com/office/drawing/2014/main" id="{8F6CF63D-DC30-269D-E727-F34FD63DE77F}"/>
+              </a:ext>
+            </a:extLst>
+          </p:cNvPr>
+          <p:cNvSpPr>
+            <a:spLocks noGrp="1"/>
+          </p:cNvSpPr>
+          <p:nvPr>
+            <p:ph type="ftr" sz="quarter" idx="11"/>
+          </p:nvPr>
+        </p:nvSpPr>
+        <p:spPr/>
+        <p:txBody>
+          <a:bodyPr/>
+          <a:lstStyle/>
+          <a:p>
+            <a:endParaRPr lang="en-US"/>
           </a:p>
         </p:txBody>
       </p:sp>
@@ -6861,6 +6947,18 @@
   <p:clrMapOvr>
     <a:masterClrMapping/>
   </p:clrMapOvr>
+  <mc:AlternateContent xmlns:mc="http://schemas.openxmlformats.org/markup-compatibility/2006">
+    <mc:Choice xmlns:p14="http://schemas.microsoft.com/office/powerpoint/2010/main" Requires="p14">
+      <p:transition spd="med" p14:dur="700">
+        <p:fade/>
+      </p:transition>
+    </mc:Choice>
+    <mc:Fallback>
+      <p:transition spd="med">
+        <p:fade/>
+      </p:transition>
+    </mc:Fallback>
+  </mc:AlternateContent>
 </p:sld>
 </file>
 
@@ -6921,16 +7019,10 @@
                 <a:solidFill>
                   <a:srgbClr val="0F3D3E"/>
                 </a:solidFill>
-                <a:latin typeface="Cambria" panose="02040503050406030204"/>
+                <a:latin typeface="Cambria"/>
               </a:rPr>
               <a:t>Результат: базовая кривая и шесть сценариев</a:t>
             </a:r>
-            <a:endParaRPr sz="2800" b="1">
-              <a:solidFill>
-                <a:srgbClr val="0F3D3E"/>
-              </a:solidFill>
-              <a:latin typeface="Cambria" panose="02040503050406030204"/>
-            </a:endParaRPr>
           </a:p>
         </p:txBody>
       </p:sp>
@@ -6943,7 +7035,7 @@
           <p:nvPr/>
         </p:nvPicPr>
         <p:blipFill>
-          <a:blip r:embed="rId1"/>
+          <a:blip r:embed="rId3"/>
           <a:stretch>
             <a:fillRect/>
           </a:stretch>
@@ -6990,16 +7082,10 @@
                 <a:solidFill>
                   <a:srgbClr val="0F6B6B"/>
                 </a:solidFill>
-                <a:latin typeface="Cambria" panose="02040503050406030204"/>
+                <a:latin typeface="Cambria"/>
               </a:rPr>
               <a:t>±4 п.п.</a:t>
             </a:r>
-            <a:endParaRPr sz="2200" b="1">
-              <a:solidFill>
-                <a:srgbClr val="0F6B6B"/>
-              </a:solidFill>
-              <a:latin typeface="Cambria" panose="02040503050406030204"/>
-            </a:endParaRPr>
           </a:p>
         </p:txBody>
       </p:sp>
@@ -7035,16 +7121,10 @@
                 <a:solidFill>
                   <a:srgbClr val="1A2B2D"/>
                 </a:solidFill>
-                <a:latin typeface="Calibri" panose="020F0502020204030204"/>
+                <a:latin typeface="Calibri"/>
               </a:rPr>
               <a:t>Параллельные сценарии поднимают или опускают всю кривую</a:t>
             </a:r>
-            <a:endParaRPr sz="1300" b="0">
-              <a:solidFill>
-                <a:srgbClr val="1A2B2D"/>
-              </a:solidFill>
-              <a:latin typeface="Calibri" panose="020F0502020204030204"/>
-            </a:endParaRPr>
           </a:p>
         </p:txBody>
       </p:sp>
@@ -7080,16 +7160,10 @@
                 <a:solidFill>
                   <a:srgbClr val="0F6B6B"/>
                 </a:solidFill>
-                <a:latin typeface="Cambria" panose="02040503050406030204"/>
+                <a:latin typeface="Cambria"/>
               </a:rPr>
               <a:t>10,3 → 18,7 %</a:t>
             </a:r>
-            <a:endParaRPr sz="2200" b="1">
-              <a:solidFill>
-                <a:srgbClr val="0F6B6B"/>
-              </a:solidFill>
-              <a:latin typeface="Cambria" panose="02040503050406030204"/>
-            </a:endParaRPr>
           </a:p>
         </p:txBody>
       </p:sp>
@@ -7125,16 +7199,10 @@
                 <a:solidFill>
                   <a:srgbClr val="1A2B2D"/>
                 </a:solidFill>
-                <a:latin typeface="Calibri" panose="020F0502020204030204"/>
+                <a:latin typeface="Calibri"/>
               </a:rPr>
               <a:t>Увеличение наклона: короткие ставки падают, длинные растут</a:t>
             </a:r>
-            <a:endParaRPr sz="1300" b="0">
-              <a:solidFill>
-                <a:srgbClr val="1A2B2D"/>
-              </a:solidFill>
-              <a:latin typeface="Calibri" panose="020F0502020204030204"/>
-            </a:endParaRPr>
           </a:p>
         </p:txBody>
       </p:sp>
@@ -7170,16 +7238,10 @@
                 <a:solidFill>
                   <a:srgbClr val="0F6B6B"/>
                 </a:solidFill>
-                <a:latin typeface="Cambria" panose="02040503050406030204"/>
+                <a:latin typeface="Cambria"/>
               </a:rPr>
               <a:t>18,6 %</a:t>
             </a:r>
-            <a:endParaRPr sz="2200" b="1">
-              <a:solidFill>
-                <a:srgbClr val="0F6B6B"/>
-              </a:solidFill>
-              <a:latin typeface="Cambria" panose="02040503050406030204"/>
-            </a:endParaRPr>
           </a:p>
         </p:txBody>
       </p:sp>
@@ -7215,16 +7277,75 @@
                 <a:solidFill>
                   <a:srgbClr val="1A2B2D"/>
                 </a:solidFill>
-                <a:latin typeface="Calibri" panose="020F0502020204030204"/>
+                <a:latin typeface="Calibri"/>
               </a:rPr>
               <a:t>Рост коротких: сильный шок на коротком конце, на длинном ставка почти не меняется</a:t>
             </a:r>
-            <a:endParaRPr sz="1300" b="0">
-              <a:solidFill>
-                <a:srgbClr val="1A2B2D"/>
-              </a:solidFill>
-              <a:latin typeface="Calibri" panose="020F0502020204030204"/>
-            </a:endParaRPr>
+          </a:p>
+        </p:txBody>
+      </p:sp>
+      <p:sp>
+        <p:nvSpPr>
+          <p:cNvPr id="10" name="Номер слайда 9">
+            <a:extLst>
+              <a:ext uri="{FF2B5EF4-FFF2-40B4-BE49-F238E27FC236}">
+                <a16:creationId xmlns:a16="http://schemas.microsoft.com/office/drawing/2014/main" id="{E830FA00-0374-E735-041B-53B43B7A2949}"/>
+              </a:ext>
+            </a:extLst>
+          </p:cNvPr>
+          <p:cNvSpPr>
+            <a:spLocks noGrp="1"/>
+          </p:cNvSpPr>
+          <p:nvPr>
+            <p:ph type="sldNum" sz="quarter" idx="12"/>
+          </p:nvPr>
+        </p:nvSpPr>
+        <p:spPr>
+          <a:xfrm>
+            <a:off x="8705088" y="4828032"/>
+            <a:ext cx="320040" cy="237744"/>
+          </a:xfrm>
+        </p:spPr>
+        <p:txBody>
+          <a:bodyPr lIns="0" rIns="0" tIns="0" bIns="0" anchor="ctr"/>
+          <a:lstStyle/>
+          <a:p>
+            <a:pPr algn="r"/>
+            <a:fld id="{C1FF6DA9-008F-8B48-92A6-B652298478BF}" type="slidenum">
+              <a:rPr lang="en-US" smtClean="0" sz="1100" b="0">
+                <a:solidFill>
+                  <a:srgbClr val="5E6F70"/>
+                </a:solidFill>
+                <a:latin typeface="Calibri"/>
+              </a:rPr>
+              <a:t>5</a:t>
+            </a:fld>
+            <a:endParaRPr lang="en-US"/>
+          </a:p>
+        </p:txBody>
+      </p:sp>
+      <p:sp>
+        <p:nvSpPr>
+          <p:cNvPr id="11" name="Нижний колонтитул 10">
+            <a:extLst>
+              <a:ext uri="{FF2B5EF4-FFF2-40B4-BE49-F238E27FC236}">
+                <a16:creationId xmlns:a16="http://schemas.microsoft.com/office/drawing/2014/main" id="{52D51CA4-835D-4BFC-5231-E985731E18FF}"/>
+              </a:ext>
+            </a:extLst>
+          </p:cNvPr>
+          <p:cNvSpPr>
+            <a:spLocks noGrp="1"/>
+          </p:cNvSpPr>
+          <p:nvPr>
+            <p:ph type="ftr" sz="quarter" idx="11"/>
+          </p:nvPr>
+        </p:nvSpPr>
+        <p:spPr/>
+        <p:txBody>
+          <a:bodyPr/>
+          <a:lstStyle/>
+          <a:p>
+            <a:endParaRPr lang="en-US"/>
           </a:p>
         </p:txBody>
       </p:sp>
@@ -7233,6 +7354,18 @@
   <p:clrMapOvr>
     <a:masterClrMapping/>
   </p:clrMapOvr>
+  <mc:AlternateContent xmlns:mc="http://schemas.openxmlformats.org/markup-compatibility/2006">
+    <mc:Choice xmlns:p14="http://schemas.microsoft.com/office/powerpoint/2010/main" Requires="p14">
+      <p:transition spd="slow">
+        <p14:reveal/>
+      </p:transition>
+    </mc:Choice>
+    <mc:Fallback>
+      <p:transition spd="slow">
+        <p:fade/>
+      </p:transition>
+    </mc:Fallback>
+  </mc:AlternateContent>
 </p:sld>
 </file>
 
@@ -7293,16 +7426,10 @@
                 <a:solidFill>
                   <a:srgbClr val="0F3D3E"/>
                 </a:solidFill>
-                <a:latin typeface="Cambria" panose="02040503050406030204"/>
+                <a:latin typeface="Cambria"/>
               </a:rPr>
               <a:t>Задачи и репозиторий</a:t>
             </a:r>
-            <a:endParaRPr sz="2800" b="1">
-              <a:solidFill>
-                <a:srgbClr val="0F3D3E"/>
-              </a:solidFill>
-              <a:latin typeface="Cambria" panose="02040503050406030204"/>
-            </a:endParaRPr>
           </a:p>
         </p:txBody>
       </p:sp>
@@ -7315,7 +7442,7 @@
           <p:nvPr/>
         </p:nvPicPr>
         <p:blipFill>
-          <a:blip r:embed="rId1"/>
+          <a:blip r:embed="rId3"/>
           <a:stretch>
             <a:fillRect/>
           </a:stretch>
@@ -7362,16 +7489,10 @@
                 <a:solidFill>
                   <a:srgbClr val="5E6F70"/>
                 </a:solidFill>
-                <a:latin typeface="Calibri" panose="020F0502020204030204"/>
+                <a:latin typeface="Calibri"/>
               </a:rPr>
               <a:t>Скриншот: задачи спринта 1 в Сфера.Задачи</a:t>
             </a:r>
-            <a:endParaRPr sz="1100" b="0">
-              <a:solidFill>
-                <a:srgbClr val="5E6F70"/>
-              </a:solidFill>
-              <a:latin typeface="Calibri" panose="020F0502020204030204"/>
-            </a:endParaRPr>
           </a:p>
         </p:txBody>
       </p:sp>
@@ -7418,6 +7539,7 @@
           <a:lstStyle/>
           <a:p>
             <a:pPr algn="ctr"/>
+            <a:endParaRPr/>
           </a:p>
         </p:txBody>
       </p:sp>
@@ -7453,16 +7575,10 @@
                 <a:solidFill>
                   <a:srgbClr val="0F3D3E"/>
                 </a:solidFill>
-                <a:latin typeface="Cambria" panose="02040503050406030204"/>
+                <a:latin typeface="Cambria"/>
               </a:rPr>
               <a:t>5 из 5 задач спринта закрыты</a:t>
             </a:r>
-            <a:endParaRPr sz="1800" b="1">
-              <a:solidFill>
-                <a:srgbClr val="0F3D3E"/>
-              </a:solidFill>
-              <a:latin typeface="Cambria" panose="02040503050406030204"/>
-            </a:endParaRPr>
           </a:p>
         </p:txBody>
       </p:sp>
@@ -7498,16 +7614,10 @@
                 <a:solidFill>
                   <a:srgbClr val="1A2B2D"/>
                 </a:solidFill>
-                <a:latin typeface="Calibri" panose="020F0502020204030204"/>
+                <a:latin typeface="Calibri"/>
               </a:rPr>
               <a:t>У каждой задачи есть исполнитель, срок и оценка</a:t>
             </a:r>
-            <a:endParaRPr sz="1400" b="0">
-              <a:solidFill>
-                <a:srgbClr val="1A2B2D"/>
-              </a:solidFill>
-              <a:latin typeface="Calibri" panose="020F0502020204030204"/>
-            </a:endParaRPr>
           </a:p>
         </p:txBody>
       </p:sp>
@@ -7520,7 +7630,7 @@
           <p:nvPr/>
         </p:nvPicPr>
         <p:blipFill>
-          <a:blip r:embed="rId2"/>
+          <a:blip r:embed="rId4"/>
           <a:stretch>
             <a:fillRect/>
           </a:stretch>
@@ -7567,16 +7677,10 @@
                 <a:solidFill>
                   <a:srgbClr val="0F3D3E"/>
                 </a:solidFill>
-                <a:latin typeface="Calibri" panose="020F0502020204030204"/>
+                <a:latin typeface="Calibri"/>
               </a:rPr>
               <a:t>Репозиторий</a:t>
             </a:r>
-            <a:endParaRPr sz="1200" b="1">
-              <a:solidFill>
-                <a:srgbClr val="0F3D3E"/>
-              </a:solidFill>
-              <a:latin typeface="Calibri" panose="020F0502020204030204"/>
-            </a:endParaRPr>
           </a:p>
           <a:p>
             <a:pPr algn="r">
@@ -7589,16 +7693,10 @@
                 <a:solidFill>
                   <a:srgbClr val="0F3D3E"/>
                 </a:solidFill>
-                <a:latin typeface="Calibri" panose="020F0502020204030204"/>
+                <a:latin typeface="Calibri"/>
               </a:rPr>
               <a:t>GitLab МАИ</a:t>
             </a:r>
-            <a:endParaRPr sz="1200" b="0">
-              <a:solidFill>
-                <a:srgbClr val="0F3D3E"/>
-              </a:solidFill>
-              <a:latin typeface="Calibri" panose="020F0502020204030204"/>
-            </a:endParaRPr>
           </a:p>
           <a:p>
             <a:pPr algn="r">
@@ -7611,16 +7709,75 @@
                 <a:solidFill>
                   <a:srgbClr val="0F3D3E"/>
                 </a:solidFill>
-                <a:latin typeface="Calibri" panose="020F0502020204030204"/>
+                <a:latin typeface="Calibri"/>
               </a:rPr>
               <a:t>ветка develop</a:t>
             </a:r>
-            <a:endParaRPr sz="1200" b="0">
-              <a:solidFill>
-                <a:srgbClr val="0F3D3E"/>
-              </a:solidFill>
-              <a:latin typeface="Calibri" panose="020F0502020204030204"/>
-            </a:endParaRPr>
+          </a:p>
+        </p:txBody>
+      </p:sp>
+      <p:sp>
+        <p:nvSpPr>
+          <p:cNvPr id="10" name="Номер слайда 9">
+            <a:extLst>
+              <a:ext uri="{FF2B5EF4-FFF2-40B4-BE49-F238E27FC236}">
+                <a16:creationId xmlns:a16="http://schemas.microsoft.com/office/drawing/2014/main" id="{94E6EA30-4319-37A2-D99E-76F76DC6655D}"/>
+              </a:ext>
+            </a:extLst>
+          </p:cNvPr>
+          <p:cNvSpPr>
+            <a:spLocks noGrp="1"/>
+          </p:cNvSpPr>
+          <p:nvPr>
+            <p:ph type="sldNum" sz="quarter" idx="12"/>
+          </p:nvPr>
+        </p:nvSpPr>
+        <p:spPr>
+          <a:xfrm>
+            <a:off x="8705088" y="4828032"/>
+            <a:ext cx="320040" cy="237744"/>
+          </a:xfrm>
+        </p:spPr>
+        <p:txBody>
+          <a:bodyPr lIns="0" rIns="0" tIns="0" bIns="0" anchor="ctr"/>
+          <a:lstStyle/>
+          <a:p>
+            <a:pPr algn="r"/>
+            <a:fld id="{C1FF6DA9-008F-8B48-92A6-B652298478BF}" type="slidenum">
+              <a:rPr lang="en-US" smtClean="0" sz="1100" b="0">
+                <a:solidFill>
+                  <a:srgbClr val="5E6F70"/>
+                </a:solidFill>
+                <a:latin typeface="Calibri"/>
+              </a:rPr>
+              <a:t>6</a:t>
+            </a:fld>
+            <a:endParaRPr lang="en-US"/>
+          </a:p>
+        </p:txBody>
+      </p:sp>
+      <p:sp>
+        <p:nvSpPr>
+          <p:cNvPr id="11" name="Нижний колонтитул 10">
+            <a:extLst>
+              <a:ext uri="{FF2B5EF4-FFF2-40B4-BE49-F238E27FC236}">
+                <a16:creationId xmlns:a16="http://schemas.microsoft.com/office/drawing/2014/main" id="{4EB7EEF2-CCA6-287A-CE8F-CB07CB8AD417}"/>
+              </a:ext>
+            </a:extLst>
+          </p:cNvPr>
+          <p:cNvSpPr>
+            <a:spLocks noGrp="1"/>
+          </p:cNvSpPr>
+          <p:nvPr>
+            <p:ph type="ftr" sz="quarter" idx="11"/>
+          </p:nvPr>
+        </p:nvSpPr>
+        <p:spPr/>
+        <p:txBody>
+          <a:bodyPr/>
+          <a:lstStyle/>
+          <a:p>
+            <a:endParaRPr lang="en-US"/>
           </a:p>
         </p:txBody>
       </p:sp>
@@ -7629,6 +7786,9 @@
   <p:clrMapOvr>
     <a:masterClrMapping/>
   </p:clrMapOvr>
+  <p:transition spd="slow">
+    <p:wipe/>
+  </p:transition>
 </p:sld>
 </file>
 
@@ -7689,16 +7849,10 @@
                 <a:solidFill>
                   <a:srgbClr val="0F3D3E"/>
                 </a:solidFill>
-                <a:latin typeface="Cambria" panose="02040503050406030204"/>
+                <a:latin typeface="Cambria"/>
               </a:rPr>
               <a:t>Что мы сделали за спринт 1</a:t>
             </a:r>
-            <a:endParaRPr sz="2800" b="1">
-              <a:solidFill>
-                <a:srgbClr val="0F3D3E"/>
-              </a:solidFill>
-              <a:latin typeface="Cambria" panose="02040503050406030204"/>
-            </a:endParaRPr>
           </a:p>
         </p:txBody>
       </p:sp>
@@ -7745,6 +7899,7 @@
           <a:lstStyle/>
           <a:p>
             <a:pPr algn="ctr"/>
+            <a:endParaRPr/>
           </a:p>
         </p:txBody>
       </p:sp>
@@ -7794,16 +7949,10 @@
                 <a:solidFill>
                   <a:srgbClr val="FFFFFF"/>
                 </a:solidFill>
-                <a:latin typeface="Cambria" panose="02040503050406030204"/>
+                <a:latin typeface="Cambria"/>
               </a:rPr>
               <a:t>1</a:t>
             </a:r>
-            <a:endParaRPr sz="1400" b="1">
-              <a:solidFill>
-                <a:srgbClr val="FFFFFF"/>
-              </a:solidFill>
-              <a:latin typeface="Cambria" panose="02040503050406030204"/>
-            </a:endParaRPr>
           </a:p>
         </p:txBody>
       </p:sp>
@@ -7839,16 +7988,10 @@
                 <a:solidFill>
                   <a:srgbClr val="0F3D3E"/>
                 </a:solidFill>
-                <a:latin typeface="Cambria" panose="02040503050406030204"/>
+                <a:latin typeface="Cambria"/>
               </a:rPr>
               <a:t>Разобрались с темой</a:t>
             </a:r>
-            <a:endParaRPr sz="1500" b="1">
-              <a:solidFill>
-                <a:srgbClr val="0F3D3E"/>
-              </a:solidFill>
-              <a:latin typeface="Cambria" panose="02040503050406030204"/>
-            </a:endParaRPr>
           </a:p>
         </p:txBody>
       </p:sp>
@@ -7884,16 +8027,10 @@
                 <a:solidFill>
                   <a:srgbClr val="1A2B2D"/>
                 </a:solidFill>
-                <a:latin typeface="Calibri" panose="020F0502020204030204"/>
+                <a:latin typeface="Calibri"/>
               </a:rPr>
               <a:t>Процентный риск и методика Банка России 8-МР</a:t>
             </a:r>
-            <a:endParaRPr sz="1300" b="0">
-              <a:solidFill>
-                <a:srgbClr val="1A2B2D"/>
-              </a:solidFill>
-              <a:latin typeface="Calibri" panose="020F0502020204030204"/>
-            </a:endParaRPr>
           </a:p>
         </p:txBody>
       </p:sp>
@@ -7940,6 +8077,7 @@
           <a:lstStyle/>
           <a:p>
             <a:pPr algn="ctr"/>
+            <a:endParaRPr/>
           </a:p>
         </p:txBody>
       </p:sp>
@@ -7989,16 +8127,10 @@
                 <a:solidFill>
                   <a:srgbClr val="FFFFFF"/>
                 </a:solidFill>
-                <a:latin typeface="Cambria" panose="02040503050406030204"/>
+                <a:latin typeface="Cambria"/>
               </a:rPr>
               <a:t>2</a:t>
             </a:r>
-            <a:endParaRPr sz="1400" b="1">
-              <a:solidFill>
-                <a:srgbClr val="FFFFFF"/>
-              </a:solidFill>
-              <a:latin typeface="Cambria" panose="02040503050406030204"/>
-            </a:endParaRPr>
           </a:p>
         </p:txBody>
       </p:sp>
@@ -8034,16 +8166,10 @@
                 <a:solidFill>
                   <a:srgbClr val="0F3D3E"/>
                 </a:solidFill>
-                <a:latin typeface="Cambria" panose="02040503050406030204"/>
+                <a:latin typeface="Cambria"/>
               </a:rPr>
               <a:t>Выгрузили данные MOEX</a:t>
             </a:r>
-            <a:endParaRPr sz="1500" b="1">
-              <a:solidFill>
-                <a:srgbClr val="0F3D3E"/>
-              </a:solidFill>
-              <a:latin typeface="Cambria" panose="02040503050406030204"/>
-            </a:endParaRPr>
           </a:p>
         </p:txBody>
       </p:sp>
@@ -8079,16 +8205,10 @@
                 <a:solidFill>
                   <a:srgbClr val="1A2B2D"/>
                 </a:solidFill>
-                <a:latin typeface="Calibri" panose="020F0502020204030204"/>
+                <a:latin typeface="Calibri"/>
               </a:rPr>
               <a:t>Кривая ОФЗ на 31.07.2026, 12 точек до 30 лет</a:t>
             </a:r>
-            <a:endParaRPr sz="1300" b="0">
-              <a:solidFill>
-                <a:srgbClr val="1A2B2D"/>
-              </a:solidFill>
-              <a:latin typeface="Calibri" panose="020F0502020204030204"/>
-            </a:endParaRPr>
           </a:p>
         </p:txBody>
       </p:sp>
@@ -8135,6 +8255,7 @@
           <a:lstStyle/>
           <a:p>
             <a:pPr algn="ctr"/>
+            <a:endParaRPr/>
           </a:p>
         </p:txBody>
       </p:sp>
@@ -8184,16 +8305,10 @@
                 <a:solidFill>
                   <a:srgbClr val="FFFFFF"/>
                 </a:solidFill>
-                <a:latin typeface="Cambria" panose="02040503050406030204"/>
+                <a:latin typeface="Cambria"/>
               </a:rPr>
               <a:t>3</a:t>
             </a:r>
-            <a:endParaRPr sz="1400" b="1">
-              <a:solidFill>
-                <a:srgbClr val="FFFFFF"/>
-              </a:solidFill>
-              <a:latin typeface="Cambria" panose="02040503050406030204"/>
-            </a:endParaRPr>
           </a:p>
         </p:txBody>
       </p:sp>
@@ -8229,16 +8344,10 @@
                 <a:solidFill>
                   <a:srgbClr val="0F3D3E"/>
                 </a:solidFill>
-                <a:latin typeface="Cambria" panose="02040503050406030204"/>
+                <a:latin typeface="Cambria"/>
               </a:rPr>
               <a:t>Привели к сетке ЦБ</a:t>
             </a:r>
-            <a:endParaRPr sz="1500" b="1">
-              <a:solidFill>
-                <a:srgbClr val="0F3D3E"/>
-              </a:solidFill>
-              <a:latin typeface="Cambria" panose="02040503050406030204"/>
-            </a:endParaRPr>
           </a:p>
         </p:txBody>
       </p:sp>
@@ -8274,16 +8383,10 @@
                 <a:solidFill>
                   <a:srgbClr val="1A2B2D"/>
                 </a:solidFill>
-                <a:latin typeface="Calibri" panose="020F0502020204030204"/>
+                <a:latin typeface="Calibri"/>
               </a:rPr>
               <a:t>19 сроков: скрипт на Python и формулы в Excel</a:t>
             </a:r>
-            <a:endParaRPr sz="1300" b="0">
-              <a:solidFill>
-                <a:srgbClr val="1A2B2D"/>
-              </a:solidFill>
-              <a:latin typeface="Calibri" panose="020F0502020204030204"/>
-            </a:endParaRPr>
           </a:p>
         </p:txBody>
       </p:sp>
@@ -8330,6 +8433,7 @@
           <a:lstStyle/>
           <a:p>
             <a:pPr algn="ctr"/>
+            <a:endParaRPr/>
           </a:p>
         </p:txBody>
       </p:sp>
@@ -8379,16 +8483,10 @@
                 <a:solidFill>
                   <a:srgbClr val="FFFFFF"/>
                 </a:solidFill>
-                <a:latin typeface="Cambria" panose="02040503050406030204"/>
+                <a:latin typeface="Cambria"/>
               </a:rPr>
               <a:t>4</a:t>
             </a:r>
-            <a:endParaRPr sz="1400" b="1">
-              <a:solidFill>
-                <a:srgbClr val="FFFFFF"/>
-              </a:solidFill>
-              <a:latin typeface="Cambria" panose="02040503050406030204"/>
-            </a:endParaRPr>
           </a:p>
         </p:txBody>
       </p:sp>
@@ -8424,16 +8522,10 @@
                 <a:solidFill>
                   <a:srgbClr val="0F3D3E"/>
                 </a:solidFill>
-                <a:latin typeface="Cambria" panose="02040503050406030204"/>
+                <a:latin typeface="Cambria"/>
               </a:rPr>
               <a:t>Посчитали 6 сценариев</a:t>
             </a:r>
-            <a:endParaRPr sz="1500" b="1">
-              <a:solidFill>
-                <a:srgbClr val="0F3D3E"/>
-              </a:solidFill>
-              <a:latin typeface="Cambria" panose="02040503050406030204"/>
-            </a:endParaRPr>
           </a:p>
         </p:txBody>
       </p:sp>
@@ -8469,16 +8561,10 @@
                 <a:solidFill>
                   <a:srgbClr val="1A2B2D"/>
                 </a:solidFill>
-                <a:latin typeface="Calibri" panose="020F0502020204030204"/>
+                <a:latin typeface="Calibri"/>
               </a:rPr>
               <a:t>Формулы в Excel, сверка с примером заказчика</a:t>
             </a:r>
-            <a:endParaRPr sz="1300" b="0">
-              <a:solidFill>
-                <a:srgbClr val="1A2B2D"/>
-              </a:solidFill>
-              <a:latin typeface="Calibri" panose="020F0502020204030204"/>
-            </a:endParaRPr>
           </a:p>
         </p:txBody>
       </p:sp>
@@ -8525,6 +8611,7 @@
           <a:lstStyle/>
           <a:p>
             <a:pPr algn="ctr"/>
+            <a:endParaRPr/>
           </a:p>
         </p:txBody>
       </p:sp>
@@ -8574,16 +8661,10 @@
                 <a:solidFill>
                   <a:srgbClr val="FFFFFF"/>
                 </a:solidFill>
-                <a:latin typeface="Cambria" panose="02040503050406030204"/>
+                <a:latin typeface="Cambria"/>
               </a:rPr>
               <a:t>5</a:t>
             </a:r>
-            <a:endParaRPr sz="1400" b="1">
-              <a:solidFill>
-                <a:srgbClr val="FFFFFF"/>
-              </a:solidFill>
-              <a:latin typeface="Cambria" panose="02040503050406030204"/>
-            </a:endParaRPr>
           </a:p>
         </p:txBody>
       </p:sp>
@@ -8619,16 +8700,10 @@
                 <a:solidFill>
                   <a:srgbClr val="0F3D3E"/>
                 </a:solidFill>
-                <a:latin typeface="Cambria" panose="02040503050406030204"/>
+                <a:latin typeface="Cambria"/>
               </a:rPr>
               <a:t>Построили графики</a:t>
             </a:r>
-            <a:endParaRPr sz="1500" b="1">
-              <a:solidFill>
-                <a:srgbClr val="0F3D3E"/>
-              </a:solidFill>
-              <a:latin typeface="Cambria" panose="02040503050406030204"/>
-            </a:endParaRPr>
           </a:p>
         </p:txBody>
       </p:sp>
@@ -8664,16 +8739,10 @@
                 <a:solidFill>
                   <a:srgbClr val="1A2B2D"/>
                 </a:solidFill>
-                <a:latin typeface="Calibri" panose="020F0502020204030204"/>
+                <a:latin typeface="Calibri"/>
               </a:rPr>
               <a:t>6 сценариев и сводный график</a:t>
             </a:r>
-            <a:endParaRPr sz="1300" b="0">
-              <a:solidFill>
-                <a:srgbClr val="1A2B2D"/>
-              </a:solidFill>
-              <a:latin typeface="Calibri" panose="020F0502020204030204"/>
-            </a:endParaRPr>
           </a:p>
         </p:txBody>
       </p:sp>
@@ -8720,6 +8789,7 @@
           <a:lstStyle/>
           <a:p>
             <a:pPr algn="ctr"/>
+            <a:endParaRPr/>
           </a:p>
         </p:txBody>
       </p:sp>
@@ -8769,16 +8839,10 @@
                 <a:solidFill>
                   <a:srgbClr val="FFFFFF"/>
                 </a:solidFill>
-                <a:latin typeface="Cambria" panose="02040503050406030204"/>
+                <a:latin typeface="Cambria"/>
               </a:rPr>
               <a:t>6</a:t>
             </a:r>
-            <a:endParaRPr sz="1400" b="1">
-              <a:solidFill>
-                <a:srgbClr val="FFFFFF"/>
-              </a:solidFill>
-              <a:latin typeface="Cambria" panose="02040503050406030204"/>
-            </a:endParaRPr>
           </a:p>
         </p:txBody>
       </p:sp>
@@ -8814,16 +8878,10 @@
                 <a:solidFill>
                   <a:srgbClr val="0F3D3E"/>
                 </a:solidFill>
-                <a:latin typeface="Cambria" panose="02040503050406030204"/>
+                <a:latin typeface="Cambria"/>
               </a:rPr>
               <a:t>Настроили работу</a:t>
             </a:r>
-            <a:endParaRPr sz="1500" b="1">
-              <a:solidFill>
-                <a:srgbClr val="0F3D3E"/>
-              </a:solidFill>
-              <a:latin typeface="Cambria" panose="02040503050406030204"/>
-            </a:endParaRPr>
           </a:p>
         </p:txBody>
       </p:sp>
@@ -8859,16 +8917,10 @@
                 <a:solidFill>
                   <a:srgbClr val="1A2B2D"/>
                 </a:solidFill>
-                <a:latin typeface="Calibri" panose="020F0502020204030204"/>
+                <a:latin typeface="Calibri"/>
               </a:rPr>
               <a:t>Репозиторий GitLab и задачи в Сфере</a:t>
             </a:r>
-            <a:endParaRPr sz="1300" b="0">
-              <a:solidFill>
-                <a:srgbClr val="1A2B2D"/>
-              </a:solidFill>
-              <a:latin typeface="Calibri" panose="020F0502020204030204"/>
-            </a:endParaRPr>
           </a:p>
         </p:txBody>
       </p:sp>
@@ -8899,7 +8951,7 @@
                 <a:solidFill>
                   <a:srgbClr val="5E6F70"/>
                 </a:solidFill>
-                <a:latin typeface="Calibri" panose="020F0502020204030204"/>
+                <a:latin typeface="Calibri"/>
               </a:rPr>
               <a:t>Кто: </a:t>
             </a:r>
@@ -8908,16 +8960,10 @@
                 <a:solidFill>
                   <a:srgbClr val="0F6B6B"/>
                 </a:solidFill>
-                <a:latin typeface="Calibri" panose="020F0502020204030204"/>
+                <a:latin typeface="Calibri"/>
               </a:rPr>
               <a:t>Вся команда</a:t>
             </a:r>
-            <a:endParaRPr sz="1300" b="1">
-              <a:solidFill>
-                <a:srgbClr val="0F6B6B"/>
-              </a:solidFill>
-              <a:latin typeface="Calibri" panose="020F0502020204030204"/>
-            </a:endParaRPr>
           </a:p>
         </p:txBody>
       </p:sp>
@@ -8948,7 +8994,7 @@
                 <a:solidFill>
                   <a:srgbClr val="5E6F70"/>
                 </a:solidFill>
-                <a:latin typeface="Calibri" panose="020F0502020204030204"/>
+                <a:latin typeface="Calibri"/>
               </a:rPr>
               <a:t>Кто: </a:t>
             </a:r>
@@ -8957,16 +9003,10 @@
                 <a:solidFill>
                   <a:srgbClr val="0F6B6B"/>
                 </a:solidFill>
-                <a:latin typeface="Calibri" panose="020F0502020204030204"/>
+                <a:latin typeface="Calibri"/>
               </a:rPr>
               <a:t>Михаил</a:t>
             </a:r>
-            <a:endParaRPr sz="1300" b="1">
-              <a:solidFill>
-                <a:srgbClr val="0F6B6B"/>
-              </a:solidFill>
-              <a:latin typeface="Calibri" panose="020F0502020204030204"/>
-            </a:endParaRPr>
           </a:p>
         </p:txBody>
       </p:sp>
@@ -8997,7 +9037,7 @@
                 <a:solidFill>
                   <a:srgbClr val="5E6F70"/>
                 </a:solidFill>
-                <a:latin typeface="Calibri" panose="020F0502020204030204"/>
+                <a:latin typeface="Calibri"/>
               </a:rPr>
               <a:t>Кто: </a:t>
             </a:r>
@@ -9006,16 +9046,10 @@
                 <a:solidFill>
                   <a:srgbClr val="0F6B6B"/>
                 </a:solidFill>
-                <a:latin typeface="Calibri" panose="020F0502020204030204"/>
+                <a:latin typeface="Calibri"/>
               </a:rPr>
               <a:t>Михаил, Ярослав</a:t>
             </a:r>
-            <a:endParaRPr sz="1300" b="1">
-              <a:solidFill>
-                <a:srgbClr val="0F6B6B"/>
-              </a:solidFill>
-              <a:latin typeface="Calibri" panose="020F0502020204030204"/>
-            </a:endParaRPr>
           </a:p>
         </p:txBody>
       </p:sp>
@@ -9046,7 +9080,7 @@
                 <a:solidFill>
                   <a:srgbClr val="5E6F70"/>
                 </a:solidFill>
-                <a:latin typeface="Calibri" panose="020F0502020204030204"/>
+                <a:latin typeface="Calibri"/>
               </a:rPr>
               <a:t>Кто: </a:t>
             </a:r>
@@ -9055,16 +9089,10 @@
                 <a:solidFill>
                   <a:srgbClr val="0F6B6B"/>
                 </a:solidFill>
-                <a:latin typeface="Calibri" panose="020F0502020204030204"/>
+                <a:latin typeface="Calibri"/>
               </a:rPr>
               <a:t>Ярослав</a:t>
             </a:r>
-            <a:endParaRPr sz="1300" b="1">
-              <a:solidFill>
-                <a:srgbClr val="0F6B6B"/>
-              </a:solidFill>
-              <a:latin typeface="Calibri" panose="020F0502020204030204"/>
-            </a:endParaRPr>
           </a:p>
         </p:txBody>
       </p:sp>
@@ -9095,7 +9123,7 @@
                 <a:solidFill>
                   <a:srgbClr val="5E6F70"/>
                 </a:solidFill>
-                <a:latin typeface="Calibri" panose="020F0502020204030204"/>
+                <a:latin typeface="Calibri"/>
               </a:rPr>
               <a:t>Кто: </a:t>
             </a:r>
@@ -9104,16 +9132,10 @@
                 <a:solidFill>
                   <a:srgbClr val="0F6B6B"/>
                 </a:solidFill>
-                <a:latin typeface="Calibri" panose="020F0502020204030204"/>
+                <a:latin typeface="Calibri"/>
               </a:rPr>
               <a:t>Александр</a:t>
             </a:r>
-            <a:endParaRPr sz="1300" b="1">
-              <a:solidFill>
-                <a:srgbClr val="0F6B6B"/>
-              </a:solidFill>
-              <a:latin typeface="Calibri" panose="020F0502020204030204"/>
-            </a:endParaRPr>
           </a:p>
         </p:txBody>
       </p:sp>
@@ -9144,7 +9166,7 @@
                 <a:solidFill>
                   <a:srgbClr val="5E6F70"/>
                 </a:solidFill>
-                <a:latin typeface="Calibri" panose="020F0502020204030204"/>
+                <a:latin typeface="Calibri"/>
               </a:rPr>
               <a:t>Кто: </a:t>
             </a:r>
@@ -9153,16 +9175,75 @@
                 <a:solidFill>
                   <a:srgbClr val="0F6B6B"/>
                 </a:solidFill>
-                <a:latin typeface="Calibri" panose="020F0502020204030204"/>
+                <a:latin typeface="Calibri"/>
               </a:rPr>
               <a:t>Даниил, Михаил</a:t>
             </a:r>
-            <a:endParaRPr sz="1300" b="1">
-              <a:solidFill>
-                <a:srgbClr val="0F6B6B"/>
-              </a:solidFill>
-              <a:latin typeface="Calibri" panose="020F0502020204030204"/>
-            </a:endParaRPr>
+          </a:p>
+        </p:txBody>
+      </p:sp>
+      <p:sp>
+        <p:nvSpPr>
+          <p:cNvPr id="33" name="Номер слайда 32">
+            <a:extLst>
+              <a:ext uri="{FF2B5EF4-FFF2-40B4-BE49-F238E27FC236}">
+                <a16:creationId xmlns:a16="http://schemas.microsoft.com/office/drawing/2014/main" id="{77B37C56-31F2-9558-2CBE-E4354EADC09D}"/>
+              </a:ext>
+            </a:extLst>
+          </p:cNvPr>
+          <p:cNvSpPr>
+            <a:spLocks noGrp="1"/>
+          </p:cNvSpPr>
+          <p:nvPr>
+            <p:ph type="sldNum" sz="quarter" idx="12"/>
+          </p:nvPr>
+        </p:nvSpPr>
+        <p:spPr>
+          <a:xfrm>
+            <a:off x="8705088" y="4828032"/>
+            <a:ext cx="320040" cy="237744"/>
+          </a:xfrm>
+        </p:spPr>
+        <p:txBody>
+          <a:bodyPr lIns="0" rIns="0" tIns="0" bIns="0" anchor="ctr"/>
+          <a:lstStyle/>
+          <a:p>
+            <a:pPr algn="r"/>
+            <a:fld id="{C1FF6DA9-008F-8B48-92A6-B652298478BF}" type="slidenum">
+              <a:rPr lang="en-US" smtClean="0" sz="1100" b="0">
+                <a:solidFill>
+                  <a:srgbClr val="5E6F70"/>
+                </a:solidFill>
+                <a:latin typeface="Calibri"/>
+              </a:rPr>
+              <a:t>7</a:t>
+            </a:fld>
+            <a:endParaRPr lang="en-US"/>
+          </a:p>
+        </p:txBody>
+      </p:sp>
+      <p:sp>
+        <p:nvSpPr>
+          <p:cNvPr id="34" name="Нижний колонтитул 33">
+            <a:extLst>
+              <a:ext uri="{FF2B5EF4-FFF2-40B4-BE49-F238E27FC236}">
+                <a16:creationId xmlns:a16="http://schemas.microsoft.com/office/drawing/2014/main" id="{5FFF8A5B-4520-E50A-18B2-C18106AC6AB3}"/>
+              </a:ext>
+            </a:extLst>
+          </p:cNvPr>
+          <p:cNvSpPr>
+            <a:spLocks noGrp="1"/>
+          </p:cNvSpPr>
+          <p:nvPr>
+            <p:ph type="ftr" sz="quarter" idx="11"/>
+          </p:nvPr>
+        </p:nvSpPr>
+        <p:spPr/>
+        <p:txBody>
+          <a:bodyPr/>
+          <a:lstStyle/>
+          <a:p>
+            <a:endParaRPr lang="en-US"/>
           </a:p>
         </p:txBody>
       </p:sp>
@@ -9171,6 +9252,18 @@
   <p:clrMapOvr>
     <a:masterClrMapping/>
   </p:clrMapOvr>
+  <mc:AlternateContent xmlns:mc="http://schemas.openxmlformats.org/markup-compatibility/2006">
+    <mc:Choice xmlns:p159="http://schemas.microsoft.com/office/powerpoint/2015/09/main" Requires="p159">
+      <p:transition xmlns:p14="http://schemas.microsoft.com/office/powerpoint/2010/main" spd="slow" p14:dur="2000">
+        <p159:morph option="byObject"/>
+      </p:transition>
+    </mc:Choice>
+    <mc:Fallback>
+      <p:transition spd="slow">
+        <p:fade/>
+      </p:transition>
+    </mc:Fallback>
+  </mc:AlternateContent>
 </p:sld>
 </file>
 
@@ -9231,16 +9324,10 @@
                 <a:solidFill>
                   <a:srgbClr val="0F3D3E"/>
                 </a:solidFill>
-                <a:latin typeface="Cambria" panose="02040503050406030204"/>
+                <a:latin typeface="Cambria"/>
               </a:rPr>
               <a:t>Куда идём: архитектура модуля</a:t>
             </a:r>
-            <a:endParaRPr sz="2800" b="1">
-              <a:solidFill>
-                <a:srgbClr val="0F3D3E"/>
-              </a:solidFill>
-              <a:latin typeface="Cambria" panose="02040503050406030204"/>
-            </a:endParaRPr>
           </a:p>
         </p:txBody>
       </p:sp>
@@ -9287,6 +9374,7 @@
           <a:lstStyle/>
           <a:p>
             <a:pPr algn="ctr"/>
+            <a:endParaRPr/>
           </a:p>
         </p:txBody>
       </p:sp>
@@ -9322,16 +9410,10 @@
                 <a:solidFill>
                   <a:srgbClr val="0F3D3E"/>
                 </a:solidFill>
-                <a:latin typeface="Cambria" panose="02040503050406030204"/>
+                <a:latin typeface="Cambria"/>
               </a:rPr>
               <a:t>MOEX</a:t>
             </a:r>
-            <a:endParaRPr sz="1800" b="1">
-              <a:solidFill>
-                <a:srgbClr val="0F3D3E"/>
-              </a:solidFill>
-              <a:latin typeface="Cambria" panose="02040503050406030204"/>
-            </a:endParaRPr>
           </a:p>
         </p:txBody>
       </p:sp>
@@ -9367,16 +9449,10 @@
                 <a:solidFill>
                   <a:srgbClr val="1A2B2D"/>
                 </a:solidFill>
-                <a:latin typeface="Calibri" panose="020F0502020204030204"/>
+                <a:latin typeface="Calibri"/>
               </a:rPr>
               <a:t>Кривая ОФЗ с биржи</a:t>
             </a:r>
-            <a:endParaRPr sz="1300" b="0">
-              <a:solidFill>
-                <a:srgbClr val="1A2B2D"/>
-              </a:solidFill>
-              <a:latin typeface="Calibri" panose="020F0502020204030204"/>
-            </a:endParaRPr>
           </a:p>
         </p:txBody>
       </p:sp>
@@ -9412,16 +9488,10 @@
                 <a:solidFill>
                   <a:srgbClr val="E0A030"/>
                 </a:solidFill>
-                <a:latin typeface="Calibri" panose="020F0502020204030204"/>
+                <a:latin typeface="Calibri"/>
               </a:rPr>
               <a:t>›</a:t>
             </a:r>
-            <a:endParaRPr sz="2800" b="1">
-              <a:solidFill>
-                <a:srgbClr val="E0A030"/>
-              </a:solidFill>
-              <a:latin typeface="Calibri" panose="020F0502020204030204"/>
-            </a:endParaRPr>
           </a:p>
         </p:txBody>
       </p:sp>
@@ -9468,6 +9538,7 @@
           <a:lstStyle/>
           <a:p>
             <a:pPr algn="ctr"/>
+            <a:endParaRPr/>
           </a:p>
         </p:txBody>
       </p:sp>
@@ -9503,16 +9574,10 @@
                 <a:solidFill>
                   <a:srgbClr val="0F3D3E"/>
                 </a:solidFill>
-                <a:latin typeface="Cambria" panose="02040503050406030204"/>
+                <a:latin typeface="Cambria"/>
               </a:rPr>
               <a:t>Загрузка</a:t>
             </a:r>
-            <a:endParaRPr sz="1800" b="1">
-              <a:solidFill>
-                <a:srgbClr val="0F3D3E"/>
-              </a:solidFill>
-              <a:latin typeface="Cambria" panose="02040503050406030204"/>
-            </a:endParaRPr>
           </a:p>
         </p:txBody>
       </p:sp>
@@ -9548,16 +9613,10 @@
                 <a:solidFill>
                   <a:srgbClr val="1A2B2D"/>
                 </a:solidFill>
-                <a:latin typeface="Calibri" panose="020F0502020204030204"/>
+                <a:latin typeface="Calibri"/>
               </a:rPr>
               <a:t>Python-скрипт по расписанию</a:t>
             </a:r>
-            <a:endParaRPr sz="1300" b="0">
-              <a:solidFill>
-                <a:srgbClr val="1A2B2D"/>
-              </a:solidFill>
-              <a:latin typeface="Calibri" panose="020F0502020204030204"/>
-            </a:endParaRPr>
           </a:p>
         </p:txBody>
       </p:sp>
@@ -9593,16 +9652,10 @@
                 <a:solidFill>
                   <a:srgbClr val="E0A030"/>
                 </a:solidFill>
-                <a:latin typeface="Calibri" panose="020F0502020204030204"/>
+                <a:latin typeface="Calibri"/>
               </a:rPr>
               <a:t>›</a:t>
             </a:r>
-            <a:endParaRPr sz="2800" b="1">
-              <a:solidFill>
-                <a:srgbClr val="E0A030"/>
-              </a:solidFill>
-              <a:latin typeface="Calibri" panose="020F0502020204030204"/>
-            </a:endParaRPr>
           </a:p>
         </p:txBody>
       </p:sp>
@@ -9649,6 +9702,7 @@
           <a:lstStyle/>
           <a:p>
             <a:pPr algn="ctr"/>
+            <a:endParaRPr/>
           </a:p>
         </p:txBody>
       </p:sp>
@@ -9684,16 +9738,10 @@
                 <a:solidFill>
                   <a:srgbClr val="0F3D3E"/>
                 </a:solidFill>
-                <a:latin typeface="Cambria" panose="02040503050406030204"/>
+                <a:latin typeface="Cambria"/>
               </a:rPr>
               <a:t>Расчёт</a:t>
             </a:r>
-            <a:endParaRPr sz="1800" b="1">
-              <a:solidFill>
-                <a:srgbClr val="0F3D3E"/>
-              </a:solidFill>
-              <a:latin typeface="Cambria" panose="02040503050406030204"/>
-            </a:endParaRPr>
           </a:p>
         </p:txBody>
       </p:sp>
@@ -9729,16 +9777,10 @@
                 <a:solidFill>
                   <a:srgbClr val="1A2B2D"/>
                 </a:solidFill>
-                <a:latin typeface="Calibri" panose="020F0502020204030204"/>
+                <a:latin typeface="Calibri"/>
               </a:rPr>
               <a:t>19 сроков и 6 сценариев на Python</a:t>
             </a:r>
-            <a:endParaRPr sz="1300" b="0">
-              <a:solidFill>
-                <a:srgbClr val="1A2B2D"/>
-              </a:solidFill>
-              <a:latin typeface="Calibri" panose="020F0502020204030204"/>
-            </a:endParaRPr>
           </a:p>
         </p:txBody>
       </p:sp>
@@ -9774,16 +9816,10 @@
                 <a:solidFill>
                   <a:srgbClr val="E0A030"/>
                 </a:solidFill>
-                <a:latin typeface="Calibri" panose="020F0502020204030204"/>
+                <a:latin typeface="Calibri"/>
               </a:rPr>
               <a:t>›</a:t>
             </a:r>
-            <a:endParaRPr sz="2800" b="1">
-              <a:solidFill>
-                <a:srgbClr val="E0A030"/>
-              </a:solidFill>
-              <a:latin typeface="Calibri" panose="020F0502020204030204"/>
-            </a:endParaRPr>
           </a:p>
         </p:txBody>
       </p:sp>
@@ -9830,6 +9866,7 @@
           <a:lstStyle/>
           <a:p>
             <a:pPr algn="ctr"/>
+            <a:endParaRPr/>
           </a:p>
         </p:txBody>
       </p:sp>
@@ -9865,16 +9902,10 @@
                 <a:solidFill>
                   <a:srgbClr val="FFFFFF"/>
                 </a:solidFill>
-                <a:latin typeface="Cambria" panose="02040503050406030204"/>
+                <a:latin typeface="Cambria"/>
               </a:rPr>
               <a:t>Витрина</a:t>
             </a:r>
-            <a:endParaRPr sz="1800" b="1">
-              <a:solidFill>
-                <a:srgbClr val="FFFFFF"/>
-              </a:solidFill>
-              <a:latin typeface="Cambria" panose="02040503050406030204"/>
-            </a:endParaRPr>
           </a:p>
         </p:txBody>
       </p:sp>
@@ -9910,16 +9941,10 @@
                 <a:solidFill>
                   <a:srgbClr val="FFFFFF"/>
                 </a:solidFill>
-                <a:latin typeface="Calibri" panose="020F0502020204030204"/>
+                <a:latin typeface="Calibri"/>
               </a:rPr>
               <a:t>Сайт: графики, выбор сценария, выгрузка</a:t>
             </a:r>
-            <a:endParaRPr sz="1300" b="0">
-              <a:solidFill>
-                <a:srgbClr val="FFFFFF"/>
-              </a:solidFill>
-              <a:latin typeface="Calibri" panose="020F0502020204030204"/>
-            </a:endParaRPr>
           </a:p>
         </p:txBody>
       </p:sp>
@@ -9966,6 +9991,7 @@
           <a:lstStyle/>
           <a:p>
             <a:pPr algn="ctr"/>
+            <a:endParaRPr/>
           </a:p>
         </p:txBody>
       </p:sp>
@@ -10001,7 +10027,7 @@
                 <a:solidFill>
                   <a:srgbClr val="1A2B2D"/>
                 </a:solidFill>
-                <a:latin typeface="Calibri" panose="020F0502020204030204"/>
+                <a:latin typeface="Calibri"/>
               </a:rPr>
               <a:t>База данных: </a:t>
             </a:r>
@@ -10010,16 +10036,10 @@
                 <a:solidFill>
                   <a:srgbClr val="1A2B2D"/>
                 </a:solidFill>
-                <a:latin typeface="Calibri" panose="020F0502020204030204"/>
+                <a:latin typeface="Calibri"/>
               </a:rPr>
               <a:t>храним кривые за разные даты и результаты сценариев, их же забирают команды 1 и 3</a:t>
             </a:r>
-            <a:endParaRPr sz="1400" b="0">
-              <a:solidFill>
-                <a:srgbClr val="1A2B2D"/>
-              </a:solidFill>
-              <a:latin typeface="Calibri" panose="020F0502020204030204"/>
-            </a:endParaRPr>
           </a:p>
         </p:txBody>
       </p:sp>
@@ -10055,16 +10075,10 @@
                 <a:solidFill>
                   <a:srgbClr val="0F6B6B"/>
                 </a:solidFill>
-                <a:latin typeface="Calibri" panose="020F0502020204030204"/>
+                <a:latin typeface="Calibri"/>
               </a:rPr>
               <a:t>Python</a:t>
             </a:r>
-            <a:endParaRPr sz="1300" b="1">
-              <a:solidFill>
-                <a:srgbClr val="0F6B6B"/>
-              </a:solidFill>
-              <a:latin typeface="Calibri" panose="020F0502020204030204"/>
-            </a:endParaRPr>
           </a:p>
         </p:txBody>
       </p:sp>
@@ -10100,16 +10114,10 @@
                 <a:solidFill>
                   <a:srgbClr val="1A2B2D"/>
                 </a:solidFill>
-                <a:latin typeface="Calibri" panose="020F0502020204030204"/>
+                <a:latin typeface="Calibri"/>
               </a:rPr>
               <a:t>pandas, numpy</a:t>
             </a:r>
-            <a:endParaRPr sz="1400" b="0">
-              <a:solidFill>
-                <a:srgbClr val="1A2B2D"/>
-              </a:solidFill>
-              <a:latin typeface="Calibri" panose="020F0502020204030204"/>
-            </a:endParaRPr>
           </a:p>
         </p:txBody>
       </p:sp>
@@ -10145,16 +10153,10 @@
                 <a:solidFill>
                   <a:srgbClr val="0F6B6B"/>
                 </a:solidFill>
-                <a:latin typeface="Calibri" panose="020F0502020204030204"/>
+                <a:latin typeface="Calibri"/>
               </a:rPr>
               <a:t>Сервер</a:t>
             </a:r>
-            <a:endParaRPr sz="1300" b="1">
-              <a:solidFill>
-                <a:srgbClr val="0F6B6B"/>
-              </a:solidFill>
-              <a:latin typeface="Calibri" panose="020F0502020204030204"/>
-            </a:endParaRPr>
           </a:p>
         </p:txBody>
       </p:sp>
@@ -10190,16 +10192,10 @@
                 <a:solidFill>
                   <a:srgbClr val="1A2B2D"/>
                 </a:solidFill>
-                <a:latin typeface="Calibri" panose="020F0502020204030204"/>
+                <a:latin typeface="Calibri"/>
               </a:rPr>
               <a:t>FastAPI</a:t>
             </a:r>
-            <a:endParaRPr sz="1400" b="0">
-              <a:solidFill>
-                <a:srgbClr val="1A2B2D"/>
-              </a:solidFill>
-              <a:latin typeface="Calibri" panose="020F0502020204030204"/>
-            </a:endParaRPr>
           </a:p>
         </p:txBody>
       </p:sp>
@@ -10235,16 +10231,10 @@
                 <a:solidFill>
                   <a:srgbClr val="0F6B6B"/>
                 </a:solidFill>
-                <a:latin typeface="Calibri" panose="020F0502020204030204"/>
+                <a:latin typeface="Calibri"/>
               </a:rPr>
               <a:t>База</a:t>
             </a:r>
-            <a:endParaRPr sz="1300" b="1">
-              <a:solidFill>
-                <a:srgbClr val="0F6B6B"/>
-              </a:solidFill>
-              <a:latin typeface="Calibri" panose="020F0502020204030204"/>
-            </a:endParaRPr>
           </a:p>
         </p:txBody>
       </p:sp>
@@ -10280,16 +10270,10 @@
                 <a:solidFill>
                   <a:srgbClr val="1A2B2D"/>
                 </a:solidFill>
-                <a:latin typeface="Calibri" panose="020F0502020204030204"/>
+                <a:latin typeface="Calibri"/>
               </a:rPr>
               <a:t>PostgreSQL</a:t>
             </a:r>
-            <a:endParaRPr sz="1400" b="0">
-              <a:solidFill>
-                <a:srgbClr val="1A2B2D"/>
-              </a:solidFill>
-              <a:latin typeface="Calibri" panose="020F0502020204030204"/>
-            </a:endParaRPr>
           </a:p>
         </p:txBody>
       </p:sp>
@@ -10325,16 +10309,10 @@
                 <a:solidFill>
                   <a:srgbClr val="0F6B6B"/>
                 </a:solidFill>
-                <a:latin typeface="Calibri" panose="020F0502020204030204"/>
+                <a:latin typeface="Calibri"/>
               </a:rPr>
               <a:t>Запуск</a:t>
             </a:r>
-            <a:endParaRPr sz="1300" b="1">
-              <a:solidFill>
-                <a:srgbClr val="0F6B6B"/>
-              </a:solidFill>
-              <a:latin typeface="Calibri" panose="020F0502020204030204"/>
-            </a:endParaRPr>
           </a:p>
         </p:txBody>
       </p:sp>
@@ -10370,16 +10348,10 @@
                 <a:solidFill>
                   <a:srgbClr val="1A2B2D"/>
                 </a:solidFill>
-                <a:latin typeface="Calibri" panose="020F0502020204030204"/>
+                <a:latin typeface="Calibri"/>
               </a:rPr>
               <a:t>Docker, GitLab CI</a:t>
             </a:r>
-            <a:endParaRPr sz="1400" b="0">
-              <a:solidFill>
-                <a:srgbClr val="1A2B2D"/>
-              </a:solidFill>
-              <a:latin typeface="Calibri" panose="020F0502020204030204"/>
-            </a:endParaRPr>
           </a:p>
         </p:txBody>
       </p:sp>
@@ -10415,7 +10387,7 @@
                 <a:solidFill>
                   <a:srgbClr val="5E6F70"/>
                 </a:solidFill>
-                <a:latin typeface="Calibri" panose="020F0502020204030204"/>
+                <a:latin typeface="Calibri"/>
               </a:rPr>
               <a:t>Стек</a:t>
             </a:r>
@@ -10424,7 +10396,7 @@
                 <a:solidFill>
                   <a:srgbClr val="5E6F70"/>
                 </a:solidFill>
-                <a:latin typeface="Calibri" panose="020F0502020204030204"/>
+                <a:latin typeface="Calibri"/>
               </a:rPr>
               <a:t> </a:t>
             </a:r>
@@ -10433,7 +10405,7 @@
                 <a:solidFill>
                   <a:srgbClr val="5E6F70"/>
                 </a:solidFill>
-                <a:latin typeface="Calibri" panose="020F0502020204030204"/>
+                <a:latin typeface="Calibri"/>
               </a:rPr>
               <a:t>предварительный</a:t>
             </a:r>
@@ -10442,7 +10414,7 @@
                 <a:solidFill>
                   <a:srgbClr val="5E6F70"/>
                 </a:solidFill>
-                <a:latin typeface="Calibri" panose="020F0502020204030204"/>
+                <a:latin typeface="Calibri"/>
               </a:rPr>
               <a:t>, </a:t>
             </a:r>
@@ -10451,7 +10423,7 @@
                 <a:solidFill>
                   <a:srgbClr val="5E6F70"/>
                 </a:solidFill>
-                <a:latin typeface="Calibri" panose="020F0502020204030204"/>
+                <a:latin typeface="Calibri"/>
               </a:rPr>
               <a:t>уточним</a:t>
             </a:r>
@@ -10460,7 +10432,7 @@
                 <a:solidFill>
                   <a:srgbClr val="5E6F70"/>
                 </a:solidFill>
-                <a:latin typeface="Calibri" panose="020F0502020204030204"/>
+                <a:latin typeface="Calibri"/>
               </a:rPr>
               <a:t> </a:t>
             </a:r>
@@ -10469,7 +10441,7 @@
                 <a:solidFill>
                   <a:srgbClr val="5E6F70"/>
                 </a:solidFill>
-                <a:latin typeface="Calibri" panose="020F0502020204030204"/>
+                <a:latin typeface="Calibri"/>
               </a:rPr>
               <a:t>в</a:t>
             </a:r>
@@ -10478,7 +10450,7 @@
                 <a:solidFill>
                   <a:srgbClr val="5E6F70"/>
                 </a:solidFill>
-                <a:latin typeface="Calibri" panose="020F0502020204030204"/>
+                <a:latin typeface="Calibri"/>
               </a:rPr>
               <a:t> </a:t>
             </a:r>
@@ -10487,7 +10459,7 @@
                 <a:solidFill>
                   <a:srgbClr val="5E6F70"/>
                 </a:solidFill>
-                <a:latin typeface="Calibri" panose="020F0502020204030204"/>
+                <a:latin typeface="Calibri"/>
               </a:rPr>
               <a:t>следующем</a:t>
             </a:r>
@@ -10496,7 +10468,7 @@
                 <a:solidFill>
                   <a:srgbClr val="5E6F70"/>
                 </a:solidFill>
-                <a:latin typeface="Calibri" panose="020F0502020204030204"/>
+                <a:latin typeface="Calibri"/>
               </a:rPr>
               <a:t> </a:t>
             </a:r>
@@ -10505,7 +10477,7 @@
                 <a:solidFill>
                   <a:srgbClr val="5E6F70"/>
                 </a:solidFill>
-                <a:latin typeface="Calibri" panose="020F0502020204030204"/>
+                <a:latin typeface="Calibri"/>
               </a:rPr>
               <a:t>спринте</a:t>
             </a:r>
@@ -10513,8 +10485,73 @@
               <a:solidFill>
                 <a:srgbClr val="5E6F70"/>
               </a:solidFill>
-              <a:latin typeface="Calibri" panose="020F0502020204030204"/>
+              <a:latin typeface="Calibri"/>
             </a:endParaRPr>
+          </a:p>
+        </p:txBody>
+      </p:sp>
+      <p:sp>
+        <p:nvSpPr>
+          <p:cNvPr id="29" name="Номер слайда 28">
+            <a:extLst>
+              <a:ext uri="{FF2B5EF4-FFF2-40B4-BE49-F238E27FC236}">
+                <a16:creationId xmlns:a16="http://schemas.microsoft.com/office/drawing/2014/main" id="{558D4814-7FC6-B369-90B5-6AAEF5C8D849}"/>
+              </a:ext>
+            </a:extLst>
+          </p:cNvPr>
+          <p:cNvSpPr>
+            <a:spLocks noGrp="1"/>
+          </p:cNvSpPr>
+          <p:nvPr>
+            <p:ph type="sldNum" sz="quarter" idx="12"/>
+          </p:nvPr>
+        </p:nvSpPr>
+        <p:spPr>
+          <a:xfrm>
+            <a:off x="8705088" y="4828032"/>
+            <a:ext cx="320040" cy="237744"/>
+          </a:xfrm>
+        </p:spPr>
+        <p:txBody>
+          <a:bodyPr lIns="0" rIns="0" tIns="0" bIns="0" anchor="ctr"/>
+          <a:lstStyle/>
+          <a:p>
+            <a:pPr algn="r"/>
+            <a:fld id="{C1FF6DA9-008F-8B48-92A6-B652298478BF}" type="slidenum">
+              <a:rPr lang="en-US" smtClean="0" sz="1100" b="0">
+                <a:solidFill>
+                  <a:srgbClr val="5E6F70"/>
+                </a:solidFill>
+                <a:latin typeface="Calibri"/>
+              </a:rPr>
+              <a:t>8</a:t>
+            </a:fld>
+            <a:endParaRPr lang="en-US"/>
+          </a:p>
+        </p:txBody>
+      </p:sp>
+      <p:sp>
+        <p:nvSpPr>
+          <p:cNvPr id="30" name="Нижний колонтитул 29">
+            <a:extLst>
+              <a:ext uri="{FF2B5EF4-FFF2-40B4-BE49-F238E27FC236}">
+                <a16:creationId xmlns:a16="http://schemas.microsoft.com/office/drawing/2014/main" id="{FF1337F4-8E61-8F65-A121-98EF20CA6CD1}"/>
+              </a:ext>
+            </a:extLst>
+          </p:cNvPr>
+          <p:cNvSpPr>
+            <a:spLocks noGrp="1"/>
+          </p:cNvSpPr>
+          <p:nvPr>
+            <p:ph type="ftr" sz="quarter" idx="11"/>
+          </p:nvPr>
+        </p:nvSpPr>
+        <p:spPr/>
+        <p:txBody>
+          <a:bodyPr/>
+          <a:lstStyle/>
+          <a:p>
+            <a:endParaRPr lang="en-US"/>
           </a:p>
         </p:txBody>
       </p:sp>
@@ -10523,6 +10560,18 @@
   <p:clrMapOvr>
     <a:masterClrMapping/>
   </p:clrMapOvr>
+  <mc:AlternateContent xmlns:mc="http://schemas.openxmlformats.org/markup-compatibility/2006">
+    <mc:Choice xmlns:p159="http://schemas.microsoft.com/office/powerpoint/2015/09/main" Requires="p159">
+      <p:transition xmlns:p14="http://schemas.microsoft.com/office/powerpoint/2010/main" spd="slow" p14:dur="2000">
+        <p159:morph option="byObject"/>
+      </p:transition>
+    </mc:Choice>
+    <mc:Fallback>
+      <p:transition spd="slow">
+        <p:fade/>
+      </p:transition>
+    </mc:Fallback>
+  </mc:AlternateContent>
 </p:sld>
 </file>
 
@@ -10583,7 +10632,7 @@
                 <a:solidFill>
                   <a:srgbClr val="FFFFFF"/>
                 </a:solidFill>
-                <a:latin typeface="Cambria" panose="02040503050406030204"/>
+                <a:latin typeface="Cambria"/>
               </a:rPr>
               <a:t>Планы</a:t>
             </a:r>
@@ -10592,7 +10641,7 @@
                 <a:solidFill>
                   <a:srgbClr val="FFFFFF"/>
                 </a:solidFill>
-                <a:latin typeface="Cambria" panose="02040503050406030204"/>
+                <a:latin typeface="Cambria"/>
               </a:rPr>
               <a:t> </a:t>
             </a:r>
@@ -10601,7 +10650,7 @@
                 <a:solidFill>
                   <a:srgbClr val="FFFFFF"/>
                 </a:solidFill>
-                <a:latin typeface="Cambria" panose="02040503050406030204"/>
+                <a:latin typeface="Cambria"/>
               </a:rPr>
               <a:t>на</a:t>
             </a:r>
@@ -10610,7 +10659,7 @@
                 <a:solidFill>
                   <a:srgbClr val="FFFFFF"/>
                 </a:solidFill>
-                <a:latin typeface="Cambria" panose="02040503050406030204"/>
+                <a:latin typeface="Cambria"/>
               </a:rPr>
               <a:t> </a:t>
             </a:r>
@@ -10619,7 +10668,7 @@
                 <a:solidFill>
                   <a:srgbClr val="FFFFFF"/>
                 </a:solidFill>
-                <a:latin typeface="Cambria" panose="02040503050406030204"/>
+                <a:latin typeface="Cambria"/>
               </a:rPr>
               <a:t>следующий</a:t>
             </a:r>
@@ -10628,7 +10677,7 @@
                 <a:solidFill>
                   <a:srgbClr val="FFFFFF"/>
                 </a:solidFill>
-                <a:latin typeface="Cambria" panose="02040503050406030204"/>
+                <a:latin typeface="Cambria"/>
               </a:rPr>
               <a:t> </a:t>
             </a:r>
@@ -10637,7 +10686,7 @@
                 <a:solidFill>
                   <a:srgbClr val="FFFFFF"/>
                 </a:solidFill>
-                <a:latin typeface="Cambria" panose="02040503050406030204"/>
+                <a:latin typeface="Cambria"/>
               </a:rPr>
               <a:t>спринт</a:t>
             </a:r>
@@ -10645,7 +10694,7 @@
               <a:solidFill>
                 <a:srgbClr val="FFFFFF"/>
               </a:solidFill>
-              <a:latin typeface="Cambria" panose="02040503050406030204"/>
+              <a:latin typeface="Cambria"/>
             </a:endParaRPr>
           </a:p>
         </p:txBody>
@@ -10696,16 +10745,10 @@
                 <a:solidFill>
                   <a:srgbClr val="0F3D3E"/>
                 </a:solidFill>
-                <a:latin typeface="Cambria" panose="02040503050406030204"/>
+                <a:latin typeface="Cambria"/>
               </a:rPr>
               <a:t>1</a:t>
             </a:r>
-            <a:endParaRPr sz="2000" b="1">
-              <a:solidFill>
-                <a:srgbClr val="0F3D3E"/>
-              </a:solidFill>
-              <a:latin typeface="Cambria" panose="02040503050406030204"/>
-            </a:endParaRPr>
           </a:p>
         </p:txBody>
       </p:sp>
@@ -10741,16 +10784,10 @@
                 <a:solidFill>
                   <a:srgbClr val="FFFFFF"/>
                 </a:solidFill>
-                <a:latin typeface="Cambria" panose="02040503050406030204"/>
+                <a:latin typeface="Cambria"/>
               </a:rPr>
               <a:t>Загрузка сама</a:t>
             </a:r>
-            <a:endParaRPr sz="2000" b="1">
-              <a:solidFill>
-                <a:srgbClr val="FFFFFF"/>
-              </a:solidFill>
-              <a:latin typeface="Cambria" panose="02040503050406030204"/>
-            </a:endParaRPr>
           </a:p>
         </p:txBody>
       </p:sp>
@@ -10786,16 +10823,10 @@
                 <a:solidFill>
                   <a:srgbClr val="DCE7E4"/>
                 </a:solidFill>
-                <a:latin typeface="Calibri" panose="020F0502020204030204"/>
+                <a:latin typeface="Calibri"/>
               </a:rPr>
               <a:t>Кривая с биржи загружается автоматически на любую дату</a:t>
             </a:r>
-            <a:endParaRPr sz="1400" b="0">
-              <a:solidFill>
-                <a:srgbClr val="DCE7E4"/>
-              </a:solidFill>
-              <a:latin typeface="Calibri" panose="020F0502020204030204"/>
-            </a:endParaRPr>
           </a:p>
         </p:txBody>
       </p:sp>
@@ -10845,16 +10876,10 @@
                 <a:solidFill>
                   <a:srgbClr val="0F3D3E"/>
                 </a:solidFill>
-                <a:latin typeface="Cambria" panose="02040503050406030204"/>
+                <a:latin typeface="Cambria"/>
               </a:rPr>
               <a:t>2</a:t>
             </a:r>
-            <a:endParaRPr sz="2000" b="1">
-              <a:solidFill>
-                <a:srgbClr val="0F3D3E"/>
-              </a:solidFill>
-              <a:latin typeface="Cambria" panose="02040503050406030204"/>
-            </a:endParaRPr>
           </a:p>
         </p:txBody>
       </p:sp>
@@ -10890,16 +10915,10 @@
                 <a:solidFill>
                   <a:srgbClr val="FFFFFF"/>
                 </a:solidFill>
-                <a:latin typeface="Cambria" panose="02040503050406030204"/>
+                <a:latin typeface="Cambria"/>
               </a:rPr>
               <a:t>Расчёт в коде</a:t>
             </a:r>
-            <a:endParaRPr sz="2000" b="1">
-              <a:solidFill>
-                <a:srgbClr val="FFFFFF"/>
-              </a:solidFill>
-              <a:latin typeface="Cambria" panose="02040503050406030204"/>
-            </a:endParaRPr>
           </a:p>
         </p:txBody>
       </p:sp>
@@ -10935,16 +10954,10 @@
                 <a:solidFill>
                   <a:srgbClr val="DCE7E4"/>
                 </a:solidFill>
-                <a:latin typeface="Calibri" panose="020F0502020204030204"/>
+                <a:latin typeface="Calibri"/>
               </a:rPr>
               <a:t>Переносим формулы сценариев из Excel в Python</a:t>
             </a:r>
-            <a:endParaRPr sz="1400" b="0">
-              <a:solidFill>
-                <a:srgbClr val="DCE7E4"/>
-              </a:solidFill>
-              <a:latin typeface="Calibri" panose="020F0502020204030204"/>
-            </a:endParaRPr>
           </a:p>
         </p:txBody>
       </p:sp>
@@ -10994,16 +11007,10 @@
                 <a:solidFill>
                   <a:srgbClr val="0F3D3E"/>
                 </a:solidFill>
-                <a:latin typeface="Cambria" panose="02040503050406030204"/>
+                <a:latin typeface="Cambria"/>
               </a:rPr>
               <a:t>3</a:t>
             </a:r>
-            <a:endParaRPr sz="2000" b="1">
-              <a:solidFill>
-                <a:srgbClr val="0F3D3E"/>
-              </a:solidFill>
-              <a:latin typeface="Cambria" panose="02040503050406030204"/>
-            </a:endParaRPr>
           </a:p>
         </p:txBody>
       </p:sp>
@@ -11039,16 +11046,10 @@
                 <a:solidFill>
                   <a:srgbClr val="FFFFFF"/>
                 </a:solidFill>
-                <a:latin typeface="Cambria" panose="02040503050406030204"/>
+                <a:latin typeface="Cambria"/>
               </a:rPr>
               <a:t>Первый сайт</a:t>
             </a:r>
-            <a:endParaRPr sz="2000" b="1">
-              <a:solidFill>
-                <a:srgbClr val="FFFFFF"/>
-              </a:solidFill>
-              <a:latin typeface="Cambria" panose="02040503050406030204"/>
-            </a:endParaRPr>
           </a:p>
         </p:txBody>
       </p:sp>
@@ -11084,16 +11085,10 @@
                 <a:solidFill>
                   <a:srgbClr val="DCE7E4"/>
                 </a:solidFill>
-                <a:latin typeface="Calibri" panose="020F0502020204030204"/>
+                <a:latin typeface="Calibri"/>
               </a:rPr>
               <a:t>Страница с графиками и выбором сценария</a:t>
             </a:r>
-            <a:endParaRPr sz="1400" b="0">
-              <a:solidFill>
-                <a:srgbClr val="DCE7E4"/>
-              </a:solidFill>
-              <a:latin typeface="Calibri" panose="020F0502020204030204"/>
-            </a:endParaRPr>
           </a:p>
         </p:txBody>
       </p:sp>
@@ -11129,7 +11124,7 @@
                 <a:solidFill>
                   <a:srgbClr val="E0A030"/>
                 </a:solidFill>
-                <a:latin typeface="Cambria" panose="02040503050406030204"/>
+                <a:latin typeface="Cambria"/>
               </a:rPr>
               <a:t>Спасибо</a:t>
             </a:r>
@@ -11138,7 +11133,7 @@
                 <a:solidFill>
                   <a:srgbClr val="E0A030"/>
                 </a:solidFill>
-                <a:latin typeface="Cambria" panose="02040503050406030204"/>
+                <a:latin typeface="Cambria"/>
               </a:rPr>
               <a:t> </a:t>
             </a:r>
@@ -11147,7 +11142,7 @@
                 <a:solidFill>
                   <a:srgbClr val="E0A030"/>
                 </a:solidFill>
-                <a:latin typeface="Cambria" panose="02040503050406030204"/>
+                <a:latin typeface="Cambria"/>
               </a:rPr>
               <a:t>за</a:t>
             </a:r>
@@ -11156,7 +11151,7 @@
                 <a:solidFill>
                   <a:srgbClr val="E0A030"/>
                 </a:solidFill>
-                <a:latin typeface="Cambria" panose="02040503050406030204"/>
+                <a:latin typeface="Cambria"/>
               </a:rPr>
               <a:t> </a:t>
             </a:r>
@@ -11165,7 +11160,7 @@
                 <a:solidFill>
                   <a:srgbClr val="E0A030"/>
                 </a:solidFill>
-                <a:latin typeface="Cambria" panose="02040503050406030204"/>
+                <a:latin typeface="Cambria"/>
               </a:rPr>
               <a:t>внимание</a:t>
             </a:r>
@@ -11174,16 +11169,75 @@
                 <a:solidFill>
                   <a:srgbClr val="E0A030"/>
                 </a:solidFill>
-                <a:latin typeface="Cambria" panose="02040503050406030204"/>
+                <a:latin typeface="Cambria"/>
               </a:rPr>
               <a:t>!</a:t>
             </a:r>
-            <a:endParaRPr sz="2400" b="1" dirty="0">
-              <a:solidFill>
-                <a:srgbClr val="E0A030"/>
-              </a:solidFill>
-              <a:latin typeface="Cambria" panose="02040503050406030204"/>
-            </a:endParaRPr>
+          </a:p>
+        </p:txBody>
+      </p:sp>
+      <p:sp>
+        <p:nvSpPr>
+          <p:cNvPr id="13" name="Номер слайда 12">
+            <a:extLst>
+              <a:ext uri="{FF2B5EF4-FFF2-40B4-BE49-F238E27FC236}">
+                <a16:creationId xmlns:a16="http://schemas.microsoft.com/office/drawing/2014/main" id="{B3055FE1-F118-E906-495C-F65999D14112}"/>
+              </a:ext>
+            </a:extLst>
+          </p:cNvPr>
+          <p:cNvSpPr>
+            <a:spLocks noGrp="1"/>
+          </p:cNvSpPr>
+          <p:nvPr>
+            <p:ph type="sldNum" sz="quarter" idx="12"/>
+          </p:nvPr>
+        </p:nvSpPr>
+        <p:spPr>
+          <a:xfrm>
+            <a:off x="8705088" y="4828032"/>
+            <a:ext cx="320040" cy="237744"/>
+          </a:xfrm>
+        </p:spPr>
+        <p:txBody>
+          <a:bodyPr lIns="0" rIns="0" tIns="0" bIns="0" anchor="ctr"/>
+          <a:lstStyle/>
+          <a:p>
+            <a:pPr algn="r"/>
+            <a:fld id="{C1FF6DA9-008F-8B48-92A6-B652298478BF}" type="slidenum">
+              <a:rPr lang="en-US" smtClean="0" sz="1100" b="0">
+                <a:solidFill>
+                  <a:srgbClr val="C9D8D5"/>
+                </a:solidFill>
+                <a:latin typeface="Calibri"/>
+              </a:rPr>
+              <a:t>9</a:t>
+            </a:fld>
+            <a:endParaRPr lang="en-US"/>
+          </a:p>
+        </p:txBody>
+      </p:sp>
+      <p:sp>
+        <p:nvSpPr>
+          <p:cNvPr id="14" name="Нижний колонтитул 13">
+            <a:extLst>
+              <a:ext uri="{FF2B5EF4-FFF2-40B4-BE49-F238E27FC236}">
+                <a16:creationId xmlns:a16="http://schemas.microsoft.com/office/drawing/2014/main" id="{726B385D-FFE2-B556-13AB-E676B4EB1461}"/>
+              </a:ext>
+            </a:extLst>
+          </p:cNvPr>
+          <p:cNvSpPr>
+            <a:spLocks noGrp="1"/>
+          </p:cNvSpPr>
+          <p:nvPr>
+            <p:ph type="ftr" sz="quarter" idx="11"/>
+          </p:nvPr>
+        </p:nvSpPr>
+        <p:spPr/>
+        <p:txBody>
+          <a:bodyPr/>
+          <a:lstStyle/>
+          <a:p>
+            <a:endParaRPr lang="en-US"/>
           </a:p>
         </p:txBody>
       </p:sp>
@@ -11192,6 +11246,9 @@
   <p:clrMapOvr>
     <a:masterClrMapping/>
   </p:clrMapOvr>
+  <p:transition spd="slow">
+    <p:wipe/>
+  </p:transition>
 </p:sld>
 </file>
 
@@ -11511,11 +11568,7 @@
       </a:style>
     </a:lnDef>
   </a:objectDefaults>
-  <a:extLst>
-    <a:ext uri="{05A4C25C-085E-4340-85A3-A5531E510DB2}">
-      <thm15:themeFamily xmlns:thm15="http://schemas.microsoft.com/office/thememl/2012/main" name="Office Theme" id="{62F939B6-93AF-4DB8-9C6B-D6C7DFDC589F}" vid="{4A3C46E8-61CC-4603-A589-7422A47A8E4A}"/>
-    </a:ext>
-  </a:extLst>
+  <a:extraClrSchemeLst/>
 </a:theme>
 </file>
 
@@ -11562,7 +11615,7 @@
     </a:clrScheme>
     <a:fontScheme name="Стандартная">
       <a:majorFont>
-        <a:latin typeface="Calibri Light"/>
+        <a:latin typeface="Calibri Light" panose="020F0302020204030204"/>
         <a:ea typeface=""/>
         <a:cs typeface=""/>
         <a:font script="Jpan" typeface="游ゴシック Light"/>
@@ -11595,9 +11648,26 @@
         <a:font script="Viet" typeface="Times New Roman"/>
         <a:font script="Uigh" typeface="Microsoft Uighur"/>
         <a:font script="Geor" typeface="Sylfaen"/>
+        <a:font script="Armn" typeface="Arial"/>
+        <a:font script="Bugi" typeface="Leelawadee UI"/>
+        <a:font script="Bopo" typeface="Microsoft JhengHei"/>
+        <a:font script="Java" typeface="Javanese Text"/>
+        <a:font script="Lisu" typeface="Segoe UI"/>
+        <a:font script="Mymr" typeface="Myanmar Text"/>
+        <a:font script="Nkoo" typeface="Ebrima"/>
+        <a:font script="Olck" typeface="Nirmala UI"/>
+        <a:font script="Osma" typeface="Ebrima"/>
+        <a:font script="Phag" typeface="Phagspa"/>
+        <a:font script="Syrn" typeface="Estrangelo Edessa"/>
+        <a:font script="Syrj" typeface="Estrangelo Edessa"/>
+        <a:font script="Syre" typeface="Estrangelo Edessa"/>
+        <a:font script="Sora" typeface="Nirmala UI"/>
+        <a:font script="Tale" typeface="Microsoft Tai Le"/>
+        <a:font script="Talu" typeface="Microsoft New Tai Lue"/>
+        <a:font script="Tfng" typeface="Ebrima"/>
       </a:majorFont>
       <a:minorFont>
-        <a:latin typeface="Calibri"/>
+        <a:latin typeface="Calibri" panose="020F0502020204030204"/>
         <a:ea typeface=""/>
         <a:cs typeface=""/>
         <a:font script="Jpan" typeface="游ゴシック"/>
@@ -11630,6 +11700,23 @@
         <a:font script="Viet" typeface="Arial"/>
         <a:font script="Uigh" typeface="Microsoft Uighur"/>
         <a:font script="Geor" typeface="Sylfaen"/>
+        <a:font script="Armn" typeface="Arial"/>
+        <a:font script="Bugi" typeface="Leelawadee UI"/>
+        <a:font script="Bopo" typeface="Microsoft JhengHei"/>
+        <a:font script="Java" typeface="Javanese Text"/>
+        <a:font script="Lisu" typeface="Segoe UI"/>
+        <a:font script="Mymr" typeface="Myanmar Text"/>
+        <a:font script="Nkoo" typeface="Ebrima"/>
+        <a:font script="Olck" typeface="Nirmala UI"/>
+        <a:font script="Osma" typeface="Ebrima"/>
+        <a:font script="Phag" typeface="Phagspa"/>
+        <a:font script="Syrn" typeface="Estrangelo Edessa"/>
+        <a:font script="Syrj" typeface="Estrangelo Edessa"/>
+        <a:font script="Syre" typeface="Estrangelo Edessa"/>
+        <a:font script="Sora" typeface="Nirmala UI"/>
+        <a:font script="Tale" typeface="Microsoft Tai Le"/>
+        <a:font script="Talu" typeface="Microsoft New Tai Lue"/>
+        <a:font script="Tfng" typeface="Ebrima"/>
       </a:minorFont>
     </a:fontScheme>
     <a:fmtScheme name="Стандартная">
@@ -11770,6 +11857,303 @@
       </a:bgFillStyleLst>
     </a:fmtScheme>
   </a:themeElements>
+  <a:objectDefaults/>
+  <a:extraClrSchemeLst/>
+  <a:extLst>
+    <a:ext uri="{05A4C25C-085E-4340-85A3-A5531E510DB2}">
+      <thm15:themeFamily xmlns:thm15="http://schemas.microsoft.com/office/thememl/2012/main" name="Office Theme" id="{62F939B6-93AF-4DB8-9C6B-D6C7DFDC589F}" vid="{4A3C46E8-61CC-4603-A589-7422A47A8E4A}"/>
+    </a:ext>
+  </a:extLst>
+</a:theme>
+</file>
+
+<file path=ppt/theme/theme3.xml><?xml version="1.0" encoding="utf-8"?>
+<a:theme xmlns:a="http://schemas.openxmlformats.org/drawingml/2006/main" name="Тема Office">
+  <a:themeElements>
+    <a:clrScheme name="Стандартная">
+      <a:dk1>
+        <a:sysClr val="windowText" lastClr="000000"/>
+      </a:dk1>
+      <a:lt1>
+        <a:sysClr val="window" lastClr="FFFFFF"/>
+      </a:lt1>
+      <a:dk2>
+        <a:srgbClr val="44546A"/>
+      </a:dk2>
+      <a:lt2>
+        <a:srgbClr val="E7E6E6"/>
+      </a:lt2>
+      <a:accent1>
+        <a:srgbClr val="4472C4"/>
+      </a:accent1>
+      <a:accent2>
+        <a:srgbClr val="ED7D31"/>
+      </a:accent2>
+      <a:accent3>
+        <a:srgbClr val="A5A5A5"/>
+      </a:accent3>
+      <a:accent4>
+        <a:srgbClr val="FFC000"/>
+      </a:accent4>
+      <a:accent5>
+        <a:srgbClr val="5B9BD5"/>
+      </a:accent5>
+      <a:accent6>
+        <a:srgbClr val="70AD47"/>
+      </a:accent6>
+      <a:hlink>
+        <a:srgbClr val="0563C1"/>
+      </a:hlink>
+      <a:folHlink>
+        <a:srgbClr val="954F72"/>
+      </a:folHlink>
+    </a:clrScheme>
+    <a:fontScheme name="Стандартная">
+      <a:majorFont>
+        <a:latin typeface="Calibri Light" panose="020F0302020204030204"/>
+        <a:ea typeface=""/>
+        <a:cs typeface=""/>
+        <a:font script="Jpan" typeface="游ゴシック Light"/>
+        <a:font script="Hang" typeface="맑은 고딕"/>
+        <a:font script="Hans" typeface="等线 Light"/>
+        <a:font script="Hant" typeface="新細明體"/>
+        <a:font script="Arab" typeface="Times New Roman"/>
+        <a:font script="Hebr" typeface="Times New Roman"/>
+        <a:font script="Thai" typeface="Angsana New"/>
+        <a:font script="Ethi" typeface="Nyala"/>
+        <a:font script="Beng" typeface="Vrinda"/>
+        <a:font script="Gujr" typeface="Shruti"/>
+        <a:font script="Khmr" typeface="MoolBoran"/>
+        <a:font script="Knda" typeface="Tunga"/>
+        <a:font script="Guru" typeface="Raavi"/>
+        <a:font script="Cans" typeface="Euphemia"/>
+        <a:font script="Cher" typeface="Plantagenet Cherokee"/>
+        <a:font script="Yiii" typeface="Microsoft Yi Baiti"/>
+        <a:font script="Tibt" typeface="Microsoft Himalaya"/>
+        <a:font script="Thaa" typeface="MV Boli"/>
+        <a:font script="Deva" typeface="Mangal"/>
+        <a:font script="Telu" typeface="Gautami"/>
+        <a:font script="Taml" typeface="Latha"/>
+        <a:font script="Syrc" typeface="Estrangelo Edessa"/>
+        <a:font script="Orya" typeface="Kalinga"/>
+        <a:font script="Mlym" typeface="Kartika"/>
+        <a:font script="Laoo" typeface="DokChampa"/>
+        <a:font script="Sinh" typeface="Iskoola Pota"/>
+        <a:font script="Mong" typeface="Mongolian Baiti"/>
+        <a:font script="Viet" typeface="Times New Roman"/>
+        <a:font script="Uigh" typeface="Microsoft Uighur"/>
+        <a:font script="Geor" typeface="Sylfaen"/>
+        <a:font script="Armn" typeface="Arial"/>
+        <a:font script="Bugi" typeface="Leelawadee UI"/>
+        <a:font script="Bopo" typeface="Microsoft JhengHei"/>
+        <a:font script="Java" typeface="Javanese Text"/>
+        <a:font script="Lisu" typeface="Segoe UI"/>
+        <a:font script="Mymr" typeface="Myanmar Text"/>
+        <a:font script="Nkoo" typeface="Ebrima"/>
+        <a:font script="Olck" typeface="Nirmala UI"/>
+        <a:font script="Osma" typeface="Ebrima"/>
+        <a:font script="Phag" typeface="Phagspa"/>
+        <a:font script="Syrn" typeface="Estrangelo Edessa"/>
+        <a:font script="Syrj" typeface="Estrangelo Edessa"/>
+        <a:font script="Syre" typeface="Estrangelo Edessa"/>
+        <a:font script="Sora" typeface="Nirmala UI"/>
+        <a:font script="Tale" typeface="Microsoft Tai Le"/>
+        <a:font script="Talu" typeface="Microsoft New Tai Lue"/>
+        <a:font script="Tfng" typeface="Ebrima"/>
+      </a:majorFont>
+      <a:minorFont>
+        <a:latin typeface="Calibri" panose="020F0502020204030204"/>
+        <a:ea typeface=""/>
+        <a:cs typeface=""/>
+        <a:font script="Jpan" typeface="游ゴシック"/>
+        <a:font script="Hang" typeface="맑은 고딕"/>
+        <a:font script="Hans" typeface="等线"/>
+        <a:font script="Hant" typeface="新細明體"/>
+        <a:font script="Arab" typeface="Arial"/>
+        <a:font script="Hebr" typeface="Arial"/>
+        <a:font script="Thai" typeface="Cordia New"/>
+        <a:font script="Ethi" typeface="Nyala"/>
+        <a:font script="Beng" typeface="Vrinda"/>
+        <a:font script="Gujr" typeface="Shruti"/>
+        <a:font script="Khmr" typeface="DaunPenh"/>
+        <a:font script="Knda" typeface="Tunga"/>
+        <a:font script="Guru" typeface="Raavi"/>
+        <a:font script="Cans" typeface="Euphemia"/>
+        <a:font script="Cher" typeface="Plantagenet Cherokee"/>
+        <a:font script="Yiii" typeface="Microsoft Yi Baiti"/>
+        <a:font script="Tibt" typeface="Microsoft Himalaya"/>
+        <a:font script="Thaa" typeface="MV Boli"/>
+        <a:font script="Deva" typeface="Mangal"/>
+        <a:font script="Telu" typeface="Gautami"/>
+        <a:font script="Taml" typeface="Latha"/>
+        <a:font script="Syrc" typeface="Estrangelo Edessa"/>
+        <a:font script="Orya" typeface="Kalinga"/>
+        <a:font script="Mlym" typeface="Kartika"/>
+        <a:font script="Laoo" typeface="DokChampa"/>
+        <a:font script="Sinh" typeface="Iskoola Pota"/>
+        <a:font script="Mong" typeface="Mongolian Baiti"/>
+        <a:font script="Viet" typeface="Arial"/>
+        <a:font script="Uigh" typeface="Microsoft Uighur"/>
+        <a:font script="Geor" typeface="Sylfaen"/>
+        <a:font script="Armn" typeface="Arial"/>
+        <a:font script="Bugi" typeface="Leelawadee UI"/>
+        <a:font script="Bopo" typeface="Microsoft JhengHei"/>
+        <a:font script="Java" typeface="Javanese Text"/>
+        <a:font script="Lisu" typeface="Segoe UI"/>
+        <a:font script="Mymr" typeface="Myanmar Text"/>
+        <a:font script="Nkoo" typeface="Ebrima"/>
+        <a:font script="Olck" typeface="Nirmala UI"/>
+        <a:font script="Osma" typeface="Ebrima"/>
+        <a:font script="Phag" typeface="Phagspa"/>
+        <a:font script="Syrn" typeface="Estrangelo Edessa"/>
+        <a:font script="Syrj" typeface="Estrangelo Edessa"/>
+        <a:font script="Syre" typeface="Estrangelo Edessa"/>
+        <a:font script="Sora" typeface="Nirmala UI"/>
+        <a:font script="Tale" typeface="Microsoft Tai Le"/>
+        <a:font script="Talu" typeface="Microsoft New Tai Lue"/>
+        <a:font script="Tfng" typeface="Ebrima"/>
+      </a:minorFont>
+    </a:fontScheme>
+    <a:fmtScheme name="Стандартная">
+      <a:fillStyleLst>
+        <a:solidFill>
+          <a:schemeClr val="phClr"/>
+        </a:solidFill>
+        <a:gradFill rotWithShape="1">
+          <a:gsLst>
+            <a:gs pos="0">
+              <a:schemeClr val="phClr">
+                <a:lumMod val="110000"/>
+                <a:satMod val="105000"/>
+                <a:tint val="67000"/>
+              </a:schemeClr>
+            </a:gs>
+            <a:gs pos="50000">
+              <a:schemeClr val="phClr">
+                <a:lumMod val="105000"/>
+                <a:satMod val="103000"/>
+                <a:tint val="73000"/>
+              </a:schemeClr>
+            </a:gs>
+            <a:gs pos="100000">
+              <a:schemeClr val="phClr">
+                <a:lumMod val="105000"/>
+                <a:satMod val="109000"/>
+                <a:tint val="81000"/>
+              </a:schemeClr>
+            </a:gs>
+          </a:gsLst>
+          <a:lin ang="5400000" scaled="0"/>
+        </a:gradFill>
+        <a:gradFill rotWithShape="1">
+          <a:gsLst>
+            <a:gs pos="0">
+              <a:schemeClr val="phClr">
+                <a:satMod val="103000"/>
+                <a:lumMod val="102000"/>
+                <a:tint val="94000"/>
+              </a:schemeClr>
+            </a:gs>
+            <a:gs pos="50000">
+              <a:schemeClr val="phClr">
+                <a:satMod val="110000"/>
+                <a:lumMod val="100000"/>
+                <a:shade val="100000"/>
+              </a:schemeClr>
+            </a:gs>
+            <a:gs pos="100000">
+              <a:schemeClr val="phClr">
+                <a:lumMod val="99000"/>
+                <a:satMod val="120000"/>
+                <a:shade val="78000"/>
+              </a:schemeClr>
+            </a:gs>
+          </a:gsLst>
+          <a:lin ang="5400000" scaled="0"/>
+        </a:gradFill>
+      </a:fillStyleLst>
+      <a:lnStyleLst>
+        <a:ln w="6350" cap="flat" cmpd="sng" algn="ctr">
+          <a:solidFill>
+            <a:schemeClr val="phClr"/>
+          </a:solidFill>
+          <a:prstDash val="solid"/>
+          <a:miter lim="800000"/>
+        </a:ln>
+        <a:ln w="12700" cap="flat" cmpd="sng" algn="ctr">
+          <a:solidFill>
+            <a:schemeClr val="phClr"/>
+          </a:solidFill>
+          <a:prstDash val="solid"/>
+          <a:miter lim="800000"/>
+        </a:ln>
+        <a:ln w="19050" cap="flat" cmpd="sng" algn="ctr">
+          <a:solidFill>
+            <a:schemeClr val="phClr"/>
+          </a:solidFill>
+          <a:prstDash val="solid"/>
+          <a:miter lim="800000"/>
+        </a:ln>
+      </a:lnStyleLst>
+      <a:effectStyleLst>
+        <a:effectStyle>
+          <a:effectLst/>
+        </a:effectStyle>
+        <a:effectStyle>
+          <a:effectLst/>
+        </a:effectStyle>
+        <a:effectStyle>
+          <a:effectLst>
+            <a:outerShdw blurRad="57150" dist="19050" dir="5400000" algn="ctr" rotWithShape="0">
+              <a:srgbClr val="000000">
+                <a:alpha val="63000"/>
+              </a:srgbClr>
+            </a:outerShdw>
+          </a:effectLst>
+        </a:effectStyle>
+      </a:effectStyleLst>
+      <a:bgFillStyleLst>
+        <a:solidFill>
+          <a:schemeClr val="phClr"/>
+        </a:solidFill>
+        <a:solidFill>
+          <a:schemeClr val="phClr">
+            <a:tint val="95000"/>
+            <a:satMod val="170000"/>
+          </a:schemeClr>
+        </a:solidFill>
+        <a:gradFill rotWithShape="1">
+          <a:gsLst>
+            <a:gs pos="0">
+              <a:schemeClr val="phClr">
+                <a:tint val="93000"/>
+                <a:satMod val="150000"/>
+                <a:shade val="98000"/>
+                <a:lumMod val="102000"/>
+              </a:schemeClr>
+            </a:gs>
+            <a:gs pos="50000">
+              <a:schemeClr val="phClr">
+                <a:tint val="98000"/>
+                <a:satMod val="130000"/>
+                <a:shade val="90000"/>
+                <a:lumMod val="103000"/>
+              </a:schemeClr>
+            </a:gs>
+            <a:gs pos="100000">
+              <a:schemeClr val="phClr">
+                <a:shade val="63000"/>
+                <a:satMod val="120000"/>
+              </a:schemeClr>
+            </a:gs>
+          </a:gsLst>
+          <a:lin ang="5400000" scaled="0"/>
+        </a:gradFill>
+      </a:bgFillStyleLst>
+    </a:fmtScheme>
+  </a:themeElements>
+  <a:objectDefaults/>
+  <a:extraClrSchemeLst/>
   <a:extLst>
     <a:ext uri="{05A4C25C-085E-4340-85A3-A5531E510DB2}">
       <thm15:themeFamily xmlns:thm15="http://schemas.microsoft.com/office/thememl/2012/main" name="Office Theme" id="{62F939B6-93AF-4DB8-9C6B-D6C7DFDC589F}" vid="{4A3C46E8-61CC-4603-A589-7422A47A8E4A}"/>
